--- a/docs/entrega/Presentacion-Social-Audit-Pro-estilo-manual-final.pptx
+++ b/docs/entrega/Presentacion-Social-Audit-Pro-estilo-manual-final.pptx
@@ -2,26 +2,26 @@
 <file path=ppt/presentation.xml><?xml version="1.0" encoding="utf-8"?>
 <p:presentation xmlns:p="http://schemas.openxmlformats.org/presentationml/2006/main">
   <p:sldMasterIdLst>
-    <p:sldMasterId xmlns:r="http://schemas.openxmlformats.org/officeDocument/2006/relationships" id="2147483648" r:id="R20cacfb7d00f4299"/>
+    <p:sldMasterId xmlns:r="http://schemas.openxmlformats.org/officeDocument/2006/relationships" id="2147483648" r:id="R61bd4b8b73e84179"/>
   </p:sldMasterIdLst>
   <p:notesMasterIdLst>
-    <p:notesMasterId xmlns:r="http://schemas.openxmlformats.org/officeDocument/2006/relationships" r:id="R66a1eefb24ec4041"/>
+    <p:notesMasterId xmlns:r="http://schemas.openxmlformats.org/officeDocument/2006/relationships" r:id="R53aa58a7ba8b472f"/>
   </p:notesMasterIdLst>
   <p:sldIdLst>
-    <p:sldId xmlns:r="http://schemas.openxmlformats.org/officeDocument/2006/relationships" id="256" r:id="Ra8244b044f454036"/>
-    <p:sldId xmlns:r="http://schemas.openxmlformats.org/officeDocument/2006/relationships" id="257" r:id="R6715ea97fad542f5"/>
-    <p:sldId xmlns:r="http://schemas.openxmlformats.org/officeDocument/2006/relationships" id="258" r:id="R95508545b0a14d35"/>
-    <p:sldId xmlns:r="http://schemas.openxmlformats.org/officeDocument/2006/relationships" id="259" r:id="R09cc7e5d58c94c86"/>
-    <p:sldId xmlns:r="http://schemas.openxmlformats.org/officeDocument/2006/relationships" id="260" r:id="R7966873ccc9f4c50"/>
-    <p:sldId xmlns:r="http://schemas.openxmlformats.org/officeDocument/2006/relationships" id="261" r:id="R72f8e922e59647c2"/>
-    <p:sldId xmlns:r="http://schemas.openxmlformats.org/officeDocument/2006/relationships" id="262" r:id="R98e0eb7c7bee4d43"/>
-    <p:sldId xmlns:r="http://schemas.openxmlformats.org/officeDocument/2006/relationships" id="263" r:id="R9fe33f644a23429a"/>
-    <p:sldId xmlns:r="http://schemas.openxmlformats.org/officeDocument/2006/relationships" id="264" r:id="Rfbe8ca6b87ca4aaa"/>
-    <p:sldId xmlns:r="http://schemas.openxmlformats.org/officeDocument/2006/relationships" id="265" r:id="R47d9e1fe75134426"/>
-    <p:sldId xmlns:r="http://schemas.openxmlformats.org/officeDocument/2006/relationships" id="266" r:id="Rc7efe275676346ca"/>
-    <p:sldId xmlns:r="http://schemas.openxmlformats.org/officeDocument/2006/relationships" id="267" r:id="R7140442570474f3d"/>
-    <p:sldId xmlns:r="http://schemas.openxmlformats.org/officeDocument/2006/relationships" id="268" r:id="Re9d5c48e343c4899"/>
-    <p:sldId xmlns:r="http://schemas.openxmlformats.org/officeDocument/2006/relationships" id="269" r:id="R85cd0d48b34f4d15"/>
+    <p:sldId xmlns:r="http://schemas.openxmlformats.org/officeDocument/2006/relationships" id="256" r:id="Rd5f945e285f74974"/>
+    <p:sldId xmlns:r="http://schemas.openxmlformats.org/officeDocument/2006/relationships" id="257" r:id="Rdddef7d278894244"/>
+    <p:sldId xmlns:r="http://schemas.openxmlformats.org/officeDocument/2006/relationships" id="258" r:id="R3de40139cf9b4394"/>
+    <p:sldId xmlns:r="http://schemas.openxmlformats.org/officeDocument/2006/relationships" id="259" r:id="Rf241be67b1544f02"/>
+    <p:sldId xmlns:r="http://schemas.openxmlformats.org/officeDocument/2006/relationships" id="260" r:id="R5f0dea9a51164c5d"/>
+    <p:sldId xmlns:r="http://schemas.openxmlformats.org/officeDocument/2006/relationships" id="261" r:id="R56ccbdd381904f0b"/>
+    <p:sldId xmlns:r="http://schemas.openxmlformats.org/officeDocument/2006/relationships" id="262" r:id="R2d852115af1849f8"/>
+    <p:sldId xmlns:r="http://schemas.openxmlformats.org/officeDocument/2006/relationships" id="263" r:id="Rf4052d8a90194543"/>
+    <p:sldId xmlns:r="http://schemas.openxmlformats.org/officeDocument/2006/relationships" id="264" r:id="R04f3781f6df84d16"/>
+    <p:sldId xmlns:r="http://schemas.openxmlformats.org/officeDocument/2006/relationships" id="265" r:id="R15da8c35eeb74a28"/>
+    <p:sldId xmlns:r="http://schemas.openxmlformats.org/officeDocument/2006/relationships" id="266" r:id="R319aa4900c5d435c"/>
+    <p:sldId xmlns:r="http://schemas.openxmlformats.org/officeDocument/2006/relationships" id="267" r:id="R344d3cc8c4c34745"/>
+    <p:sldId xmlns:r="http://schemas.openxmlformats.org/officeDocument/2006/relationships" id="268" r:id="Rd980c0709e0d403d"/>
+    <p:sldId xmlns:r="http://schemas.openxmlformats.org/officeDocument/2006/relationships" id="269" r:id="R9375f3bfa0694ed4"/>
   </p:sldIdLst>
   <p:sldSz cx="12192000" cy="6858000"/>
   <p:notesSz cx="6858000" cy="9144000"/>
@@ -1433,7 +1433,7 @@
   </p:cSld>
   <p:clrMap bg1="lt1" tx1="dk1" bg2="lt2" tx2="dk2" accent1="accent1" accent2="accent2" accent3="accent3" accent4="accent4" accent5="accent5" accent6="accent6" hlink="hlink" folHlink="folHlink"/>
   <p:sldLayoutIdLst>
-    <p:sldLayoutId xmlns:r="http://schemas.openxmlformats.org/officeDocument/2006/relationships" id="2147483649" r:id="Re7ec85efc0264126"/>
+    <p:sldLayoutId xmlns:r="http://schemas.openxmlformats.org/officeDocument/2006/relationships" id="2147483649" r:id="R56bbf8536a734dcb"/>
   </p:sldLayoutIdLst>
   <p:txStyles>
     <p:titleStyle>
@@ -1988,7 +1988,7 @@
           <p:nvPr/>
         </p:nvPicPr>
         <p:blipFill>
-          <a:blip xmlns:r="http://schemas.openxmlformats.org/officeDocument/2006/relationships" xmlns:a="http://schemas.openxmlformats.org/drawingml/2006/main" r:embed="R6d30b2671f1f46fa"/>
+          <a:blip xmlns:r="http://schemas.openxmlformats.org/officeDocument/2006/relationships" xmlns:a="http://schemas.openxmlformats.org/drawingml/2006/main" r:embed="R8874b1c008d14e93"/>
           <a:srcRect xmlns:a="http://schemas.openxmlformats.org/drawingml/2006/main" l="25815" t="0" r="25815" b="0"/>
           <a:stretch xmlns:a="http://schemas.openxmlformats.org/drawingml/2006/main">
             <a:fillRect l="0" t="0" r="0" b="0"/>
@@ -2011,7 +2011,7 @@
           <p:cNvPr id="2" name="">
             <a:extLst xmlns:a="http://schemas.openxmlformats.org/drawingml/2006/main">
               <a:ext uri="{FF2B5EF4-FFF2-40B4-BE49-F238E27FC236}">
-                <a16:creationId xmlns:a16="http://schemas.microsoft.com/office/drawing/2014/main" id="{2DD20626-EA44-4D9F-A51C-FC938EB487E8}"/>
+                <a16:creationId xmlns:a16="http://schemas.microsoft.com/office/drawing/2014/main" id="{D30DC486-A733-43CC-955D-2C419570668A}"/>
               </a:ext>
             </a:extLst>
           </p:cNvPr>
@@ -2034,7 +2034,9 @@
           </a:ln>
         </p:spPr>
         <p:txBody>
-          <a:bodyPr xmlns:a="http://schemas.openxmlformats.org/drawingml/2006/main"/>
+          <a:bodyPr xmlns:a="http://schemas.openxmlformats.org/drawingml/2006/main">
+            <a:normAutofit fontScale="93860"/>
+          </a:bodyPr>
           <a:lstStyle xmlns:a="http://schemas.openxmlformats.org/drawingml/2006/main"/>
           <a:p xmlns:a="http://schemas.openxmlformats.org/drawingml/2006/main">
             <a:pPr>
@@ -2066,7 +2068,7 @@
           <p:cNvPr id="3" name="">
             <a:extLst xmlns:a="http://schemas.openxmlformats.org/drawingml/2006/main">
               <a:ext uri="{FF2B5EF4-FFF2-40B4-BE49-F238E27FC236}">
-                <a16:creationId xmlns:a16="http://schemas.microsoft.com/office/drawing/2014/main" id="{033741EC-C1B2-4237-BF21-9ED5EAD2B835}"/>
+                <a16:creationId xmlns:a16="http://schemas.microsoft.com/office/drawing/2014/main" id="{9707267A-930D-409A-89B0-C07D570BADA6}"/>
               </a:ext>
             </a:extLst>
           </p:cNvPr>
@@ -2089,7 +2091,9 @@
           </a:ln>
         </p:spPr>
         <p:txBody>
-          <a:bodyPr xmlns:a="http://schemas.openxmlformats.org/drawingml/2006/main"/>
+          <a:bodyPr xmlns:a="http://schemas.openxmlformats.org/drawingml/2006/main">
+            <a:normAutofit fontScale="100000"/>
+          </a:bodyPr>
           <a:lstStyle xmlns:a="http://schemas.openxmlformats.org/drawingml/2006/main"/>
           <a:p xmlns:a="http://schemas.openxmlformats.org/drawingml/2006/main">
             <a:pPr>
@@ -2144,7 +2148,7 @@
           <p:cNvPr id="4" name="">
             <a:extLst xmlns:a="http://schemas.openxmlformats.org/drawingml/2006/main">
               <a:ext uri="{FF2B5EF4-FFF2-40B4-BE49-F238E27FC236}">
-                <a16:creationId xmlns:a16="http://schemas.microsoft.com/office/drawing/2014/main" id="{C5F2BBC7-C6AA-47C9-B3D4-96A3124AA972}"/>
+                <a16:creationId xmlns:a16="http://schemas.microsoft.com/office/drawing/2014/main" id="{44AD7B88-D67B-4615-8345-981991EC1E2D}"/>
               </a:ext>
             </a:extLst>
           </p:cNvPr>
@@ -2167,7 +2171,9 @@
           </a:ln>
         </p:spPr>
         <p:txBody>
-          <a:bodyPr xmlns:a="http://schemas.openxmlformats.org/drawingml/2006/main"/>
+          <a:bodyPr xmlns:a="http://schemas.openxmlformats.org/drawingml/2006/main">
+            <a:normAutofit fontScale="93458"/>
+          </a:bodyPr>
           <a:lstStyle xmlns:a="http://schemas.openxmlformats.org/drawingml/2006/main"/>
           <a:p xmlns:a="http://schemas.openxmlformats.org/drawingml/2006/main">
             <a:pPr>
@@ -2199,7 +2205,7 @@
           <p:cNvPr id="5" name="">
             <a:extLst xmlns:a="http://schemas.openxmlformats.org/drawingml/2006/main">
               <a:ext uri="{FF2B5EF4-FFF2-40B4-BE49-F238E27FC236}">
-                <a16:creationId xmlns:a16="http://schemas.microsoft.com/office/drawing/2014/main" id="{14B35AC9-28A6-42F6-AD96-4E059D378BA5}"/>
+                <a16:creationId xmlns:a16="http://schemas.microsoft.com/office/drawing/2014/main" id="{351DF8CA-A739-489E-9BF7-1225C56410EB}"/>
               </a:ext>
             </a:extLst>
           </p:cNvPr>
@@ -2222,7 +2228,9 @@
           </a:ln>
         </p:spPr>
         <p:txBody>
-          <a:bodyPr xmlns:a="http://schemas.openxmlformats.org/drawingml/2006/main"/>
+          <a:bodyPr xmlns:a="http://schemas.openxmlformats.org/drawingml/2006/main">
+            <a:normAutofit fontScale="95833"/>
+          </a:bodyPr>
           <a:lstStyle xmlns:a="http://schemas.openxmlformats.org/drawingml/2006/main"/>
           <a:p xmlns:a="http://schemas.openxmlformats.org/drawingml/2006/main">
             <a:pPr>
@@ -2254,7 +2262,7 @@
           <p:cNvPr id="6" name="">
             <a:extLst xmlns:a="http://schemas.openxmlformats.org/drawingml/2006/main">
               <a:ext uri="{FF2B5EF4-FFF2-40B4-BE49-F238E27FC236}">
-                <a16:creationId xmlns:a16="http://schemas.microsoft.com/office/drawing/2014/main" id="{1646FEE4-DF19-43C7-A886-466B51645F15}"/>
+                <a16:creationId xmlns:a16="http://schemas.microsoft.com/office/drawing/2014/main" id="{86F65646-55BA-4117-AD36-BB51CE8DA905}"/>
               </a:ext>
             </a:extLst>
           </p:cNvPr>
@@ -2277,7 +2285,9 @@
           </a:ln>
         </p:spPr>
         <p:txBody>
-          <a:bodyPr xmlns:a="http://schemas.openxmlformats.org/drawingml/2006/main"/>
+          <a:bodyPr xmlns:a="http://schemas.openxmlformats.org/drawingml/2006/main">
+            <a:normAutofit fontScale="85556"/>
+          </a:bodyPr>
           <a:lstStyle xmlns:a="http://schemas.openxmlformats.org/drawingml/2006/main"/>
           <a:p xmlns:a="http://schemas.openxmlformats.org/drawingml/2006/main">
             <a:pPr>
@@ -2307,7 +2317,7 @@
     </p:spTree>
     <p:extLst>
       <p:ext uri="{BB962C8B-B14F-4D97-AF65-F5344CB8AC3E}">
-        <p14:creationId xmlns:p14="http://schemas.microsoft.com/office/powerpoint/2010/main" val="1555968488"/>
+        <p14:creationId xmlns:p14="http://schemas.microsoft.com/office/powerpoint/2010/main" val="1578944973"/>
       </p:ext>
     </p:extLst>
   </p:cSld>
@@ -2338,7 +2348,7 @@
           <p:cNvPr id="25" name="">
             <a:extLst xmlns:a="http://schemas.openxmlformats.org/drawingml/2006/main">
               <a:ext uri="{FF2B5EF4-FFF2-40B4-BE49-F238E27FC236}">
-                <a16:creationId xmlns:a16="http://schemas.microsoft.com/office/drawing/2014/main" id="{0FD5CB72-CF7C-4E93-8C4E-129B49CCB630}"/>
+                <a16:creationId xmlns:a16="http://schemas.microsoft.com/office/drawing/2014/main" id="{64530A96-CED1-4497-862F-18E18D907757}"/>
               </a:ext>
             </a:extLst>
           </p:cNvPr>
@@ -2361,7 +2371,9 @@
           </a:ln>
         </p:spPr>
         <p:txBody>
-          <a:bodyPr xmlns:a="http://schemas.openxmlformats.org/drawingml/2006/main"/>
+          <a:bodyPr xmlns:a="http://schemas.openxmlformats.org/drawingml/2006/main">
+            <a:normAutofit fontScale="95175"/>
+          </a:bodyPr>
           <a:lstStyle xmlns:a="http://schemas.openxmlformats.org/drawingml/2006/main"/>
           <a:p xmlns:a="http://schemas.openxmlformats.org/drawingml/2006/main">
             <a:pPr>
@@ -2393,7 +2405,7 @@
           <p:cNvPr id="2" name="">
             <a:extLst xmlns:a="http://schemas.openxmlformats.org/drawingml/2006/main">
               <a:ext uri="{FF2B5EF4-FFF2-40B4-BE49-F238E27FC236}">
-                <a16:creationId xmlns:a16="http://schemas.microsoft.com/office/drawing/2014/main" id="{186D03E8-7478-49A6-BB68-549CDA37A35A}"/>
+                <a16:creationId xmlns:a16="http://schemas.microsoft.com/office/drawing/2014/main" id="{11AD2F38-D810-46D1-88A5-5C9F6E8966DB}"/>
               </a:ext>
             </a:extLst>
           </p:cNvPr>
@@ -2427,7 +2439,7 @@
           <p:cNvPr id="3" name="">
             <a:extLst xmlns:a="http://schemas.openxmlformats.org/drawingml/2006/main">
               <a:ext uri="{FF2B5EF4-FFF2-40B4-BE49-F238E27FC236}">
-                <a16:creationId xmlns:a16="http://schemas.microsoft.com/office/drawing/2014/main" id="{EFB6FA75-2915-4E27-B451-8DBCEB9ED5D6}"/>
+                <a16:creationId xmlns:a16="http://schemas.microsoft.com/office/drawing/2014/main" id="{90FCB267-45C5-458C-AB56-9368634965F3}"/>
               </a:ext>
             </a:extLst>
           </p:cNvPr>
@@ -2441,10 +2453,8 @@
             <a:off x="962025" y="2286000"/>
             <a:ext cx="704850" cy="704850"/>
           </a:xfrm>
-          <a:prstGeom xmlns:a="http://schemas.openxmlformats.org/drawingml/2006/main" prst="roundRect">
-            <a:avLst>
-              <a:gd name="adj" fmla="val 50000"/>
-            </a:avLst>
+          <a:prstGeom xmlns:a="http://schemas.openxmlformats.org/drawingml/2006/main" prst="ellipse">
+            <a:avLst/>
           </a:prstGeom>
           <a:solidFill xmlns:a="http://schemas.openxmlformats.org/drawingml/2006/main">
             <a:srgbClr val="1174B7"/>
@@ -2461,36 +2471,95 @@
           <p:cNvPr id="4" name="">
             <a:extLst xmlns:a="http://schemas.openxmlformats.org/drawingml/2006/main">
               <a:ext uri="{FF2B5EF4-FFF2-40B4-BE49-F238E27FC236}">
-                <a16:creationId xmlns:a16="http://schemas.microsoft.com/office/drawing/2014/main" id="{C81B57C4-81BE-4999-AEB0-0F21E7A1D413}"/>
-              </a:ext>
-            </a:extLst>
-          </p:cNvPr>
-          <p:cNvSpPr>
-            <a:spLocks xmlns:a="http://schemas.openxmlformats.org/drawingml/2006/main" noGrp="1"/>
-          </p:cNvSpPr>
-          <p:nvPr/>
-        </p:nvSpPr>
-        <p:spPr>
-          <a:xfrm xmlns:a="http://schemas.openxmlformats.org/drawingml/2006/main">
-            <a:off x="962025" y="2438400"/>
-            <a:ext cx="704850" cy="381000"/>
-          </a:xfrm>
-          <a:prstGeom xmlns:a="http://schemas.openxmlformats.org/drawingml/2006/main" prst="rect">
-            <a:avLst/>
-          </a:prstGeom>
-          <a:noFill xmlns:a="http://schemas.openxmlformats.org/drawingml/2006/main"/>
-          <a:ln xmlns:a="http://schemas.openxmlformats.org/drawingml/2006/main" w="0">
-            <a:noFill/>
-          </a:ln>
-        </p:spPr>
-        <p:txBody>
-          <a:bodyPr xmlns:a="http://schemas.openxmlformats.org/drawingml/2006/main"/>
+                <a16:creationId xmlns:a16="http://schemas.microsoft.com/office/drawing/2014/main" id="{3FC41217-93C0-4EC3-80D2-210D50C01F30}"/>
+              </a:ext>
+            </a:extLst>
+          </p:cNvPr>
+          <p:cNvSpPr>
+            <a:spLocks xmlns:a="http://schemas.openxmlformats.org/drawingml/2006/main" noGrp="1"/>
+          </p:cNvSpPr>
+          <p:nvPr/>
+        </p:nvSpPr>
+        <p:spPr>
+          <a:xfrm xmlns:a="http://schemas.openxmlformats.org/drawingml/2006/main">
+            <a:off x="962025" y="2286000"/>
+            <a:ext cx="704850" cy="704850"/>
+          </a:xfrm>
+          <a:prstGeom xmlns:a="http://schemas.openxmlformats.org/drawingml/2006/main" prst="rect">
+            <a:avLst/>
+          </a:prstGeom>
+          <a:noFill xmlns:a="http://schemas.openxmlformats.org/drawingml/2006/main"/>
+          <a:ln xmlns:a="http://schemas.openxmlformats.org/drawingml/2006/main" w="0">
+            <a:noFill/>
+          </a:ln>
+        </p:spPr>
+        <p:txBody>
+          <a:bodyPr xmlns:a="http://schemas.openxmlformats.org/drawingml/2006/main" lIns="0" tIns="0" rIns="0" bIns="0" anchor="ctr">
+            <a:normAutofit fontScale="100000"/>
+          </a:bodyPr>
+          <a:lstStyle xmlns:a="http://schemas.openxmlformats.org/drawingml/2006/main"/>
+          <a:p xmlns:a="http://schemas.openxmlformats.org/drawingml/2006/main">
+            <a:pPr algn="ctr">
+              <a:defRPr sz="1725" b="1">
+                <a:solidFill>
+                  <a:srgbClr val="FFFFFF"/>
+                </a:solidFill>
+                <a:latin typeface="Arial"/>
+                <a:ea typeface="Arial"/>
+                <a:cs typeface="Arial"/>
+              </a:defRPr>
+            </a:pPr>
+            <a:r>
+              <a:rPr sz="1725" b="1">
+                <a:solidFill>
+                  <a:srgbClr val="FFFFFF"/>
+                </a:solidFill>
+                <a:latin typeface="Arial"/>
+                <a:ea typeface="Arial"/>
+                <a:cs typeface="Arial"/>
+              </a:rPr>
+              <a:t>01</a:t>
+            </a:r>
+          </a:p>
+        </p:txBody>
+      </p:sp>
+      <p:sp>
+        <p:nvSpPr>
+          <p:cNvPr id="5" name="">
+            <a:extLst xmlns:a="http://schemas.openxmlformats.org/drawingml/2006/main">
+              <a:ext uri="{FF2B5EF4-FFF2-40B4-BE49-F238E27FC236}">
+                <a16:creationId xmlns:a16="http://schemas.microsoft.com/office/drawing/2014/main" id="{1EEF25C8-D1D3-4BF3-AF96-0AEC0F8C0A47}"/>
+              </a:ext>
+            </a:extLst>
+          </p:cNvPr>
+          <p:cNvSpPr>
+            <a:spLocks xmlns:a="http://schemas.openxmlformats.org/drawingml/2006/main" noGrp="1"/>
+          </p:cNvSpPr>
+          <p:nvPr/>
+        </p:nvSpPr>
+        <p:spPr>
+          <a:xfrm xmlns:a="http://schemas.openxmlformats.org/drawingml/2006/main">
+            <a:off x="1905000" y="2219325"/>
+            <a:ext cx="3333750" cy="295275"/>
+          </a:xfrm>
+          <a:prstGeom xmlns:a="http://schemas.openxmlformats.org/drawingml/2006/main" prst="rect">
+            <a:avLst/>
+          </a:prstGeom>
+          <a:noFill xmlns:a="http://schemas.openxmlformats.org/drawingml/2006/main"/>
+          <a:ln xmlns:a="http://schemas.openxmlformats.org/drawingml/2006/main" w="0">
+            <a:noFill/>
+          </a:ln>
+        </p:spPr>
+        <p:txBody>
+          <a:bodyPr xmlns:a="http://schemas.openxmlformats.org/drawingml/2006/main">
+            <a:normAutofit fontScale="77536"/>
+          </a:bodyPr>
           <a:lstStyle xmlns:a="http://schemas.openxmlformats.org/drawingml/2006/main"/>
           <a:p xmlns:a="http://schemas.openxmlformats.org/drawingml/2006/main">
             <a:pPr>
               <a:defRPr sz="1725" b="1">
                 <a:solidFill>
-                  <a:srgbClr val="FFFFFF"/>
+                  <a:srgbClr val="1174B7"/>
                 </a:solidFill>
                 <a:latin typeface="Arial"/>
                 <a:ea typeface="Arial"/>
@@ -2500,66 +2569,11 @@
             <a:r>
               <a:rPr sz="1725" b="1">
                 <a:solidFill>
-                  <a:srgbClr val="FFFFFF"/>
-                </a:solidFill>
-                <a:latin typeface="Arial"/>
-                <a:ea typeface="Arial"/>
-                <a:cs typeface="Arial"/>
-              </a:rPr>
-              <a:t>01</a:t>
-            </a:r>
-          </a:p>
-        </p:txBody>
-      </p:sp>
-      <p:sp>
-        <p:nvSpPr>
-          <p:cNvPr id="5" name="">
-            <a:extLst xmlns:a="http://schemas.openxmlformats.org/drawingml/2006/main">
-              <a:ext uri="{FF2B5EF4-FFF2-40B4-BE49-F238E27FC236}">
-                <a16:creationId xmlns:a16="http://schemas.microsoft.com/office/drawing/2014/main" id="{5323055B-DC72-45B0-AB5B-8BCCB697A276}"/>
-              </a:ext>
-            </a:extLst>
-          </p:cNvPr>
-          <p:cNvSpPr>
-            <a:spLocks xmlns:a="http://schemas.openxmlformats.org/drawingml/2006/main" noGrp="1"/>
-          </p:cNvSpPr>
-          <p:nvPr/>
-        </p:nvSpPr>
-        <p:spPr>
-          <a:xfrm xmlns:a="http://schemas.openxmlformats.org/drawingml/2006/main">
-            <a:off x="1905000" y="2219325"/>
-            <a:ext cx="3333750" cy="295275"/>
-          </a:xfrm>
-          <a:prstGeom xmlns:a="http://schemas.openxmlformats.org/drawingml/2006/main" prst="rect">
-            <a:avLst/>
-          </a:prstGeom>
-          <a:noFill xmlns:a="http://schemas.openxmlformats.org/drawingml/2006/main"/>
-          <a:ln xmlns:a="http://schemas.openxmlformats.org/drawingml/2006/main" w="0">
-            <a:noFill/>
-          </a:ln>
-        </p:spPr>
-        <p:txBody>
-          <a:bodyPr xmlns:a="http://schemas.openxmlformats.org/drawingml/2006/main"/>
-          <a:lstStyle xmlns:a="http://schemas.openxmlformats.org/drawingml/2006/main"/>
-          <a:p xmlns:a="http://schemas.openxmlformats.org/drawingml/2006/main">
-            <a:pPr>
-              <a:defRPr sz="1725" b="1">
-                <a:solidFill>
                   <a:srgbClr val="1174B7"/>
                 </a:solidFill>
                 <a:latin typeface="Arial"/>
                 <a:ea typeface="Arial"/>
                 <a:cs typeface="Arial"/>
-              </a:defRPr>
-            </a:pPr>
-            <a:r>
-              <a:rPr sz="1725" b="1">
-                <a:solidFill>
-                  <a:srgbClr val="1174B7"/>
-                </a:solidFill>
-                <a:latin typeface="Arial"/>
-                <a:ea typeface="Arial"/>
-                <a:cs typeface="Arial"/>
               </a:rPr>
               <a:t>Acceso</a:t>
             </a:r>
@@ -2571,7 +2585,7 @@
           <p:cNvPr id="6" name="">
             <a:extLst xmlns:a="http://schemas.openxmlformats.org/drawingml/2006/main">
               <a:ext uri="{FF2B5EF4-FFF2-40B4-BE49-F238E27FC236}">
-                <a16:creationId xmlns:a16="http://schemas.microsoft.com/office/drawing/2014/main" id="{D06951E5-ADA7-4CC5-A4D8-44F3ADBA201D}"/>
+                <a16:creationId xmlns:a16="http://schemas.microsoft.com/office/drawing/2014/main" id="{8B73B029-13CB-4EA6-80DE-E1FC21C05FFE}"/>
               </a:ext>
             </a:extLst>
           </p:cNvPr>
@@ -2594,7 +2608,9 @@
           </a:ln>
         </p:spPr>
         <p:txBody>
-          <a:bodyPr xmlns:a="http://schemas.openxmlformats.org/drawingml/2006/main"/>
+          <a:bodyPr xmlns:a="http://schemas.openxmlformats.org/drawingml/2006/main">
+            <a:normAutofit fontScale="87037"/>
+          </a:bodyPr>
           <a:lstStyle xmlns:a="http://schemas.openxmlformats.org/drawingml/2006/main"/>
           <a:p xmlns:a="http://schemas.openxmlformats.org/drawingml/2006/main">
             <a:pPr>
@@ -2626,7 +2642,7 @@
           <p:cNvPr id="7" name="">
             <a:extLst xmlns:a="http://schemas.openxmlformats.org/drawingml/2006/main">
               <a:ext uri="{FF2B5EF4-FFF2-40B4-BE49-F238E27FC236}">
-                <a16:creationId xmlns:a16="http://schemas.microsoft.com/office/drawing/2014/main" id="{3F0C737C-A128-4F4B-A9DA-320ADDE59C7F}"/>
+                <a16:creationId xmlns:a16="http://schemas.microsoft.com/office/drawing/2014/main" id="{A7979633-2775-4878-9B4E-A7A9271E72FB}"/>
               </a:ext>
             </a:extLst>
           </p:cNvPr>
@@ -2660,7 +2676,7 @@
           <p:cNvPr id="8" name="">
             <a:extLst xmlns:a="http://schemas.openxmlformats.org/drawingml/2006/main">
               <a:ext uri="{FF2B5EF4-FFF2-40B4-BE49-F238E27FC236}">
-                <a16:creationId xmlns:a16="http://schemas.microsoft.com/office/drawing/2014/main" id="{AF8B4013-5C27-46CD-98A1-C1698302EBFB}"/>
+                <a16:creationId xmlns:a16="http://schemas.microsoft.com/office/drawing/2014/main" id="{51118094-2BA2-4DD1-B42C-B82F3AEBF5C0}"/>
               </a:ext>
             </a:extLst>
           </p:cNvPr>
@@ -2674,10 +2690,8 @@
             <a:off x="6438900" y="2286000"/>
             <a:ext cx="704850" cy="704850"/>
           </a:xfrm>
-          <a:prstGeom xmlns:a="http://schemas.openxmlformats.org/drawingml/2006/main" prst="roundRect">
-            <a:avLst>
-              <a:gd name="adj" fmla="val 50000"/>
-            </a:avLst>
+          <a:prstGeom xmlns:a="http://schemas.openxmlformats.org/drawingml/2006/main" prst="ellipse">
+            <a:avLst/>
           </a:prstGeom>
           <a:solidFill xmlns:a="http://schemas.openxmlformats.org/drawingml/2006/main">
             <a:srgbClr val="17A7B9"/>
@@ -2694,36 +2708,95 @@
           <p:cNvPr id="9" name="">
             <a:extLst xmlns:a="http://schemas.openxmlformats.org/drawingml/2006/main">
               <a:ext uri="{FF2B5EF4-FFF2-40B4-BE49-F238E27FC236}">
-                <a16:creationId xmlns:a16="http://schemas.microsoft.com/office/drawing/2014/main" id="{311A1D40-5870-4F9C-82E9-A1B972A952BE}"/>
-              </a:ext>
-            </a:extLst>
-          </p:cNvPr>
-          <p:cNvSpPr>
-            <a:spLocks xmlns:a="http://schemas.openxmlformats.org/drawingml/2006/main" noGrp="1"/>
-          </p:cNvSpPr>
-          <p:nvPr/>
-        </p:nvSpPr>
-        <p:spPr>
-          <a:xfrm xmlns:a="http://schemas.openxmlformats.org/drawingml/2006/main">
-            <a:off x="6438900" y="2438400"/>
-            <a:ext cx="704850" cy="381000"/>
-          </a:xfrm>
-          <a:prstGeom xmlns:a="http://schemas.openxmlformats.org/drawingml/2006/main" prst="rect">
-            <a:avLst/>
-          </a:prstGeom>
-          <a:noFill xmlns:a="http://schemas.openxmlformats.org/drawingml/2006/main"/>
-          <a:ln xmlns:a="http://schemas.openxmlformats.org/drawingml/2006/main" w="0">
-            <a:noFill/>
-          </a:ln>
-        </p:spPr>
-        <p:txBody>
-          <a:bodyPr xmlns:a="http://schemas.openxmlformats.org/drawingml/2006/main"/>
+                <a16:creationId xmlns:a16="http://schemas.microsoft.com/office/drawing/2014/main" id="{2EBA91A0-F470-4C78-B260-3419630046A0}"/>
+              </a:ext>
+            </a:extLst>
+          </p:cNvPr>
+          <p:cNvSpPr>
+            <a:spLocks xmlns:a="http://schemas.openxmlformats.org/drawingml/2006/main" noGrp="1"/>
+          </p:cNvSpPr>
+          <p:nvPr/>
+        </p:nvSpPr>
+        <p:spPr>
+          <a:xfrm xmlns:a="http://schemas.openxmlformats.org/drawingml/2006/main">
+            <a:off x="6438900" y="2286000"/>
+            <a:ext cx="704850" cy="704850"/>
+          </a:xfrm>
+          <a:prstGeom xmlns:a="http://schemas.openxmlformats.org/drawingml/2006/main" prst="rect">
+            <a:avLst/>
+          </a:prstGeom>
+          <a:noFill xmlns:a="http://schemas.openxmlformats.org/drawingml/2006/main"/>
+          <a:ln xmlns:a="http://schemas.openxmlformats.org/drawingml/2006/main" w="0">
+            <a:noFill/>
+          </a:ln>
+        </p:spPr>
+        <p:txBody>
+          <a:bodyPr xmlns:a="http://schemas.openxmlformats.org/drawingml/2006/main" lIns="0" tIns="0" rIns="0" bIns="0" anchor="ctr">
+            <a:normAutofit fontScale="100000"/>
+          </a:bodyPr>
+          <a:lstStyle xmlns:a="http://schemas.openxmlformats.org/drawingml/2006/main"/>
+          <a:p xmlns:a="http://schemas.openxmlformats.org/drawingml/2006/main">
+            <a:pPr algn="ctr">
+              <a:defRPr sz="1725" b="1">
+                <a:solidFill>
+                  <a:srgbClr val="FFFFFF"/>
+                </a:solidFill>
+                <a:latin typeface="Arial"/>
+                <a:ea typeface="Arial"/>
+                <a:cs typeface="Arial"/>
+              </a:defRPr>
+            </a:pPr>
+            <a:r>
+              <a:rPr sz="1725" b="1">
+                <a:solidFill>
+                  <a:srgbClr val="FFFFFF"/>
+                </a:solidFill>
+                <a:latin typeface="Arial"/>
+                <a:ea typeface="Arial"/>
+                <a:cs typeface="Arial"/>
+              </a:rPr>
+              <a:t>02</a:t>
+            </a:r>
+          </a:p>
+        </p:txBody>
+      </p:sp>
+      <p:sp>
+        <p:nvSpPr>
+          <p:cNvPr id="10" name="">
+            <a:extLst xmlns:a="http://schemas.openxmlformats.org/drawingml/2006/main">
+              <a:ext uri="{FF2B5EF4-FFF2-40B4-BE49-F238E27FC236}">
+                <a16:creationId xmlns:a16="http://schemas.microsoft.com/office/drawing/2014/main" id="{A48C8C1D-2120-47B7-904A-48DB6BEB6BAB}"/>
+              </a:ext>
+            </a:extLst>
+          </p:cNvPr>
+          <p:cNvSpPr>
+            <a:spLocks xmlns:a="http://schemas.openxmlformats.org/drawingml/2006/main" noGrp="1"/>
+          </p:cNvSpPr>
+          <p:nvPr/>
+        </p:nvSpPr>
+        <p:spPr>
+          <a:xfrm xmlns:a="http://schemas.openxmlformats.org/drawingml/2006/main">
+            <a:off x="7381875" y="2219325"/>
+            <a:ext cx="3333750" cy="295275"/>
+          </a:xfrm>
+          <a:prstGeom xmlns:a="http://schemas.openxmlformats.org/drawingml/2006/main" prst="rect">
+            <a:avLst/>
+          </a:prstGeom>
+          <a:noFill xmlns:a="http://schemas.openxmlformats.org/drawingml/2006/main"/>
+          <a:ln xmlns:a="http://schemas.openxmlformats.org/drawingml/2006/main" w="0">
+            <a:noFill/>
+          </a:ln>
+        </p:spPr>
+        <p:txBody>
+          <a:bodyPr xmlns:a="http://schemas.openxmlformats.org/drawingml/2006/main">
+            <a:normAutofit fontScale="77536"/>
+          </a:bodyPr>
           <a:lstStyle xmlns:a="http://schemas.openxmlformats.org/drawingml/2006/main"/>
           <a:p xmlns:a="http://schemas.openxmlformats.org/drawingml/2006/main">
             <a:pPr>
               <a:defRPr sz="1725" b="1">
                 <a:solidFill>
-                  <a:srgbClr val="FFFFFF"/>
+                  <a:srgbClr val="17A7B9"/>
                 </a:solidFill>
                 <a:latin typeface="Arial"/>
                 <a:ea typeface="Arial"/>
@@ -2733,66 +2806,11 @@
             <a:r>
               <a:rPr sz="1725" b="1">
                 <a:solidFill>
-                  <a:srgbClr val="FFFFFF"/>
-                </a:solidFill>
-                <a:latin typeface="Arial"/>
-                <a:ea typeface="Arial"/>
-                <a:cs typeface="Arial"/>
-              </a:rPr>
-              <a:t>02</a:t>
-            </a:r>
-          </a:p>
-        </p:txBody>
-      </p:sp>
-      <p:sp>
-        <p:nvSpPr>
-          <p:cNvPr id="10" name="">
-            <a:extLst xmlns:a="http://schemas.openxmlformats.org/drawingml/2006/main">
-              <a:ext uri="{FF2B5EF4-FFF2-40B4-BE49-F238E27FC236}">
-                <a16:creationId xmlns:a16="http://schemas.microsoft.com/office/drawing/2014/main" id="{3042D17C-6697-47C4-8E4F-DF76290D8C4E}"/>
-              </a:ext>
-            </a:extLst>
-          </p:cNvPr>
-          <p:cNvSpPr>
-            <a:spLocks xmlns:a="http://schemas.openxmlformats.org/drawingml/2006/main" noGrp="1"/>
-          </p:cNvSpPr>
-          <p:nvPr/>
-        </p:nvSpPr>
-        <p:spPr>
-          <a:xfrm xmlns:a="http://schemas.openxmlformats.org/drawingml/2006/main">
-            <a:off x="7381875" y="2219325"/>
-            <a:ext cx="3333750" cy="295275"/>
-          </a:xfrm>
-          <a:prstGeom xmlns:a="http://schemas.openxmlformats.org/drawingml/2006/main" prst="rect">
-            <a:avLst/>
-          </a:prstGeom>
-          <a:noFill xmlns:a="http://schemas.openxmlformats.org/drawingml/2006/main"/>
-          <a:ln xmlns:a="http://schemas.openxmlformats.org/drawingml/2006/main" w="0">
-            <a:noFill/>
-          </a:ln>
-        </p:spPr>
-        <p:txBody>
-          <a:bodyPr xmlns:a="http://schemas.openxmlformats.org/drawingml/2006/main"/>
-          <a:lstStyle xmlns:a="http://schemas.openxmlformats.org/drawingml/2006/main"/>
-          <a:p xmlns:a="http://schemas.openxmlformats.org/drawingml/2006/main">
-            <a:pPr>
-              <a:defRPr sz="1725" b="1">
-                <a:solidFill>
                   <a:srgbClr val="17A7B9"/>
                 </a:solidFill>
                 <a:latin typeface="Arial"/>
                 <a:ea typeface="Arial"/>
                 <a:cs typeface="Arial"/>
-              </a:defRPr>
-            </a:pPr>
-            <a:r>
-              <a:rPr sz="1725" b="1">
-                <a:solidFill>
-                  <a:srgbClr val="17A7B9"/>
-                </a:solidFill>
-                <a:latin typeface="Arial"/>
-                <a:ea typeface="Arial"/>
-                <a:cs typeface="Arial"/>
               </a:rPr>
               <a:t>Segundo factor</a:t>
             </a:r>
@@ -2804,7 +2822,7 @@
           <p:cNvPr id="11" name="">
             <a:extLst xmlns:a="http://schemas.openxmlformats.org/drawingml/2006/main">
               <a:ext uri="{FF2B5EF4-FFF2-40B4-BE49-F238E27FC236}">
-                <a16:creationId xmlns:a16="http://schemas.microsoft.com/office/drawing/2014/main" id="{E7F75944-0053-469A-ABB2-CEC2C274D151}"/>
+                <a16:creationId xmlns:a16="http://schemas.microsoft.com/office/drawing/2014/main" id="{91481ACC-0925-4310-9400-BC5C71B012F3}"/>
               </a:ext>
             </a:extLst>
           </p:cNvPr>
@@ -2827,7 +2845,9 @@
           </a:ln>
         </p:spPr>
         <p:txBody>
-          <a:bodyPr xmlns:a="http://schemas.openxmlformats.org/drawingml/2006/main"/>
+          <a:bodyPr xmlns:a="http://schemas.openxmlformats.org/drawingml/2006/main">
+            <a:normAutofit fontScale="97369"/>
+          </a:bodyPr>
           <a:lstStyle xmlns:a="http://schemas.openxmlformats.org/drawingml/2006/main"/>
           <a:p xmlns:a="http://schemas.openxmlformats.org/drawingml/2006/main">
             <a:pPr>
@@ -2859,7 +2879,7 @@
           <p:cNvPr id="12" name="">
             <a:extLst xmlns:a="http://schemas.openxmlformats.org/drawingml/2006/main">
               <a:ext uri="{FF2B5EF4-FFF2-40B4-BE49-F238E27FC236}">
-                <a16:creationId xmlns:a16="http://schemas.microsoft.com/office/drawing/2014/main" id="{81A91790-D839-4E90-9C58-1C3D4144CE30}"/>
+                <a16:creationId xmlns:a16="http://schemas.microsoft.com/office/drawing/2014/main" id="{7F54598C-2DD2-44FE-8A9B-6E32FF2CAC4B}"/>
               </a:ext>
             </a:extLst>
           </p:cNvPr>
@@ -2893,7 +2913,7 @@
           <p:cNvPr id="13" name="">
             <a:extLst xmlns:a="http://schemas.openxmlformats.org/drawingml/2006/main">
               <a:ext uri="{FF2B5EF4-FFF2-40B4-BE49-F238E27FC236}">
-                <a16:creationId xmlns:a16="http://schemas.microsoft.com/office/drawing/2014/main" id="{AA854CAC-0542-40B2-ADE5-22BB2B929D5C}"/>
+                <a16:creationId xmlns:a16="http://schemas.microsoft.com/office/drawing/2014/main" id="{1526B5D9-48D9-425E-9514-A9F47D2975FB}"/>
               </a:ext>
             </a:extLst>
           </p:cNvPr>
@@ -2907,10 +2927,8 @@
             <a:off x="962025" y="4286250"/>
             <a:ext cx="704850" cy="704850"/>
           </a:xfrm>
-          <a:prstGeom xmlns:a="http://schemas.openxmlformats.org/drawingml/2006/main" prst="roundRect">
-            <a:avLst>
-              <a:gd name="adj" fmla="val 50000"/>
-            </a:avLst>
+          <a:prstGeom xmlns:a="http://schemas.openxmlformats.org/drawingml/2006/main" prst="ellipse">
+            <a:avLst/>
           </a:prstGeom>
           <a:solidFill xmlns:a="http://schemas.openxmlformats.org/drawingml/2006/main">
             <a:srgbClr val="1FA064"/>
@@ -2927,36 +2945,95 @@
           <p:cNvPr id="14" name="">
             <a:extLst xmlns:a="http://schemas.openxmlformats.org/drawingml/2006/main">
               <a:ext uri="{FF2B5EF4-FFF2-40B4-BE49-F238E27FC236}">
-                <a16:creationId xmlns:a16="http://schemas.microsoft.com/office/drawing/2014/main" id="{91F28423-69A7-4C0F-AF0E-FDFD538DE4E0}"/>
-              </a:ext>
-            </a:extLst>
-          </p:cNvPr>
-          <p:cNvSpPr>
-            <a:spLocks xmlns:a="http://schemas.openxmlformats.org/drawingml/2006/main" noGrp="1"/>
-          </p:cNvSpPr>
-          <p:nvPr/>
-        </p:nvSpPr>
-        <p:spPr>
-          <a:xfrm xmlns:a="http://schemas.openxmlformats.org/drawingml/2006/main">
-            <a:off x="962025" y="4438650"/>
-            <a:ext cx="704850" cy="381000"/>
-          </a:xfrm>
-          <a:prstGeom xmlns:a="http://schemas.openxmlformats.org/drawingml/2006/main" prst="rect">
-            <a:avLst/>
-          </a:prstGeom>
-          <a:noFill xmlns:a="http://schemas.openxmlformats.org/drawingml/2006/main"/>
-          <a:ln xmlns:a="http://schemas.openxmlformats.org/drawingml/2006/main" w="0">
-            <a:noFill/>
-          </a:ln>
-        </p:spPr>
-        <p:txBody>
-          <a:bodyPr xmlns:a="http://schemas.openxmlformats.org/drawingml/2006/main"/>
+                <a16:creationId xmlns:a16="http://schemas.microsoft.com/office/drawing/2014/main" id="{4F8B6920-6BF5-4601-A8A8-43BF8DD13A88}"/>
+              </a:ext>
+            </a:extLst>
+          </p:cNvPr>
+          <p:cNvSpPr>
+            <a:spLocks xmlns:a="http://schemas.openxmlformats.org/drawingml/2006/main" noGrp="1"/>
+          </p:cNvSpPr>
+          <p:nvPr/>
+        </p:nvSpPr>
+        <p:spPr>
+          <a:xfrm xmlns:a="http://schemas.openxmlformats.org/drawingml/2006/main">
+            <a:off x="962025" y="4286250"/>
+            <a:ext cx="704850" cy="704850"/>
+          </a:xfrm>
+          <a:prstGeom xmlns:a="http://schemas.openxmlformats.org/drawingml/2006/main" prst="rect">
+            <a:avLst/>
+          </a:prstGeom>
+          <a:noFill xmlns:a="http://schemas.openxmlformats.org/drawingml/2006/main"/>
+          <a:ln xmlns:a="http://schemas.openxmlformats.org/drawingml/2006/main" w="0">
+            <a:noFill/>
+          </a:ln>
+        </p:spPr>
+        <p:txBody>
+          <a:bodyPr xmlns:a="http://schemas.openxmlformats.org/drawingml/2006/main" lIns="0" tIns="0" rIns="0" bIns="0" anchor="ctr">
+            <a:normAutofit fontScale="100000"/>
+          </a:bodyPr>
+          <a:lstStyle xmlns:a="http://schemas.openxmlformats.org/drawingml/2006/main"/>
+          <a:p xmlns:a="http://schemas.openxmlformats.org/drawingml/2006/main">
+            <a:pPr algn="ctr">
+              <a:defRPr sz="1725" b="1">
+                <a:solidFill>
+                  <a:srgbClr val="FFFFFF"/>
+                </a:solidFill>
+                <a:latin typeface="Arial"/>
+                <a:ea typeface="Arial"/>
+                <a:cs typeface="Arial"/>
+              </a:defRPr>
+            </a:pPr>
+            <a:r>
+              <a:rPr sz="1725" b="1">
+                <a:solidFill>
+                  <a:srgbClr val="FFFFFF"/>
+                </a:solidFill>
+                <a:latin typeface="Arial"/>
+                <a:ea typeface="Arial"/>
+                <a:cs typeface="Arial"/>
+              </a:rPr>
+              <a:t>03</a:t>
+            </a:r>
+          </a:p>
+        </p:txBody>
+      </p:sp>
+      <p:sp>
+        <p:nvSpPr>
+          <p:cNvPr id="15" name="">
+            <a:extLst xmlns:a="http://schemas.openxmlformats.org/drawingml/2006/main">
+              <a:ext uri="{FF2B5EF4-FFF2-40B4-BE49-F238E27FC236}">
+                <a16:creationId xmlns:a16="http://schemas.microsoft.com/office/drawing/2014/main" id="{98AF6EF2-6DC4-4B2A-9CD8-E6A229E3A293}"/>
+              </a:ext>
+            </a:extLst>
+          </p:cNvPr>
+          <p:cNvSpPr>
+            <a:spLocks xmlns:a="http://schemas.openxmlformats.org/drawingml/2006/main" noGrp="1"/>
+          </p:cNvSpPr>
+          <p:nvPr/>
+        </p:nvSpPr>
+        <p:spPr>
+          <a:xfrm xmlns:a="http://schemas.openxmlformats.org/drawingml/2006/main">
+            <a:off x="1905000" y="4219575"/>
+            <a:ext cx="3333750" cy="295275"/>
+          </a:xfrm>
+          <a:prstGeom xmlns:a="http://schemas.openxmlformats.org/drawingml/2006/main" prst="rect">
+            <a:avLst/>
+          </a:prstGeom>
+          <a:noFill xmlns:a="http://schemas.openxmlformats.org/drawingml/2006/main"/>
+          <a:ln xmlns:a="http://schemas.openxmlformats.org/drawingml/2006/main" w="0">
+            <a:noFill/>
+          </a:ln>
+        </p:spPr>
+        <p:txBody>
+          <a:bodyPr xmlns:a="http://schemas.openxmlformats.org/drawingml/2006/main">
+            <a:normAutofit fontScale="77536"/>
+          </a:bodyPr>
           <a:lstStyle xmlns:a="http://schemas.openxmlformats.org/drawingml/2006/main"/>
           <a:p xmlns:a="http://schemas.openxmlformats.org/drawingml/2006/main">
             <a:pPr>
               <a:defRPr sz="1725" b="1">
                 <a:solidFill>
-                  <a:srgbClr val="FFFFFF"/>
+                  <a:srgbClr val="1FA064"/>
                 </a:solidFill>
                 <a:latin typeface="Arial"/>
                 <a:ea typeface="Arial"/>
@@ -2966,66 +3043,11 @@
             <a:r>
               <a:rPr sz="1725" b="1">
                 <a:solidFill>
-                  <a:srgbClr val="FFFFFF"/>
-                </a:solidFill>
-                <a:latin typeface="Arial"/>
-                <a:ea typeface="Arial"/>
-                <a:cs typeface="Arial"/>
-              </a:rPr>
-              <a:t>03</a:t>
-            </a:r>
-          </a:p>
-        </p:txBody>
-      </p:sp>
-      <p:sp>
-        <p:nvSpPr>
-          <p:cNvPr id="15" name="">
-            <a:extLst xmlns:a="http://schemas.openxmlformats.org/drawingml/2006/main">
-              <a:ext uri="{FF2B5EF4-FFF2-40B4-BE49-F238E27FC236}">
-                <a16:creationId xmlns:a16="http://schemas.microsoft.com/office/drawing/2014/main" id="{EAF89A2C-B02B-4B40-BE64-C1A15E3A01C0}"/>
-              </a:ext>
-            </a:extLst>
-          </p:cNvPr>
-          <p:cNvSpPr>
-            <a:spLocks xmlns:a="http://schemas.openxmlformats.org/drawingml/2006/main" noGrp="1"/>
-          </p:cNvSpPr>
-          <p:nvPr/>
-        </p:nvSpPr>
-        <p:spPr>
-          <a:xfrm xmlns:a="http://schemas.openxmlformats.org/drawingml/2006/main">
-            <a:off x="1905000" y="4219575"/>
-            <a:ext cx="3333750" cy="295275"/>
-          </a:xfrm>
-          <a:prstGeom xmlns:a="http://schemas.openxmlformats.org/drawingml/2006/main" prst="rect">
-            <a:avLst/>
-          </a:prstGeom>
-          <a:noFill xmlns:a="http://schemas.openxmlformats.org/drawingml/2006/main"/>
-          <a:ln xmlns:a="http://schemas.openxmlformats.org/drawingml/2006/main" w="0">
-            <a:noFill/>
-          </a:ln>
-        </p:spPr>
-        <p:txBody>
-          <a:bodyPr xmlns:a="http://schemas.openxmlformats.org/drawingml/2006/main"/>
-          <a:lstStyle xmlns:a="http://schemas.openxmlformats.org/drawingml/2006/main"/>
-          <a:p xmlns:a="http://schemas.openxmlformats.org/drawingml/2006/main">
-            <a:pPr>
-              <a:defRPr sz="1725" b="1">
-                <a:solidFill>
                   <a:srgbClr val="1FA064"/>
                 </a:solidFill>
                 <a:latin typeface="Arial"/>
                 <a:ea typeface="Arial"/>
                 <a:cs typeface="Arial"/>
-              </a:defRPr>
-            </a:pPr>
-            <a:r>
-              <a:rPr sz="1725" b="1">
-                <a:solidFill>
-                  <a:srgbClr val="1FA064"/>
-                </a:solidFill>
-                <a:latin typeface="Arial"/>
-                <a:ea typeface="Arial"/>
-                <a:cs typeface="Arial"/>
               </a:rPr>
               <a:t>Organizaciones</a:t>
             </a:r>
@@ -3037,7 +3059,7 @@
           <p:cNvPr id="16" name="">
             <a:extLst xmlns:a="http://schemas.openxmlformats.org/drawingml/2006/main">
               <a:ext uri="{FF2B5EF4-FFF2-40B4-BE49-F238E27FC236}">
-                <a16:creationId xmlns:a16="http://schemas.microsoft.com/office/drawing/2014/main" id="{82B235DC-6212-4167-8217-49EFED54621C}"/>
+                <a16:creationId xmlns:a16="http://schemas.microsoft.com/office/drawing/2014/main" id="{6D10AF72-236D-4AD6-9FF3-F8A5721A0792}"/>
               </a:ext>
             </a:extLst>
           </p:cNvPr>
@@ -3060,7 +3082,9 @@
           </a:ln>
         </p:spPr>
         <p:txBody>
-          <a:bodyPr xmlns:a="http://schemas.openxmlformats.org/drawingml/2006/main"/>
+          <a:bodyPr xmlns:a="http://schemas.openxmlformats.org/drawingml/2006/main">
+            <a:normAutofit fontScale="90319"/>
+          </a:bodyPr>
           <a:lstStyle xmlns:a="http://schemas.openxmlformats.org/drawingml/2006/main"/>
           <a:p xmlns:a="http://schemas.openxmlformats.org/drawingml/2006/main">
             <a:pPr>
@@ -3092,7 +3116,7 @@
           <p:cNvPr id="17" name="">
             <a:extLst xmlns:a="http://schemas.openxmlformats.org/drawingml/2006/main">
               <a:ext uri="{FF2B5EF4-FFF2-40B4-BE49-F238E27FC236}">
-                <a16:creationId xmlns:a16="http://schemas.microsoft.com/office/drawing/2014/main" id="{002689A9-9F70-4DA4-9CED-5E7AC76F7923}"/>
+                <a16:creationId xmlns:a16="http://schemas.microsoft.com/office/drawing/2014/main" id="{01E7B890-17C8-4243-9DB0-CD0546558C07}"/>
               </a:ext>
             </a:extLst>
           </p:cNvPr>
@@ -3126,7 +3150,7 @@
           <p:cNvPr id="18" name="">
             <a:extLst xmlns:a="http://schemas.openxmlformats.org/drawingml/2006/main">
               <a:ext uri="{FF2B5EF4-FFF2-40B4-BE49-F238E27FC236}">
-                <a16:creationId xmlns:a16="http://schemas.microsoft.com/office/drawing/2014/main" id="{42D281FE-66C8-4F8B-8E96-2DC8FA4A1A4D}"/>
+                <a16:creationId xmlns:a16="http://schemas.microsoft.com/office/drawing/2014/main" id="{27D42D2A-643A-4888-9227-3163D88124E2}"/>
               </a:ext>
             </a:extLst>
           </p:cNvPr>
@@ -3140,10 +3164,8 @@
             <a:off x="6438900" y="4286250"/>
             <a:ext cx="704850" cy="704850"/>
           </a:xfrm>
-          <a:prstGeom xmlns:a="http://schemas.openxmlformats.org/drawingml/2006/main" prst="roundRect">
-            <a:avLst>
-              <a:gd name="adj" fmla="val 50000"/>
-            </a:avLst>
+          <a:prstGeom xmlns:a="http://schemas.openxmlformats.org/drawingml/2006/main" prst="ellipse">
+            <a:avLst/>
           </a:prstGeom>
           <a:solidFill xmlns:a="http://schemas.openxmlformats.org/drawingml/2006/main">
             <a:srgbClr val="F18932"/>
@@ -3160,36 +3182,95 @@
           <p:cNvPr id="19" name="">
             <a:extLst xmlns:a="http://schemas.openxmlformats.org/drawingml/2006/main">
               <a:ext uri="{FF2B5EF4-FFF2-40B4-BE49-F238E27FC236}">
-                <a16:creationId xmlns:a16="http://schemas.microsoft.com/office/drawing/2014/main" id="{3169BD06-43DD-4B0F-B714-8B987CB634B6}"/>
-              </a:ext>
-            </a:extLst>
-          </p:cNvPr>
-          <p:cNvSpPr>
-            <a:spLocks xmlns:a="http://schemas.openxmlformats.org/drawingml/2006/main" noGrp="1"/>
-          </p:cNvSpPr>
-          <p:nvPr/>
-        </p:nvSpPr>
-        <p:spPr>
-          <a:xfrm xmlns:a="http://schemas.openxmlformats.org/drawingml/2006/main">
-            <a:off x="6438900" y="4438650"/>
-            <a:ext cx="704850" cy="381000"/>
-          </a:xfrm>
-          <a:prstGeom xmlns:a="http://schemas.openxmlformats.org/drawingml/2006/main" prst="rect">
-            <a:avLst/>
-          </a:prstGeom>
-          <a:noFill xmlns:a="http://schemas.openxmlformats.org/drawingml/2006/main"/>
-          <a:ln xmlns:a="http://schemas.openxmlformats.org/drawingml/2006/main" w="0">
-            <a:noFill/>
-          </a:ln>
-        </p:spPr>
-        <p:txBody>
-          <a:bodyPr xmlns:a="http://schemas.openxmlformats.org/drawingml/2006/main"/>
+                <a16:creationId xmlns:a16="http://schemas.microsoft.com/office/drawing/2014/main" id="{FD656B6B-5C53-47B4-9924-6B7E989695DC}"/>
+              </a:ext>
+            </a:extLst>
+          </p:cNvPr>
+          <p:cNvSpPr>
+            <a:spLocks xmlns:a="http://schemas.openxmlformats.org/drawingml/2006/main" noGrp="1"/>
+          </p:cNvSpPr>
+          <p:nvPr/>
+        </p:nvSpPr>
+        <p:spPr>
+          <a:xfrm xmlns:a="http://schemas.openxmlformats.org/drawingml/2006/main">
+            <a:off x="6438900" y="4286250"/>
+            <a:ext cx="704850" cy="704850"/>
+          </a:xfrm>
+          <a:prstGeom xmlns:a="http://schemas.openxmlformats.org/drawingml/2006/main" prst="rect">
+            <a:avLst/>
+          </a:prstGeom>
+          <a:noFill xmlns:a="http://schemas.openxmlformats.org/drawingml/2006/main"/>
+          <a:ln xmlns:a="http://schemas.openxmlformats.org/drawingml/2006/main" w="0">
+            <a:noFill/>
+          </a:ln>
+        </p:spPr>
+        <p:txBody>
+          <a:bodyPr xmlns:a="http://schemas.openxmlformats.org/drawingml/2006/main" lIns="0" tIns="0" rIns="0" bIns="0" anchor="ctr">
+            <a:normAutofit fontScale="100000"/>
+          </a:bodyPr>
+          <a:lstStyle xmlns:a="http://schemas.openxmlformats.org/drawingml/2006/main"/>
+          <a:p xmlns:a="http://schemas.openxmlformats.org/drawingml/2006/main">
+            <a:pPr algn="ctr">
+              <a:defRPr sz="1725" b="1">
+                <a:solidFill>
+                  <a:srgbClr val="FFFFFF"/>
+                </a:solidFill>
+                <a:latin typeface="Arial"/>
+                <a:ea typeface="Arial"/>
+                <a:cs typeface="Arial"/>
+              </a:defRPr>
+            </a:pPr>
+            <a:r>
+              <a:rPr sz="1725" b="1">
+                <a:solidFill>
+                  <a:srgbClr val="FFFFFF"/>
+                </a:solidFill>
+                <a:latin typeface="Arial"/>
+                <a:ea typeface="Arial"/>
+                <a:cs typeface="Arial"/>
+              </a:rPr>
+              <a:t>04</a:t>
+            </a:r>
+          </a:p>
+        </p:txBody>
+      </p:sp>
+      <p:sp>
+        <p:nvSpPr>
+          <p:cNvPr id="20" name="">
+            <a:extLst xmlns:a="http://schemas.openxmlformats.org/drawingml/2006/main">
+              <a:ext uri="{FF2B5EF4-FFF2-40B4-BE49-F238E27FC236}">
+                <a16:creationId xmlns:a16="http://schemas.microsoft.com/office/drawing/2014/main" id="{9EB06ACC-B52C-4E8D-A720-CC5BCF3FD4C6}"/>
+              </a:ext>
+            </a:extLst>
+          </p:cNvPr>
+          <p:cNvSpPr>
+            <a:spLocks xmlns:a="http://schemas.openxmlformats.org/drawingml/2006/main" noGrp="1"/>
+          </p:cNvSpPr>
+          <p:nvPr/>
+        </p:nvSpPr>
+        <p:spPr>
+          <a:xfrm xmlns:a="http://schemas.openxmlformats.org/drawingml/2006/main">
+            <a:off x="7381875" y="4219575"/>
+            <a:ext cx="3333750" cy="295275"/>
+          </a:xfrm>
+          <a:prstGeom xmlns:a="http://schemas.openxmlformats.org/drawingml/2006/main" prst="rect">
+            <a:avLst/>
+          </a:prstGeom>
+          <a:noFill xmlns:a="http://schemas.openxmlformats.org/drawingml/2006/main"/>
+          <a:ln xmlns:a="http://schemas.openxmlformats.org/drawingml/2006/main" w="0">
+            <a:noFill/>
+          </a:ln>
+        </p:spPr>
+        <p:txBody>
+          <a:bodyPr xmlns:a="http://schemas.openxmlformats.org/drawingml/2006/main">
+            <a:normAutofit fontScale="77536"/>
+          </a:bodyPr>
           <a:lstStyle xmlns:a="http://schemas.openxmlformats.org/drawingml/2006/main"/>
           <a:p xmlns:a="http://schemas.openxmlformats.org/drawingml/2006/main">
             <a:pPr>
               <a:defRPr sz="1725" b="1">
                 <a:solidFill>
-                  <a:srgbClr val="FFFFFF"/>
+                  <a:srgbClr val="F18932"/>
                 </a:solidFill>
                 <a:latin typeface="Arial"/>
                 <a:ea typeface="Arial"/>
@@ -3199,66 +3280,11 @@
             <a:r>
               <a:rPr sz="1725" b="1">
                 <a:solidFill>
-                  <a:srgbClr val="FFFFFF"/>
-                </a:solidFill>
-                <a:latin typeface="Arial"/>
-                <a:ea typeface="Arial"/>
-                <a:cs typeface="Arial"/>
-              </a:rPr>
-              <a:t>04</a:t>
-            </a:r>
-          </a:p>
-        </p:txBody>
-      </p:sp>
-      <p:sp>
-        <p:nvSpPr>
-          <p:cNvPr id="20" name="">
-            <a:extLst xmlns:a="http://schemas.openxmlformats.org/drawingml/2006/main">
-              <a:ext uri="{FF2B5EF4-FFF2-40B4-BE49-F238E27FC236}">
-                <a16:creationId xmlns:a16="http://schemas.microsoft.com/office/drawing/2014/main" id="{9F2A81DA-4704-4AEC-A0D5-A2270D452367}"/>
-              </a:ext>
-            </a:extLst>
-          </p:cNvPr>
-          <p:cNvSpPr>
-            <a:spLocks xmlns:a="http://schemas.openxmlformats.org/drawingml/2006/main" noGrp="1"/>
-          </p:cNvSpPr>
-          <p:nvPr/>
-        </p:nvSpPr>
-        <p:spPr>
-          <a:xfrm xmlns:a="http://schemas.openxmlformats.org/drawingml/2006/main">
-            <a:off x="7381875" y="4219575"/>
-            <a:ext cx="3333750" cy="295275"/>
-          </a:xfrm>
-          <a:prstGeom xmlns:a="http://schemas.openxmlformats.org/drawingml/2006/main" prst="rect">
-            <a:avLst/>
-          </a:prstGeom>
-          <a:noFill xmlns:a="http://schemas.openxmlformats.org/drawingml/2006/main"/>
-          <a:ln xmlns:a="http://schemas.openxmlformats.org/drawingml/2006/main" w="0">
-            <a:noFill/>
-          </a:ln>
-        </p:spPr>
-        <p:txBody>
-          <a:bodyPr xmlns:a="http://schemas.openxmlformats.org/drawingml/2006/main"/>
-          <a:lstStyle xmlns:a="http://schemas.openxmlformats.org/drawingml/2006/main"/>
-          <a:p xmlns:a="http://schemas.openxmlformats.org/drawingml/2006/main">
-            <a:pPr>
-              <a:defRPr sz="1725" b="1">
-                <a:solidFill>
                   <a:srgbClr val="F18932"/>
                 </a:solidFill>
                 <a:latin typeface="Arial"/>
                 <a:ea typeface="Arial"/>
                 <a:cs typeface="Arial"/>
-              </a:defRPr>
-            </a:pPr>
-            <a:r>
-              <a:rPr sz="1725" b="1">
-                <a:solidFill>
-                  <a:srgbClr val="F18932"/>
-                </a:solidFill>
-                <a:latin typeface="Arial"/>
-                <a:ea typeface="Arial"/>
-                <a:cs typeface="Arial"/>
               </a:rPr>
               <a:t>Secretos</a:t>
             </a:r>
@@ -3270,7 +3296,7 @@
           <p:cNvPr id="21" name="">
             <a:extLst xmlns:a="http://schemas.openxmlformats.org/drawingml/2006/main">
               <a:ext uri="{FF2B5EF4-FFF2-40B4-BE49-F238E27FC236}">
-                <a16:creationId xmlns:a16="http://schemas.microsoft.com/office/drawing/2014/main" id="{38C226A9-9D60-4BF5-A9CD-E117A13396F3}"/>
+                <a16:creationId xmlns:a16="http://schemas.microsoft.com/office/drawing/2014/main" id="{50235EB7-543F-454E-899D-CFDFE6EC3D3A}"/>
               </a:ext>
             </a:extLst>
           </p:cNvPr>
@@ -3293,7 +3319,9 @@
           </a:ln>
         </p:spPr>
         <p:txBody>
-          <a:bodyPr xmlns:a="http://schemas.openxmlformats.org/drawingml/2006/main"/>
+          <a:bodyPr xmlns:a="http://schemas.openxmlformats.org/drawingml/2006/main">
+            <a:normAutofit fontScale="100000"/>
+          </a:bodyPr>
           <a:lstStyle xmlns:a="http://schemas.openxmlformats.org/drawingml/2006/main"/>
           <a:p xmlns:a="http://schemas.openxmlformats.org/drawingml/2006/main">
             <a:pPr>
@@ -3325,7 +3353,7 @@
           <p:cNvPr id="22" name="">
             <a:extLst xmlns:a="http://schemas.openxmlformats.org/drawingml/2006/main">
               <a:ext uri="{FF2B5EF4-FFF2-40B4-BE49-F238E27FC236}">
-                <a16:creationId xmlns:a16="http://schemas.microsoft.com/office/drawing/2014/main" id="{BA5486C4-2460-406C-8ED6-3A94A33D6098}"/>
+                <a16:creationId xmlns:a16="http://schemas.microsoft.com/office/drawing/2014/main" id="{2FA66F27-902C-471A-B7D7-E18C59425D2A}"/>
               </a:ext>
             </a:extLst>
           </p:cNvPr>
@@ -3348,7 +3376,9 @@
           </a:ln>
         </p:spPr>
         <p:txBody>
-          <a:bodyPr xmlns:a="http://schemas.openxmlformats.org/drawingml/2006/main"/>
+          <a:bodyPr xmlns:a="http://schemas.openxmlformats.org/drawingml/2006/main">
+            <a:normAutofit fontScale="94444"/>
+          </a:bodyPr>
           <a:lstStyle xmlns:a="http://schemas.openxmlformats.org/drawingml/2006/main"/>
           <a:p xmlns:a="http://schemas.openxmlformats.org/drawingml/2006/main">
             <a:pPr>
@@ -3380,7 +3410,7 @@
           <p:cNvPr id="23" name="">
             <a:extLst xmlns:a="http://schemas.openxmlformats.org/drawingml/2006/main">
               <a:ext uri="{FF2B5EF4-FFF2-40B4-BE49-F238E27FC236}">
-                <a16:creationId xmlns:a16="http://schemas.microsoft.com/office/drawing/2014/main" id="{47A9C010-26AF-4DDE-A788-A1669F808EA9}"/>
+                <a16:creationId xmlns:a16="http://schemas.microsoft.com/office/drawing/2014/main" id="{F1B4DF2D-7849-460B-BC30-F2EE50B39AD1}"/>
               </a:ext>
             </a:extLst>
           </p:cNvPr>
@@ -3403,7 +3433,9 @@
           </a:ln>
         </p:spPr>
         <p:txBody>
-          <a:bodyPr xmlns:a="http://schemas.openxmlformats.org/drawingml/2006/main"/>
+          <a:bodyPr xmlns:a="http://schemas.openxmlformats.org/drawingml/2006/main">
+            <a:normAutofit fontScale="66667"/>
+          </a:bodyPr>
           <a:lstStyle xmlns:a="http://schemas.openxmlformats.org/drawingml/2006/main"/>
           <a:p xmlns:a="http://schemas.openxmlformats.org/drawingml/2006/main">
             <a:pPr>
@@ -3435,7 +3467,7 @@
           <p:cNvPr id="24" name="">
             <a:extLst xmlns:a="http://schemas.openxmlformats.org/drawingml/2006/main">
               <a:ext uri="{FF2B5EF4-FFF2-40B4-BE49-F238E27FC236}">
-                <a16:creationId xmlns:a16="http://schemas.microsoft.com/office/drawing/2014/main" id="{B4F8DE1E-4D09-4B91-A0EF-31BEA1CB7D9B}"/>
+                <a16:creationId xmlns:a16="http://schemas.microsoft.com/office/drawing/2014/main" id="{6CFC29F9-F545-482F-A42A-E2D83C7F69C3}"/>
               </a:ext>
             </a:extLst>
           </p:cNvPr>
@@ -3458,10 +3490,12 @@
           </a:ln>
         </p:spPr>
         <p:txBody>
-          <a:bodyPr xmlns:a="http://schemas.openxmlformats.org/drawingml/2006/main"/>
-          <a:lstStyle xmlns:a="http://schemas.openxmlformats.org/drawingml/2006/main"/>
-          <a:p xmlns:a="http://schemas.openxmlformats.org/drawingml/2006/main">
-            <a:pPr>
+          <a:bodyPr xmlns:a="http://schemas.openxmlformats.org/drawingml/2006/main">
+            <a:normAutofit fontScale="66667"/>
+          </a:bodyPr>
+          <a:lstStyle xmlns:a="http://schemas.openxmlformats.org/drawingml/2006/main"/>
+          <a:p xmlns:a="http://schemas.openxmlformats.org/drawingml/2006/main">
+            <a:pPr algn="r">
               <a:defRPr sz="975" b="0">
                 <a:solidFill>
                   <a:srgbClr val="5C7083"/>
@@ -3488,7 +3522,7 @@
     </p:spTree>
     <p:extLst>
       <p:ext uri="{BB962C8B-B14F-4D97-AF65-F5344CB8AC3E}">
-        <p14:creationId xmlns:p14="http://schemas.microsoft.com/office/powerpoint/2010/main" val="347880506"/>
+        <p14:creationId xmlns:p14="http://schemas.microsoft.com/office/powerpoint/2010/main" val="1214910773"/>
       </p:ext>
     </p:extLst>
   </p:cSld>
@@ -3519,7 +3553,7 @@
           <p:cNvPr id="27" name="">
             <a:extLst xmlns:a="http://schemas.openxmlformats.org/drawingml/2006/main">
               <a:ext uri="{FF2B5EF4-FFF2-40B4-BE49-F238E27FC236}">
-                <a16:creationId xmlns:a16="http://schemas.microsoft.com/office/drawing/2014/main" id="{23EE63F3-D8C2-4A85-99DD-9EF93E11283B}"/>
+                <a16:creationId xmlns:a16="http://schemas.microsoft.com/office/drawing/2014/main" id="{F22D5FC2-0CD0-4B40-9D75-457EED565B46}"/>
               </a:ext>
             </a:extLst>
           </p:cNvPr>
@@ -3542,7 +3576,9 @@
           </a:ln>
         </p:spPr>
         <p:txBody>
-          <a:bodyPr xmlns:a="http://schemas.openxmlformats.org/drawingml/2006/main"/>
+          <a:bodyPr xmlns:a="http://schemas.openxmlformats.org/drawingml/2006/main">
+            <a:normAutofit fontScale="95175"/>
+          </a:bodyPr>
           <a:lstStyle xmlns:a="http://schemas.openxmlformats.org/drawingml/2006/main"/>
           <a:p xmlns:a="http://schemas.openxmlformats.org/drawingml/2006/main">
             <a:pPr>
@@ -3574,7 +3610,7 @@
           <p:cNvPr id="2" name="">
             <a:extLst xmlns:a="http://schemas.openxmlformats.org/drawingml/2006/main">
               <a:ext uri="{FF2B5EF4-FFF2-40B4-BE49-F238E27FC236}">
-                <a16:creationId xmlns:a16="http://schemas.microsoft.com/office/drawing/2014/main" id="{ABF6D6CB-8DEA-43CF-92B7-D73872E3089D}"/>
+                <a16:creationId xmlns:a16="http://schemas.microsoft.com/office/drawing/2014/main" id="{FABB3405-39AF-41A5-BC50-8A99A81E1FC3}"/>
               </a:ext>
             </a:extLst>
           </p:cNvPr>
@@ -3588,10 +3624,8 @@
             <a:off x="1047750" y="2000250"/>
             <a:ext cx="704850" cy="704850"/>
           </a:xfrm>
-          <a:prstGeom xmlns:a="http://schemas.openxmlformats.org/drawingml/2006/main" prst="roundRect">
-            <a:avLst>
-              <a:gd name="adj" fmla="val 50000"/>
-            </a:avLst>
+          <a:prstGeom xmlns:a="http://schemas.openxmlformats.org/drawingml/2006/main" prst="ellipse">
+            <a:avLst/>
           </a:prstGeom>
           <a:solidFill xmlns:a="http://schemas.openxmlformats.org/drawingml/2006/main">
             <a:srgbClr val="1174B7"/>
@@ -3608,33 +3642,35 @@
           <p:cNvPr id="3" name="">
             <a:extLst xmlns:a="http://schemas.openxmlformats.org/drawingml/2006/main">
               <a:ext uri="{FF2B5EF4-FFF2-40B4-BE49-F238E27FC236}">
-                <a16:creationId xmlns:a16="http://schemas.microsoft.com/office/drawing/2014/main" id="{2D7DA3B6-FE62-40C6-A430-9410C53B7B39}"/>
-              </a:ext>
-            </a:extLst>
-          </p:cNvPr>
-          <p:cNvSpPr>
-            <a:spLocks xmlns:a="http://schemas.openxmlformats.org/drawingml/2006/main" noGrp="1"/>
-          </p:cNvSpPr>
-          <p:nvPr/>
-        </p:nvSpPr>
-        <p:spPr>
-          <a:xfrm xmlns:a="http://schemas.openxmlformats.org/drawingml/2006/main">
-            <a:off x="1047750" y="2152650"/>
-            <a:ext cx="704850" cy="381000"/>
-          </a:xfrm>
-          <a:prstGeom xmlns:a="http://schemas.openxmlformats.org/drawingml/2006/main" prst="rect">
-            <a:avLst/>
-          </a:prstGeom>
-          <a:noFill xmlns:a="http://schemas.openxmlformats.org/drawingml/2006/main"/>
-          <a:ln xmlns:a="http://schemas.openxmlformats.org/drawingml/2006/main" w="0">
-            <a:noFill/>
-          </a:ln>
-        </p:spPr>
-        <p:txBody>
-          <a:bodyPr xmlns:a="http://schemas.openxmlformats.org/drawingml/2006/main"/>
-          <a:lstStyle xmlns:a="http://schemas.openxmlformats.org/drawingml/2006/main"/>
-          <a:p xmlns:a="http://schemas.openxmlformats.org/drawingml/2006/main">
-            <a:pPr>
+                <a16:creationId xmlns:a16="http://schemas.microsoft.com/office/drawing/2014/main" id="{6FDFEA78-6678-4BA8-9F80-BBE98A1257C5}"/>
+              </a:ext>
+            </a:extLst>
+          </p:cNvPr>
+          <p:cNvSpPr>
+            <a:spLocks xmlns:a="http://schemas.openxmlformats.org/drawingml/2006/main" noGrp="1"/>
+          </p:cNvSpPr>
+          <p:nvPr/>
+        </p:nvSpPr>
+        <p:spPr>
+          <a:xfrm xmlns:a="http://schemas.openxmlformats.org/drawingml/2006/main">
+            <a:off x="1047750" y="2000250"/>
+            <a:ext cx="704850" cy="704850"/>
+          </a:xfrm>
+          <a:prstGeom xmlns:a="http://schemas.openxmlformats.org/drawingml/2006/main" prst="rect">
+            <a:avLst/>
+          </a:prstGeom>
+          <a:noFill xmlns:a="http://schemas.openxmlformats.org/drawingml/2006/main"/>
+          <a:ln xmlns:a="http://schemas.openxmlformats.org/drawingml/2006/main" w="0">
+            <a:noFill/>
+          </a:ln>
+        </p:spPr>
+        <p:txBody>
+          <a:bodyPr xmlns:a="http://schemas.openxmlformats.org/drawingml/2006/main" lIns="0" tIns="0" rIns="0" bIns="0" anchor="ctr">
+            <a:normAutofit fontScale="100000"/>
+          </a:bodyPr>
+          <a:lstStyle xmlns:a="http://schemas.openxmlformats.org/drawingml/2006/main"/>
+          <a:p xmlns:a="http://schemas.openxmlformats.org/drawingml/2006/main">
+            <a:pPr algn="ctr">
               <a:defRPr sz="1725" b="1">
                 <a:solidFill>
                   <a:srgbClr val="FFFFFF"/>
@@ -3663,7 +3699,7 @@
           <p:cNvPr id="4" name="">
             <a:extLst xmlns:a="http://schemas.openxmlformats.org/drawingml/2006/main">
               <a:ext uri="{FF2B5EF4-FFF2-40B4-BE49-F238E27FC236}">
-                <a16:creationId xmlns:a16="http://schemas.microsoft.com/office/drawing/2014/main" id="{56B69435-9435-45E1-9CCF-2279C525AED6}"/>
+                <a16:creationId xmlns:a16="http://schemas.microsoft.com/office/drawing/2014/main" id="{37D7E557-AAE2-4EB1-96AE-F90BF634ECC4}"/>
               </a:ext>
             </a:extLst>
           </p:cNvPr>
@@ -3686,10 +3722,12 @@
           </a:ln>
         </p:spPr>
         <p:txBody>
-          <a:bodyPr xmlns:a="http://schemas.openxmlformats.org/drawingml/2006/main"/>
-          <a:lstStyle xmlns:a="http://schemas.openxmlformats.org/drawingml/2006/main"/>
-          <a:p xmlns:a="http://schemas.openxmlformats.org/drawingml/2006/main">
-            <a:pPr>
+          <a:bodyPr xmlns:a="http://schemas.openxmlformats.org/drawingml/2006/main">
+            <a:normAutofit fontScale="100000"/>
+          </a:bodyPr>
+          <a:lstStyle xmlns:a="http://schemas.openxmlformats.org/drawingml/2006/main"/>
+          <a:p xmlns:a="http://schemas.openxmlformats.org/drawingml/2006/main">
+            <a:pPr algn="ctr">
               <a:defRPr sz="1500" b="1">
                 <a:solidFill>
                   <a:srgbClr val="122B42"/>
@@ -3718,7 +3756,7 @@
           <p:cNvPr id="5" name="">
             <a:extLst xmlns:a="http://schemas.openxmlformats.org/drawingml/2006/main">
               <a:ext uri="{FF2B5EF4-FFF2-40B4-BE49-F238E27FC236}">
-                <a16:creationId xmlns:a16="http://schemas.microsoft.com/office/drawing/2014/main" id="{10438CAE-DADB-45D2-814B-C36915D6AC38}"/>
+                <a16:creationId xmlns:a16="http://schemas.microsoft.com/office/drawing/2014/main" id="{13C945FE-0052-4852-B76F-446076D6F431}"/>
               </a:ext>
             </a:extLst>
           </p:cNvPr>
@@ -3741,10 +3779,12 @@
           </a:ln>
         </p:spPr>
         <p:txBody>
-          <a:bodyPr xmlns:a="http://schemas.openxmlformats.org/drawingml/2006/main"/>
-          <a:lstStyle xmlns:a="http://schemas.openxmlformats.org/drawingml/2006/main"/>
-          <a:p xmlns:a="http://schemas.openxmlformats.org/drawingml/2006/main">
-            <a:pPr>
+          <a:bodyPr xmlns:a="http://schemas.openxmlformats.org/drawingml/2006/main">
+            <a:normAutofit fontScale="100000"/>
+          </a:bodyPr>
+          <a:lstStyle xmlns:a="http://schemas.openxmlformats.org/drawingml/2006/main"/>
+          <a:p xmlns:a="http://schemas.openxmlformats.org/drawingml/2006/main">
+            <a:pPr algn="ctr">
               <a:defRPr sz="1275" b="0">
                 <a:solidFill>
                   <a:srgbClr val="5C7083"/>
@@ -3773,7 +3813,7 @@
           <p:cNvPr id="6" name="">
             <a:extLst xmlns:a="http://schemas.openxmlformats.org/drawingml/2006/main">
               <a:ext uri="{FF2B5EF4-FFF2-40B4-BE49-F238E27FC236}">
-                <a16:creationId xmlns:a16="http://schemas.microsoft.com/office/drawing/2014/main" id="{DDB9C682-5C34-4C19-BFFD-D6E4E6C19290}"/>
+                <a16:creationId xmlns:a16="http://schemas.microsoft.com/office/drawing/2014/main" id="{75DEFDF5-7DD1-4497-9359-86B4987EF3FE}"/>
               </a:ext>
             </a:extLst>
           </p:cNvPr>
@@ -3787,10 +3827,8 @@
             <a:off x="3314700" y="2000250"/>
             <a:ext cx="704850" cy="704850"/>
           </a:xfrm>
-          <a:prstGeom xmlns:a="http://schemas.openxmlformats.org/drawingml/2006/main" prst="roundRect">
-            <a:avLst>
-              <a:gd name="adj" fmla="val 50000"/>
-            </a:avLst>
+          <a:prstGeom xmlns:a="http://schemas.openxmlformats.org/drawingml/2006/main" prst="ellipse">
+            <a:avLst/>
           </a:prstGeom>
           <a:solidFill xmlns:a="http://schemas.openxmlformats.org/drawingml/2006/main">
             <a:srgbClr val="1174B7"/>
@@ -3807,33 +3845,35 @@
           <p:cNvPr id="7" name="">
             <a:extLst xmlns:a="http://schemas.openxmlformats.org/drawingml/2006/main">
               <a:ext uri="{FF2B5EF4-FFF2-40B4-BE49-F238E27FC236}">
-                <a16:creationId xmlns:a16="http://schemas.microsoft.com/office/drawing/2014/main" id="{DBD53266-D4D6-4AF5-A210-34FEF09920BD}"/>
-              </a:ext>
-            </a:extLst>
-          </p:cNvPr>
-          <p:cNvSpPr>
-            <a:spLocks xmlns:a="http://schemas.openxmlformats.org/drawingml/2006/main" noGrp="1"/>
-          </p:cNvSpPr>
-          <p:nvPr/>
-        </p:nvSpPr>
-        <p:spPr>
-          <a:xfrm xmlns:a="http://schemas.openxmlformats.org/drawingml/2006/main">
-            <a:off x="3314700" y="2152650"/>
-            <a:ext cx="704850" cy="381000"/>
-          </a:xfrm>
-          <a:prstGeom xmlns:a="http://schemas.openxmlformats.org/drawingml/2006/main" prst="rect">
-            <a:avLst/>
-          </a:prstGeom>
-          <a:noFill xmlns:a="http://schemas.openxmlformats.org/drawingml/2006/main"/>
-          <a:ln xmlns:a="http://schemas.openxmlformats.org/drawingml/2006/main" w="0">
-            <a:noFill/>
-          </a:ln>
-        </p:spPr>
-        <p:txBody>
-          <a:bodyPr xmlns:a="http://schemas.openxmlformats.org/drawingml/2006/main"/>
-          <a:lstStyle xmlns:a="http://schemas.openxmlformats.org/drawingml/2006/main"/>
-          <a:p xmlns:a="http://schemas.openxmlformats.org/drawingml/2006/main">
-            <a:pPr>
+                <a16:creationId xmlns:a16="http://schemas.microsoft.com/office/drawing/2014/main" id="{7FF0D70B-5B9E-454D-A119-CA64A61C23A4}"/>
+              </a:ext>
+            </a:extLst>
+          </p:cNvPr>
+          <p:cNvSpPr>
+            <a:spLocks xmlns:a="http://schemas.openxmlformats.org/drawingml/2006/main" noGrp="1"/>
+          </p:cNvSpPr>
+          <p:nvPr/>
+        </p:nvSpPr>
+        <p:spPr>
+          <a:xfrm xmlns:a="http://schemas.openxmlformats.org/drawingml/2006/main">
+            <a:off x="3314700" y="2000250"/>
+            <a:ext cx="704850" cy="704850"/>
+          </a:xfrm>
+          <a:prstGeom xmlns:a="http://schemas.openxmlformats.org/drawingml/2006/main" prst="rect">
+            <a:avLst/>
+          </a:prstGeom>
+          <a:noFill xmlns:a="http://schemas.openxmlformats.org/drawingml/2006/main"/>
+          <a:ln xmlns:a="http://schemas.openxmlformats.org/drawingml/2006/main" w="0">
+            <a:noFill/>
+          </a:ln>
+        </p:spPr>
+        <p:txBody>
+          <a:bodyPr xmlns:a="http://schemas.openxmlformats.org/drawingml/2006/main" lIns="0" tIns="0" rIns="0" bIns="0" anchor="ctr">
+            <a:normAutofit fontScale="100000"/>
+          </a:bodyPr>
+          <a:lstStyle xmlns:a="http://schemas.openxmlformats.org/drawingml/2006/main"/>
+          <a:p xmlns:a="http://schemas.openxmlformats.org/drawingml/2006/main">
+            <a:pPr algn="ctr">
               <a:defRPr sz="1725" b="1">
                 <a:solidFill>
                   <a:srgbClr val="FFFFFF"/>
@@ -3862,7 +3902,7 @@
           <p:cNvPr id="8" name="">
             <a:extLst xmlns:a="http://schemas.openxmlformats.org/drawingml/2006/main">
               <a:ext uri="{FF2B5EF4-FFF2-40B4-BE49-F238E27FC236}">
-                <a16:creationId xmlns:a16="http://schemas.microsoft.com/office/drawing/2014/main" id="{254545CE-A714-4056-99EB-A15DEAD0C92E}"/>
+                <a16:creationId xmlns:a16="http://schemas.microsoft.com/office/drawing/2014/main" id="{79F0BD8D-C389-4171-A4AF-4FFD8FC3C024}"/>
               </a:ext>
             </a:extLst>
           </p:cNvPr>
@@ -3885,10 +3925,12 @@
           </a:ln>
         </p:spPr>
         <p:txBody>
-          <a:bodyPr xmlns:a="http://schemas.openxmlformats.org/drawingml/2006/main"/>
-          <a:lstStyle xmlns:a="http://schemas.openxmlformats.org/drawingml/2006/main"/>
-          <a:p xmlns:a="http://schemas.openxmlformats.org/drawingml/2006/main">
-            <a:pPr>
+          <a:bodyPr xmlns:a="http://schemas.openxmlformats.org/drawingml/2006/main">
+            <a:normAutofit fontScale="100000"/>
+          </a:bodyPr>
+          <a:lstStyle xmlns:a="http://schemas.openxmlformats.org/drawingml/2006/main"/>
+          <a:p xmlns:a="http://schemas.openxmlformats.org/drawingml/2006/main">
+            <a:pPr algn="ctr">
               <a:defRPr sz="1500" b="1">
                 <a:solidFill>
                   <a:srgbClr val="122B42"/>
@@ -3917,7 +3959,7 @@
           <p:cNvPr id="9" name="">
             <a:extLst xmlns:a="http://schemas.openxmlformats.org/drawingml/2006/main">
               <a:ext uri="{FF2B5EF4-FFF2-40B4-BE49-F238E27FC236}">
-                <a16:creationId xmlns:a16="http://schemas.microsoft.com/office/drawing/2014/main" id="{36A63E15-3FA3-49EC-8ADD-BF0C5A3C3F2A}"/>
+                <a16:creationId xmlns:a16="http://schemas.microsoft.com/office/drawing/2014/main" id="{B649096E-F82A-47E2-B6A5-925D848AA222}"/>
               </a:ext>
             </a:extLst>
           </p:cNvPr>
@@ -3940,10 +3982,12 @@
           </a:ln>
         </p:spPr>
         <p:txBody>
-          <a:bodyPr xmlns:a="http://schemas.openxmlformats.org/drawingml/2006/main"/>
-          <a:lstStyle xmlns:a="http://schemas.openxmlformats.org/drawingml/2006/main"/>
-          <a:p xmlns:a="http://schemas.openxmlformats.org/drawingml/2006/main">
-            <a:pPr>
+          <a:bodyPr xmlns:a="http://schemas.openxmlformats.org/drawingml/2006/main">
+            <a:normAutofit fontScale="100000"/>
+          </a:bodyPr>
+          <a:lstStyle xmlns:a="http://schemas.openxmlformats.org/drawingml/2006/main"/>
+          <a:p xmlns:a="http://schemas.openxmlformats.org/drawingml/2006/main">
+            <a:pPr algn="ctr">
               <a:defRPr sz="1275" b="0">
                 <a:solidFill>
                   <a:srgbClr val="5C7083"/>
@@ -3972,7 +4016,7 @@
           <p:cNvPr id="10" name="">
             <a:extLst xmlns:a="http://schemas.openxmlformats.org/drawingml/2006/main">
               <a:ext uri="{FF2B5EF4-FFF2-40B4-BE49-F238E27FC236}">
-                <a16:creationId xmlns:a16="http://schemas.microsoft.com/office/drawing/2014/main" id="{29101239-0BE5-4C04-86B2-F84E776D42E5}"/>
+                <a16:creationId xmlns:a16="http://schemas.microsoft.com/office/drawing/2014/main" id="{0D7C3F6B-FEAE-420E-9056-BC8CCBF80694}"/>
               </a:ext>
             </a:extLst>
           </p:cNvPr>
@@ -3986,10 +4030,8 @@
             <a:off x="5581650" y="2000250"/>
             <a:ext cx="704850" cy="704850"/>
           </a:xfrm>
-          <a:prstGeom xmlns:a="http://schemas.openxmlformats.org/drawingml/2006/main" prst="roundRect">
-            <a:avLst>
-              <a:gd name="adj" fmla="val 50000"/>
-            </a:avLst>
+          <a:prstGeom xmlns:a="http://schemas.openxmlformats.org/drawingml/2006/main" prst="ellipse">
+            <a:avLst/>
           </a:prstGeom>
           <a:solidFill xmlns:a="http://schemas.openxmlformats.org/drawingml/2006/main">
             <a:srgbClr val="1174B7"/>
@@ -4006,33 +4048,35 @@
           <p:cNvPr id="11" name="">
             <a:extLst xmlns:a="http://schemas.openxmlformats.org/drawingml/2006/main">
               <a:ext uri="{FF2B5EF4-FFF2-40B4-BE49-F238E27FC236}">
-                <a16:creationId xmlns:a16="http://schemas.microsoft.com/office/drawing/2014/main" id="{CD02D507-0BE4-44A1-95E2-78F0C6933D69}"/>
-              </a:ext>
-            </a:extLst>
-          </p:cNvPr>
-          <p:cNvSpPr>
-            <a:spLocks xmlns:a="http://schemas.openxmlformats.org/drawingml/2006/main" noGrp="1"/>
-          </p:cNvSpPr>
-          <p:nvPr/>
-        </p:nvSpPr>
-        <p:spPr>
-          <a:xfrm xmlns:a="http://schemas.openxmlformats.org/drawingml/2006/main">
-            <a:off x="5581650" y="2152650"/>
-            <a:ext cx="704850" cy="381000"/>
-          </a:xfrm>
-          <a:prstGeom xmlns:a="http://schemas.openxmlformats.org/drawingml/2006/main" prst="rect">
-            <a:avLst/>
-          </a:prstGeom>
-          <a:noFill xmlns:a="http://schemas.openxmlformats.org/drawingml/2006/main"/>
-          <a:ln xmlns:a="http://schemas.openxmlformats.org/drawingml/2006/main" w="0">
-            <a:noFill/>
-          </a:ln>
-        </p:spPr>
-        <p:txBody>
-          <a:bodyPr xmlns:a="http://schemas.openxmlformats.org/drawingml/2006/main"/>
-          <a:lstStyle xmlns:a="http://schemas.openxmlformats.org/drawingml/2006/main"/>
-          <a:p xmlns:a="http://schemas.openxmlformats.org/drawingml/2006/main">
-            <a:pPr>
+                <a16:creationId xmlns:a16="http://schemas.microsoft.com/office/drawing/2014/main" id="{02DF9951-3390-4CB9-8FE0-0F1027C9790E}"/>
+              </a:ext>
+            </a:extLst>
+          </p:cNvPr>
+          <p:cNvSpPr>
+            <a:spLocks xmlns:a="http://schemas.openxmlformats.org/drawingml/2006/main" noGrp="1"/>
+          </p:cNvSpPr>
+          <p:nvPr/>
+        </p:nvSpPr>
+        <p:spPr>
+          <a:xfrm xmlns:a="http://schemas.openxmlformats.org/drawingml/2006/main">
+            <a:off x="5581650" y="2000250"/>
+            <a:ext cx="704850" cy="704850"/>
+          </a:xfrm>
+          <a:prstGeom xmlns:a="http://schemas.openxmlformats.org/drawingml/2006/main" prst="rect">
+            <a:avLst/>
+          </a:prstGeom>
+          <a:noFill xmlns:a="http://schemas.openxmlformats.org/drawingml/2006/main"/>
+          <a:ln xmlns:a="http://schemas.openxmlformats.org/drawingml/2006/main" w="0">
+            <a:noFill/>
+          </a:ln>
+        </p:spPr>
+        <p:txBody>
+          <a:bodyPr xmlns:a="http://schemas.openxmlformats.org/drawingml/2006/main" lIns="0" tIns="0" rIns="0" bIns="0" anchor="ctr">
+            <a:normAutofit fontScale="100000"/>
+          </a:bodyPr>
+          <a:lstStyle xmlns:a="http://schemas.openxmlformats.org/drawingml/2006/main"/>
+          <a:p xmlns:a="http://schemas.openxmlformats.org/drawingml/2006/main">
+            <a:pPr algn="ctr">
               <a:defRPr sz="1725" b="1">
                 <a:solidFill>
                   <a:srgbClr val="FFFFFF"/>
@@ -4061,7 +4105,7 @@
           <p:cNvPr id="12" name="">
             <a:extLst xmlns:a="http://schemas.openxmlformats.org/drawingml/2006/main">
               <a:ext uri="{FF2B5EF4-FFF2-40B4-BE49-F238E27FC236}">
-                <a16:creationId xmlns:a16="http://schemas.microsoft.com/office/drawing/2014/main" id="{EA8D1AEF-51F9-44B7-A077-E08B1A2CAA12}"/>
+                <a16:creationId xmlns:a16="http://schemas.microsoft.com/office/drawing/2014/main" id="{285D528B-F6CD-4113-A986-EC357A013CB1}"/>
               </a:ext>
             </a:extLst>
           </p:cNvPr>
@@ -4084,10 +4128,12 @@
           </a:ln>
         </p:spPr>
         <p:txBody>
-          <a:bodyPr xmlns:a="http://schemas.openxmlformats.org/drawingml/2006/main"/>
-          <a:lstStyle xmlns:a="http://schemas.openxmlformats.org/drawingml/2006/main"/>
-          <a:p xmlns:a="http://schemas.openxmlformats.org/drawingml/2006/main">
-            <a:pPr>
+          <a:bodyPr xmlns:a="http://schemas.openxmlformats.org/drawingml/2006/main">
+            <a:normAutofit fontScale="100000"/>
+          </a:bodyPr>
+          <a:lstStyle xmlns:a="http://schemas.openxmlformats.org/drawingml/2006/main"/>
+          <a:p xmlns:a="http://schemas.openxmlformats.org/drawingml/2006/main">
+            <a:pPr algn="ctr">
               <a:defRPr sz="1500" b="1">
                 <a:solidFill>
                   <a:srgbClr val="122B42"/>
@@ -4116,7 +4162,7 @@
           <p:cNvPr id="13" name="">
             <a:extLst xmlns:a="http://schemas.openxmlformats.org/drawingml/2006/main">
               <a:ext uri="{FF2B5EF4-FFF2-40B4-BE49-F238E27FC236}">
-                <a16:creationId xmlns:a16="http://schemas.microsoft.com/office/drawing/2014/main" id="{554BBDD7-B126-43DC-ACC0-27412DD76020}"/>
+                <a16:creationId xmlns:a16="http://schemas.microsoft.com/office/drawing/2014/main" id="{4128FA11-E2DF-4C08-8CB0-5425D635788B}"/>
               </a:ext>
             </a:extLst>
           </p:cNvPr>
@@ -4139,10 +4185,12 @@
           </a:ln>
         </p:spPr>
         <p:txBody>
-          <a:bodyPr xmlns:a="http://schemas.openxmlformats.org/drawingml/2006/main"/>
-          <a:lstStyle xmlns:a="http://schemas.openxmlformats.org/drawingml/2006/main"/>
-          <a:p xmlns:a="http://schemas.openxmlformats.org/drawingml/2006/main">
-            <a:pPr>
+          <a:bodyPr xmlns:a="http://schemas.openxmlformats.org/drawingml/2006/main">
+            <a:normAutofit fontScale="100000"/>
+          </a:bodyPr>
+          <a:lstStyle xmlns:a="http://schemas.openxmlformats.org/drawingml/2006/main"/>
+          <a:p xmlns:a="http://schemas.openxmlformats.org/drawingml/2006/main">
+            <a:pPr algn="ctr">
               <a:defRPr sz="1275" b="0">
                 <a:solidFill>
                   <a:srgbClr val="5C7083"/>
@@ -4171,7 +4219,7 @@
           <p:cNvPr id="14" name="">
             <a:extLst xmlns:a="http://schemas.openxmlformats.org/drawingml/2006/main">
               <a:ext uri="{FF2B5EF4-FFF2-40B4-BE49-F238E27FC236}">
-                <a16:creationId xmlns:a16="http://schemas.microsoft.com/office/drawing/2014/main" id="{FFA85544-8901-464A-8693-3A683858AE6B}"/>
+                <a16:creationId xmlns:a16="http://schemas.microsoft.com/office/drawing/2014/main" id="{1EF29D27-F2A9-4155-A633-60D9DCCA1DF3}"/>
               </a:ext>
             </a:extLst>
           </p:cNvPr>
@@ -4185,10 +4233,8 @@
             <a:off x="7848600" y="2000250"/>
             <a:ext cx="704850" cy="704850"/>
           </a:xfrm>
-          <a:prstGeom xmlns:a="http://schemas.openxmlformats.org/drawingml/2006/main" prst="roundRect">
-            <a:avLst>
-              <a:gd name="adj" fmla="val 50000"/>
-            </a:avLst>
+          <a:prstGeom xmlns:a="http://schemas.openxmlformats.org/drawingml/2006/main" prst="ellipse">
+            <a:avLst/>
           </a:prstGeom>
           <a:solidFill xmlns:a="http://schemas.openxmlformats.org/drawingml/2006/main">
             <a:srgbClr val="1174B7"/>
@@ -4205,33 +4251,35 @@
           <p:cNvPr id="15" name="">
             <a:extLst xmlns:a="http://schemas.openxmlformats.org/drawingml/2006/main">
               <a:ext uri="{FF2B5EF4-FFF2-40B4-BE49-F238E27FC236}">
-                <a16:creationId xmlns:a16="http://schemas.microsoft.com/office/drawing/2014/main" id="{8D16FCCB-1B66-4DDE-82E4-EA50E02B6536}"/>
-              </a:ext>
-            </a:extLst>
-          </p:cNvPr>
-          <p:cNvSpPr>
-            <a:spLocks xmlns:a="http://schemas.openxmlformats.org/drawingml/2006/main" noGrp="1"/>
-          </p:cNvSpPr>
-          <p:nvPr/>
-        </p:nvSpPr>
-        <p:spPr>
-          <a:xfrm xmlns:a="http://schemas.openxmlformats.org/drawingml/2006/main">
-            <a:off x="7848600" y="2152650"/>
-            <a:ext cx="704850" cy="381000"/>
-          </a:xfrm>
-          <a:prstGeom xmlns:a="http://schemas.openxmlformats.org/drawingml/2006/main" prst="rect">
-            <a:avLst/>
-          </a:prstGeom>
-          <a:noFill xmlns:a="http://schemas.openxmlformats.org/drawingml/2006/main"/>
-          <a:ln xmlns:a="http://schemas.openxmlformats.org/drawingml/2006/main" w="0">
-            <a:noFill/>
-          </a:ln>
-        </p:spPr>
-        <p:txBody>
-          <a:bodyPr xmlns:a="http://schemas.openxmlformats.org/drawingml/2006/main"/>
-          <a:lstStyle xmlns:a="http://schemas.openxmlformats.org/drawingml/2006/main"/>
-          <a:p xmlns:a="http://schemas.openxmlformats.org/drawingml/2006/main">
-            <a:pPr>
+                <a16:creationId xmlns:a16="http://schemas.microsoft.com/office/drawing/2014/main" id="{63546238-8E1A-4FBC-A778-A1D936B5C661}"/>
+              </a:ext>
+            </a:extLst>
+          </p:cNvPr>
+          <p:cNvSpPr>
+            <a:spLocks xmlns:a="http://schemas.openxmlformats.org/drawingml/2006/main" noGrp="1"/>
+          </p:cNvSpPr>
+          <p:nvPr/>
+        </p:nvSpPr>
+        <p:spPr>
+          <a:xfrm xmlns:a="http://schemas.openxmlformats.org/drawingml/2006/main">
+            <a:off x="7848600" y="2000250"/>
+            <a:ext cx="704850" cy="704850"/>
+          </a:xfrm>
+          <a:prstGeom xmlns:a="http://schemas.openxmlformats.org/drawingml/2006/main" prst="rect">
+            <a:avLst/>
+          </a:prstGeom>
+          <a:noFill xmlns:a="http://schemas.openxmlformats.org/drawingml/2006/main"/>
+          <a:ln xmlns:a="http://schemas.openxmlformats.org/drawingml/2006/main" w="0">
+            <a:noFill/>
+          </a:ln>
+        </p:spPr>
+        <p:txBody>
+          <a:bodyPr xmlns:a="http://schemas.openxmlformats.org/drawingml/2006/main" lIns="0" tIns="0" rIns="0" bIns="0" anchor="ctr">
+            <a:normAutofit fontScale="100000"/>
+          </a:bodyPr>
+          <a:lstStyle xmlns:a="http://schemas.openxmlformats.org/drawingml/2006/main"/>
+          <a:p xmlns:a="http://schemas.openxmlformats.org/drawingml/2006/main">
+            <a:pPr algn="ctr">
               <a:defRPr sz="1725" b="1">
                 <a:solidFill>
                   <a:srgbClr val="FFFFFF"/>
@@ -4260,7 +4308,7 @@
           <p:cNvPr id="16" name="">
             <a:extLst xmlns:a="http://schemas.openxmlformats.org/drawingml/2006/main">
               <a:ext uri="{FF2B5EF4-FFF2-40B4-BE49-F238E27FC236}">
-                <a16:creationId xmlns:a16="http://schemas.microsoft.com/office/drawing/2014/main" id="{3C033FE3-7DF0-45A1-8F54-B46FED7DCE6C}"/>
+                <a16:creationId xmlns:a16="http://schemas.microsoft.com/office/drawing/2014/main" id="{374D7A17-0986-4360-969F-2A643CA5989A}"/>
               </a:ext>
             </a:extLst>
           </p:cNvPr>
@@ -4283,10 +4331,12 @@
           </a:ln>
         </p:spPr>
         <p:txBody>
-          <a:bodyPr xmlns:a="http://schemas.openxmlformats.org/drawingml/2006/main"/>
-          <a:lstStyle xmlns:a="http://schemas.openxmlformats.org/drawingml/2006/main"/>
-          <a:p xmlns:a="http://schemas.openxmlformats.org/drawingml/2006/main">
-            <a:pPr>
+          <a:bodyPr xmlns:a="http://schemas.openxmlformats.org/drawingml/2006/main">
+            <a:normAutofit fontScale="100000"/>
+          </a:bodyPr>
+          <a:lstStyle xmlns:a="http://schemas.openxmlformats.org/drawingml/2006/main"/>
+          <a:p xmlns:a="http://schemas.openxmlformats.org/drawingml/2006/main">
+            <a:pPr algn="ctr">
               <a:defRPr sz="1500" b="1">
                 <a:solidFill>
                   <a:srgbClr val="122B42"/>
@@ -4315,7 +4365,7 @@
           <p:cNvPr id="17" name="">
             <a:extLst xmlns:a="http://schemas.openxmlformats.org/drawingml/2006/main">
               <a:ext uri="{FF2B5EF4-FFF2-40B4-BE49-F238E27FC236}">
-                <a16:creationId xmlns:a16="http://schemas.microsoft.com/office/drawing/2014/main" id="{3007EB64-F6A6-4856-96C9-552499CF3C1F}"/>
+                <a16:creationId xmlns:a16="http://schemas.microsoft.com/office/drawing/2014/main" id="{C256DBCB-502A-471C-B6DF-07C889EFA23A}"/>
               </a:ext>
             </a:extLst>
           </p:cNvPr>
@@ -4338,10 +4388,12 @@
           </a:ln>
         </p:spPr>
         <p:txBody>
-          <a:bodyPr xmlns:a="http://schemas.openxmlformats.org/drawingml/2006/main"/>
-          <a:lstStyle xmlns:a="http://schemas.openxmlformats.org/drawingml/2006/main"/>
-          <a:p xmlns:a="http://schemas.openxmlformats.org/drawingml/2006/main">
-            <a:pPr>
+          <a:bodyPr xmlns:a="http://schemas.openxmlformats.org/drawingml/2006/main">
+            <a:normAutofit fontScale="92468"/>
+          </a:bodyPr>
+          <a:lstStyle xmlns:a="http://schemas.openxmlformats.org/drawingml/2006/main"/>
+          <a:p xmlns:a="http://schemas.openxmlformats.org/drawingml/2006/main">
+            <a:pPr algn="ctr">
               <a:defRPr sz="1275" b="0">
                 <a:solidFill>
                   <a:srgbClr val="5C7083"/>
@@ -4370,7 +4422,7 @@
           <p:cNvPr id="18" name="">
             <a:extLst xmlns:a="http://schemas.openxmlformats.org/drawingml/2006/main">
               <a:ext uri="{FF2B5EF4-FFF2-40B4-BE49-F238E27FC236}">
-                <a16:creationId xmlns:a16="http://schemas.microsoft.com/office/drawing/2014/main" id="{83CB510A-39C4-4254-8CD8-92CCB1F8808E}"/>
+                <a16:creationId xmlns:a16="http://schemas.microsoft.com/office/drawing/2014/main" id="{FCD5F771-7816-42F7-80AB-7CFB430C44C7}"/>
               </a:ext>
             </a:extLst>
           </p:cNvPr>
@@ -4384,10 +4436,8 @@
             <a:off x="10115550" y="2000250"/>
             <a:ext cx="704850" cy="704850"/>
           </a:xfrm>
-          <a:prstGeom xmlns:a="http://schemas.openxmlformats.org/drawingml/2006/main" prst="roundRect">
-            <a:avLst>
-              <a:gd name="adj" fmla="val 50000"/>
-            </a:avLst>
+          <a:prstGeom xmlns:a="http://schemas.openxmlformats.org/drawingml/2006/main" prst="ellipse">
+            <a:avLst/>
           </a:prstGeom>
           <a:solidFill xmlns:a="http://schemas.openxmlformats.org/drawingml/2006/main">
             <a:srgbClr val="1174B7"/>
@@ -4404,33 +4454,35 @@
           <p:cNvPr id="19" name="">
             <a:extLst xmlns:a="http://schemas.openxmlformats.org/drawingml/2006/main">
               <a:ext uri="{FF2B5EF4-FFF2-40B4-BE49-F238E27FC236}">
-                <a16:creationId xmlns:a16="http://schemas.microsoft.com/office/drawing/2014/main" id="{2EF71BE8-3630-473C-AA50-F116748B5958}"/>
-              </a:ext>
-            </a:extLst>
-          </p:cNvPr>
-          <p:cNvSpPr>
-            <a:spLocks xmlns:a="http://schemas.openxmlformats.org/drawingml/2006/main" noGrp="1"/>
-          </p:cNvSpPr>
-          <p:nvPr/>
-        </p:nvSpPr>
-        <p:spPr>
-          <a:xfrm xmlns:a="http://schemas.openxmlformats.org/drawingml/2006/main">
-            <a:off x="10115550" y="2152650"/>
-            <a:ext cx="704850" cy="381000"/>
-          </a:xfrm>
-          <a:prstGeom xmlns:a="http://schemas.openxmlformats.org/drawingml/2006/main" prst="rect">
-            <a:avLst/>
-          </a:prstGeom>
-          <a:noFill xmlns:a="http://schemas.openxmlformats.org/drawingml/2006/main"/>
-          <a:ln xmlns:a="http://schemas.openxmlformats.org/drawingml/2006/main" w="0">
-            <a:noFill/>
-          </a:ln>
-        </p:spPr>
-        <p:txBody>
-          <a:bodyPr xmlns:a="http://schemas.openxmlformats.org/drawingml/2006/main"/>
-          <a:lstStyle xmlns:a="http://schemas.openxmlformats.org/drawingml/2006/main"/>
-          <a:p xmlns:a="http://schemas.openxmlformats.org/drawingml/2006/main">
-            <a:pPr>
+                <a16:creationId xmlns:a16="http://schemas.microsoft.com/office/drawing/2014/main" id="{F73C4710-56F8-4DE2-9FC6-1E38F2FADD51}"/>
+              </a:ext>
+            </a:extLst>
+          </p:cNvPr>
+          <p:cNvSpPr>
+            <a:spLocks xmlns:a="http://schemas.openxmlformats.org/drawingml/2006/main" noGrp="1"/>
+          </p:cNvSpPr>
+          <p:nvPr/>
+        </p:nvSpPr>
+        <p:spPr>
+          <a:xfrm xmlns:a="http://schemas.openxmlformats.org/drawingml/2006/main">
+            <a:off x="10115550" y="2000250"/>
+            <a:ext cx="704850" cy="704850"/>
+          </a:xfrm>
+          <a:prstGeom xmlns:a="http://schemas.openxmlformats.org/drawingml/2006/main" prst="rect">
+            <a:avLst/>
+          </a:prstGeom>
+          <a:noFill xmlns:a="http://schemas.openxmlformats.org/drawingml/2006/main"/>
+          <a:ln xmlns:a="http://schemas.openxmlformats.org/drawingml/2006/main" w="0">
+            <a:noFill/>
+          </a:ln>
+        </p:spPr>
+        <p:txBody>
+          <a:bodyPr xmlns:a="http://schemas.openxmlformats.org/drawingml/2006/main" lIns="0" tIns="0" rIns="0" bIns="0" anchor="ctr">
+            <a:normAutofit fontScale="100000"/>
+          </a:bodyPr>
+          <a:lstStyle xmlns:a="http://schemas.openxmlformats.org/drawingml/2006/main"/>
+          <a:p xmlns:a="http://schemas.openxmlformats.org/drawingml/2006/main">
+            <a:pPr algn="ctr">
               <a:defRPr sz="1725" b="1">
                 <a:solidFill>
                   <a:srgbClr val="FFFFFF"/>
@@ -4459,7 +4511,7 @@
           <p:cNvPr id="20" name="">
             <a:extLst xmlns:a="http://schemas.openxmlformats.org/drawingml/2006/main">
               <a:ext uri="{FF2B5EF4-FFF2-40B4-BE49-F238E27FC236}">
-                <a16:creationId xmlns:a16="http://schemas.microsoft.com/office/drawing/2014/main" id="{0C93B03F-D1DE-4618-B21E-05279108EE7A}"/>
+                <a16:creationId xmlns:a16="http://schemas.microsoft.com/office/drawing/2014/main" id="{457F3573-80DB-4E7E-8F1A-A4799C5DFDBA}"/>
               </a:ext>
             </a:extLst>
           </p:cNvPr>
@@ -4482,10 +4534,12 @@
           </a:ln>
         </p:spPr>
         <p:txBody>
-          <a:bodyPr xmlns:a="http://schemas.openxmlformats.org/drawingml/2006/main"/>
-          <a:lstStyle xmlns:a="http://schemas.openxmlformats.org/drawingml/2006/main"/>
-          <a:p xmlns:a="http://schemas.openxmlformats.org/drawingml/2006/main">
-            <a:pPr>
+          <a:bodyPr xmlns:a="http://schemas.openxmlformats.org/drawingml/2006/main">
+            <a:normAutofit fontScale="100000"/>
+          </a:bodyPr>
+          <a:lstStyle xmlns:a="http://schemas.openxmlformats.org/drawingml/2006/main"/>
+          <a:p xmlns:a="http://schemas.openxmlformats.org/drawingml/2006/main">
+            <a:pPr algn="ctr">
               <a:defRPr sz="1500" b="1">
                 <a:solidFill>
                   <a:srgbClr val="122B42"/>
@@ -4514,7 +4568,7 @@
           <p:cNvPr id="21" name="">
             <a:extLst xmlns:a="http://schemas.openxmlformats.org/drawingml/2006/main">
               <a:ext uri="{FF2B5EF4-FFF2-40B4-BE49-F238E27FC236}">
-                <a16:creationId xmlns:a16="http://schemas.microsoft.com/office/drawing/2014/main" id="{13188D8A-C709-4BBD-83B5-BDA74ADFDABE}"/>
+                <a16:creationId xmlns:a16="http://schemas.microsoft.com/office/drawing/2014/main" id="{7BC35D7A-6329-455F-BA66-9C457F5DB154}"/>
               </a:ext>
             </a:extLst>
           </p:cNvPr>
@@ -4537,10 +4591,12 @@
           </a:ln>
         </p:spPr>
         <p:txBody>
-          <a:bodyPr xmlns:a="http://schemas.openxmlformats.org/drawingml/2006/main"/>
-          <a:lstStyle xmlns:a="http://schemas.openxmlformats.org/drawingml/2006/main"/>
-          <a:p xmlns:a="http://schemas.openxmlformats.org/drawingml/2006/main">
-            <a:pPr>
+          <a:bodyPr xmlns:a="http://schemas.openxmlformats.org/drawingml/2006/main">
+            <a:normAutofit fontScale="100000"/>
+          </a:bodyPr>
+          <a:lstStyle xmlns:a="http://schemas.openxmlformats.org/drawingml/2006/main"/>
+          <a:p xmlns:a="http://schemas.openxmlformats.org/drawingml/2006/main">
+            <a:pPr algn="ctr">
               <a:defRPr sz="1275" b="0">
                 <a:solidFill>
                   <a:srgbClr val="5C7083"/>
@@ -4569,7 +4625,7 @@
           <p:cNvPr id="22" name="">
             <a:extLst xmlns:a="http://schemas.openxmlformats.org/drawingml/2006/main">
               <a:ext uri="{FF2B5EF4-FFF2-40B4-BE49-F238E27FC236}">
-                <a16:creationId xmlns:a16="http://schemas.microsoft.com/office/drawing/2014/main" id="{DF7372F0-0865-47CF-B6DF-56425DA482B0}"/>
+                <a16:creationId xmlns:a16="http://schemas.microsoft.com/office/drawing/2014/main" id="{BD9476D1-C913-4B3C-85EB-A125B2EF6600}"/>
               </a:ext>
             </a:extLst>
           </p:cNvPr>
@@ -4603,7 +4659,7 @@
           <p:cNvPr id="23" name="">
             <a:extLst xmlns:a="http://schemas.openxmlformats.org/drawingml/2006/main">
               <a:ext uri="{FF2B5EF4-FFF2-40B4-BE49-F238E27FC236}">
-                <a16:creationId xmlns:a16="http://schemas.microsoft.com/office/drawing/2014/main" id="{B549C62E-47EB-4E7E-B170-41F1C6C456C2}"/>
+                <a16:creationId xmlns:a16="http://schemas.microsoft.com/office/drawing/2014/main" id="{7B3702F9-AA72-4DAE-BE21-97437F25C329}"/>
               </a:ext>
             </a:extLst>
           </p:cNvPr>
@@ -4626,7 +4682,9 @@
           </a:ln>
         </p:spPr>
         <p:txBody>
-          <a:bodyPr xmlns:a="http://schemas.openxmlformats.org/drawingml/2006/main"/>
+          <a:bodyPr xmlns:a="http://schemas.openxmlformats.org/drawingml/2006/main">
+            <a:normAutofit fontScale="71930"/>
+          </a:bodyPr>
           <a:lstStyle xmlns:a="http://schemas.openxmlformats.org/drawingml/2006/main"/>
           <a:p xmlns:a="http://schemas.openxmlformats.org/drawingml/2006/main">
             <a:pPr>
@@ -4658,7 +4716,7 @@
           <p:cNvPr id="24" name="">
             <a:extLst xmlns:a="http://schemas.openxmlformats.org/drawingml/2006/main">
               <a:ext uri="{FF2B5EF4-FFF2-40B4-BE49-F238E27FC236}">
-                <a16:creationId xmlns:a16="http://schemas.microsoft.com/office/drawing/2014/main" id="{B7B663C8-3544-4B9F-AAF2-84635D110788}"/>
+                <a16:creationId xmlns:a16="http://schemas.microsoft.com/office/drawing/2014/main" id="{06ACF046-6310-4414-9ABC-DDE3F26ED3DE}"/>
               </a:ext>
             </a:extLst>
           </p:cNvPr>
@@ -4681,7 +4739,9 @@
           </a:ln>
         </p:spPr>
         <p:txBody>
-          <a:bodyPr xmlns:a="http://schemas.openxmlformats.org/drawingml/2006/main"/>
+          <a:bodyPr xmlns:a="http://schemas.openxmlformats.org/drawingml/2006/main">
+            <a:normAutofit fontScale="85185"/>
+          </a:bodyPr>
           <a:lstStyle xmlns:a="http://schemas.openxmlformats.org/drawingml/2006/main"/>
           <a:p xmlns:a="http://schemas.openxmlformats.org/drawingml/2006/main">
             <a:pPr>
@@ -4713,7 +4773,7 @@
           <p:cNvPr id="25" name="">
             <a:extLst xmlns:a="http://schemas.openxmlformats.org/drawingml/2006/main">
               <a:ext uri="{FF2B5EF4-FFF2-40B4-BE49-F238E27FC236}">
-                <a16:creationId xmlns:a16="http://schemas.microsoft.com/office/drawing/2014/main" id="{3A06D8E5-449F-4A86-A9F7-63CDA9BF9277}"/>
+                <a16:creationId xmlns:a16="http://schemas.microsoft.com/office/drawing/2014/main" id="{8A093B1A-50F7-4D08-919C-E149DD03D478}"/>
               </a:ext>
             </a:extLst>
           </p:cNvPr>
@@ -4736,7 +4796,9 @@
           </a:ln>
         </p:spPr>
         <p:txBody>
-          <a:bodyPr xmlns:a="http://schemas.openxmlformats.org/drawingml/2006/main"/>
+          <a:bodyPr xmlns:a="http://schemas.openxmlformats.org/drawingml/2006/main">
+            <a:normAutofit fontScale="66667"/>
+          </a:bodyPr>
           <a:lstStyle xmlns:a="http://schemas.openxmlformats.org/drawingml/2006/main"/>
           <a:p xmlns:a="http://schemas.openxmlformats.org/drawingml/2006/main">
             <a:pPr>
@@ -4768,7 +4830,7 @@
           <p:cNvPr id="26" name="">
             <a:extLst xmlns:a="http://schemas.openxmlformats.org/drawingml/2006/main">
               <a:ext uri="{FF2B5EF4-FFF2-40B4-BE49-F238E27FC236}">
-                <a16:creationId xmlns:a16="http://schemas.microsoft.com/office/drawing/2014/main" id="{694B467B-78EA-46E0-9728-60095F19ED93}"/>
+                <a16:creationId xmlns:a16="http://schemas.microsoft.com/office/drawing/2014/main" id="{0B6744A1-0E20-4F46-931D-53DC39C07D52}"/>
               </a:ext>
             </a:extLst>
           </p:cNvPr>
@@ -4791,10 +4853,12 @@
           </a:ln>
         </p:spPr>
         <p:txBody>
-          <a:bodyPr xmlns:a="http://schemas.openxmlformats.org/drawingml/2006/main"/>
-          <a:lstStyle xmlns:a="http://schemas.openxmlformats.org/drawingml/2006/main"/>
-          <a:p xmlns:a="http://schemas.openxmlformats.org/drawingml/2006/main">
-            <a:pPr>
+          <a:bodyPr xmlns:a="http://schemas.openxmlformats.org/drawingml/2006/main">
+            <a:normAutofit fontScale="66667"/>
+          </a:bodyPr>
+          <a:lstStyle xmlns:a="http://schemas.openxmlformats.org/drawingml/2006/main"/>
+          <a:p xmlns:a="http://schemas.openxmlformats.org/drawingml/2006/main">
+            <a:pPr algn="r">
               <a:defRPr sz="975" b="0">
                 <a:solidFill>
                   <a:srgbClr val="5C7083"/>
@@ -4821,7 +4885,7 @@
     </p:spTree>
     <p:extLst>
       <p:ext uri="{BB962C8B-B14F-4D97-AF65-F5344CB8AC3E}">
-        <p14:creationId xmlns:p14="http://schemas.microsoft.com/office/powerpoint/2010/main" val="142116916"/>
+        <p14:creationId xmlns:p14="http://schemas.microsoft.com/office/powerpoint/2010/main" val="56652087"/>
       </p:ext>
     </p:extLst>
   </p:cSld>
@@ -4852,7 +4916,7 @@
           <p:cNvPr id="10" name="">
             <a:extLst xmlns:a="http://schemas.openxmlformats.org/drawingml/2006/main">
               <a:ext uri="{FF2B5EF4-FFF2-40B4-BE49-F238E27FC236}">
-                <a16:creationId xmlns:a16="http://schemas.microsoft.com/office/drawing/2014/main" id="{E6CB3D6C-48BD-4B7E-9C22-BE18F1E1EF58}"/>
+                <a16:creationId xmlns:a16="http://schemas.microsoft.com/office/drawing/2014/main" id="{EC0BF6B6-EB16-4927-ABFB-A8806986F8E4}"/>
               </a:ext>
             </a:extLst>
           </p:cNvPr>
@@ -4875,7 +4939,9 @@
           </a:ln>
         </p:spPr>
         <p:txBody>
-          <a:bodyPr xmlns:a="http://schemas.openxmlformats.org/drawingml/2006/main"/>
+          <a:bodyPr xmlns:a="http://schemas.openxmlformats.org/drawingml/2006/main">
+            <a:normAutofit fontScale="95175"/>
+          </a:bodyPr>
           <a:lstStyle xmlns:a="http://schemas.openxmlformats.org/drawingml/2006/main"/>
           <a:p xmlns:a="http://schemas.openxmlformats.org/drawingml/2006/main">
             <a:pPr>
@@ -4907,7 +4973,7 @@
           <p:cNvPr id="2" name="">
             <a:extLst xmlns:a="http://schemas.openxmlformats.org/drawingml/2006/main">
               <a:ext uri="{FF2B5EF4-FFF2-40B4-BE49-F238E27FC236}">
-                <a16:creationId xmlns:a16="http://schemas.microsoft.com/office/drawing/2014/main" id="{DB8DF425-BA25-455B-AFFE-0EAE1CFD9734}"/>
+                <a16:creationId xmlns:a16="http://schemas.microsoft.com/office/drawing/2014/main" id="{A4DFAC7A-DF03-4CCD-BC9F-1D231630EF61}"/>
               </a:ext>
             </a:extLst>
           </p:cNvPr>
@@ -4930,7 +4996,9 @@
           </a:ln>
         </p:spPr>
         <p:txBody>
-          <a:bodyPr xmlns:a="http://schemas.openxmlformats.org/drawingml/2006/main"/>
+          <a:bodyPr xmlns:a="http://schemas.openxmlformats.org/drawingml/2006/main">
+            <a:normAutofit fontScale="89167"/>
+          </a:bodyPr>
           <a:lstStyle xmlns:a="http://schemas.openxmlformats.org/drawingml/2006/main"/>
           <a:p xmlns:a="http://schemas.openxmlformats.org/drawingml/2006/main">
             <a:pPr>
@@ -4966,7 +5034,7 @@
           <p:nvPr/>
         </p:nvPicPr>
         <p:blipFill>
-          <a:blip xmlns:r="http://schemas.openxmlformats.org/officeDocument/2006/relationships" xmlns:a="http://schemas.openxmlformats.org/drawingml/2006/main" r:embed="R66be4d15f5034271"/>
+          <a:blip xmlns:r="http://schemas.openxmlformats.org/officeDocument/2006/relationships" xmlns:a="http://schemas.openxmlformats.org/drawingml/2006/main" r:embed="R87824d212fa844f3"/>
           <a:srcRect xmlns:a="http://schemas.openxmlformats.org/drawingml/2006/main" l="0" t="2044" r="0" b="2044"/>
           <a:stretch xmlns:a="http://schemas.openxmlformats.org/drawingml/2006/main">
             <a:fillRect l="0" t="0" r="0" b="0"/>
@@ -4989,7 +5057,7 @@
           <p:cNvPr id="4" name="">
             <a:extLst xmlns:a="http://schemas.openxmlformats.org/drawingml/2006/main">
               <a:ext uri="{FF2B5EF4-FFF2-40B4-BE49-F238E27FC236}">
-                <a16:creationId xmlns:a16="http://schemas.microsoft.com/office/drawing/2014/main" id="{39E04CD6-E8B6-4A64-AFAA-1998651F0166}"/>
+                <a16:creationId xmlns:a16="http://schemas.microsoft.com/office/drawing/2014/main" id="{F1E0F09C-1755-4596-BC51-E3C65B7BE90D}"/>
               </a:ext>
             </a:extLst>
           </p:cNvPr>
@@ -5012,7 +5080,9 @@
           </a:ln>
         </p:spPr>
         <p:txBody>
-          <a:bodyPr xmlns:a="http://schemas.openxmlformats.org/drawingml/2006/main"/>
+          <a:bodyPr xmlns:a="http://schemas.openxmlformats.org/drawingml/2006/main">
+            <a:normAutofit fontScale="84921"/>
+          </a:bodyPr>
           <a:lstStyle xmlns:a="http://schemas.openxmlformats.org/drawingml/2006/main"/>
           <a:p xmlns:a="http://schemas.openxmlformats.org/drawingml/2006/main">
             <a:pPr>
@@ -5044,7 +5114,7 @@
           <p:cNvPr id="5" name="">
             <a:extLst xmlns:a="http://schemas.openxmlformats.org/drawingml/2006/main">
               <a:ext uri="{FF2B5EF4-FFF2-40B4-BE49-F238E27FC236}">
-                <a16:creationId xmlns:a16="http://schemas.microsoft.com/office/drawing/2014/main" id="{F75E8150-F860-4FE8-9B3D-7DA6A5B6D65C}"/>
+                <a16:creationId xmlns:a16="http://schemas.microsoft.com/office/drawing/2014/main" id="{219B03B9-150B-49DB-8CC7-ABEF8EEBB8A8}"/>
               </a:ext>
             </a:extLst>
           </p:cNvPr>
@@ -5067,7 +5137,9 @@
           </a:ln>
         </p:spPr>
         <p:txBody>
-          <a:bodyPr xmlns:a="http://schemas.openxmlformats.org/drawingml/2006/main"/>
+          <a:bodyPr xmlns:a="http://schemas.openxmlformats.org/drawingml/2006/main">
+            <a:normAutofit fontScale="90417"/>
+          </a:bodyPr>
           <a:lstStyle xmlns:a="http://schemas.openxmlformats.org/drawingml/2006/main"/>
           <a:p xmlns:a="http://schemas.openxmlformats.org/drawingml/2006/main">
             <a:pPr>
@@ -5099,7 +5171,7 @@
           <p:cNvPr id="6" name="">
             <a:extLst xmlns:a="http://schemas.openxmlformats.org/drawingml/2006/main">
               <a:ext uri="{FF2B5EF4-FFF2-40B4-BE49-F238E27FC236}">
-                <a16:creationId xmlns:a16="http://schemas.microsoft.com/office/drawing/2014/main" id="{E1BCC998-AAFC-48E8-8BE0-1B4E14C7784A}"/>
+                <a16:creationId xmlns:a16="http://schemas.microsoft.com/office/drawing/2014/main" id="{38CAA624-3F42-4320-940F-FA522F45495B}"/>
               </a:ext>
             </a:extLst>
           </p:cNvPr>
@@ -5122,7 +5194,9 @@
           </a:ln>
         </p:spPr>
         <p:txBody>
-          <a:bodyPr xmlns:a="http://schemas.openxmlformats.org/drawingml/2006/main"/>
+          <a:bodyPr xmlns:a="http://schemas.openxmlformats.org/drawingml/2006/main">
+            <a:normAutofit fontScale="100000"/>
+          </a:bodyPr>
           <a:lstStyle xmlns:a="http://schemas.openxmlformats.org/drawingml/2006/main"/>
           <a:p xmlns:a="http://schemas.openxmlformats.org/drawingml/2006/main">
             <a:pPr>
@@ -5154,7 +5228,7 @@
           <p:cNvPr id="7" name="">
             <a:extLst xmlns:a="http://schemas.openxmlformats.org/drawingml/2006/main">
               <a:ext uri="{FF2B5EF4-FFF2-40B4-BE49-F238E27FC236}">
-                <a16:creationId xmlns:a16="http://schemas.microsoft.com/office/drawing/2014/main" id="{932282BC-9203-484F-89EF-E9BCA68339AF}"/>
+                <a16:creationId xmlns:a16="http://schemas.microsoft.com/office/drawing/2014/main" id="{2BD8A191-2818-4B8D-8D84-7FE9DAC05B66}"/>
               </a:ext>
             </a:extLst>
           </p:cNvPr>
@@ -5177,7 +5251,9 @@
           </a:ln>
         </p:spPr>
         <p:txBody>
-          <a:bodyPr xmlns:a="http://schemas.openxmlformats.org/drawingml/2006/main"/>
+          <a:bodyPr xmlns:a="http://schemas.openxmlformats.org/drawingml/2006/main">
+            <a:normAutofit fontScale="100000"/>
+          </a:bodyPr>
           <a:lstStyle xmlns:a="http://schemas.openxmlformats.org/drawingml/2006/main"/>
           <a:p xmlns:a="http://schemas.openxmlformats.org/drawingml/2006/main">
             <a:pPr>
@@ -5209,7 +5285,7 @@
           <p:cNvPr id="8" name="">
             <a:extLst xmlns:a="http://schemas.openxmlformats.org/drawingml/2006/main">
               <a:ext uri="{FF2B5EF4-FFF2-40B4-BE49-F238E27FC236}">
-                <a16:creationId xmlns:a16="http://schemas.microsoft.com/office/drawing/2014/main" id="{0461C066-992C-4BBD-AA56-6F49B06E49D3}"/>
+                <a16:creationId xmlns:a16="http://schemas.microsoft.com/office/drawing/2014/main" id="{61072D3D-729A-4CC4-872F-75D4DEA4A4F8}"/>
               </a:ext>
             </a:extLst>
           </p:cNvPr>
@@ -5232,7 +5308,9 @@
           </a:ln>
         </p:spPr>
         <p:txBody>
-          <a:bodyPr xmlns:a="http://schemas.openxmlformats.org/drawingml/2006/main"/>
+          <a:bodyPr xmlns:a="http://schemas.openxmlformats.org/drawingml/2006/main">
+            <a:normAutofit fontScale="66667"/>
+          </a:bodyPr>
           <a:lstStyle xmlns:a="http://schemas.openxmlformats.org/drawingml/2006/main"/>
           <a:p xmlns:a="http://schemas.openxmlformats.org/drawingml/2006/main">
             <a:pPr>
@@ -5264,7 +5342,7 @@
           <p:cNvPr id="9" name="">
             <a:extLst xmlns:a="http://schemas.openxmlformats.org/drawingml/2006/main">
               <a:ext uri="{FF2B5EF4-FFF2-40B4-BE49-F238E27FC236}">
-                <a16:creationId xmlns:a16="http://schemas.microsoft.com/office/drawing/2014/main" id="{56AEAF11-2D50-4416-8DC9-DD8E2E02AC0B}"/>
+                <a16:creationId xmlns:a16="http://schemas.microsoft.com/office/drawing/2014/main" id="{B4E295B4-2F7E-483C-BD82-F62AD6794BFA}"/>
               </a:ext>
             </a:extLst>
           </p:cNvPr>
@@ -5287,10 +5365,12 @@
           </a:ln>
         </p:spPr>
         <p:txBody>
-          <a:bodyPr xmlns:a="http://schemas.openxmlformats.org/drawingml/2006/main"/>
-          <a:lstStyle xmlns:a="http://schemas.openxmlformats.org/drawingml/2006/main"/>
-          <a:p xmlns:a="http://schemas.openxmlformats.org/drawingml/2006/main">
-            <a:pPr>
+          <a:bodyPr xmlns:a="http://schemas.openxmlformats.org/drawingml/2006/main">
+            <a:normAutofit fontScale="66667"/>
+          </a:bodyPr>
+          <a:lstStyle xmlns:a="http://schemas.openxmlformats.org/drawingml/2006/main"/>
+          <a:p xmlns:a="http://schemas.openxmlformats.org/drawingml/2006/main">
+            <a:pPr algn="r">
               <a:defRPr sz="975" b="0">
                 <a:solidFill>
                   <a:srgbClr val="5C7083"/>
@@ -5317,7 +5397,7 @@
     </p:spTree>
     <p:extLst>
       <p:ext uri="{BB962C8B-B14F-4D97-AF65-F5344CB8AC3E}">
-        <p14:creationId xmlns:p14="http://schemas.microsoft.com/office/powerpoint/2010/main" val="30853690"/>
+        <p14:creationId xmlns:p14="http://schemas.microsoft.com/office/powerpoint/2010/main" val="1039063789"/>
       </p:ext>
     </p:extLst>
   </p:cSld>
@@ -5348,7 +5428,7 @@
           <p:cNvPr id="12" name="">
             <a:extLst xmlns:a="http://schemas.openxmlformats.org/drawingml/2006/main">
               <a:ext uri="{FF2B5EF4-FFF2-40B4-BE49-F238E27FC236}">
-                <a16:creationId xmlns:a16="http://schemas.microsoft.com/office/drawing/2014/main" id="{CE3D417F-02F0-41C6-9C20-4602C25FD9FB}"/>
+                <a16:creationId xmlns:a16="http://schemas.microsoft.com/office/drawing/2014/main" id="{F02661B9-49B1-41AC-8DB8-4014416B281D}"/>
               </a:ext>
             </a:extLst>
           </p:cNvPr>
@@ -5371,7 +5451,9 @@
           </a:ln>
         </p:spPr>
         <p:txBody>
-          <a:bodyPr xmlns:a="http://schemas.openxmlformats.org/drawingml/2006/main"/>
+          <a:bodyPr xmlns:a="http://schemas.openxmlformats.org/drawingml/2006/main">
+            <a:normAutofit fontScale="95175"/>
+          </a:bodyPr>
           <a:lstStyle xmlns:a="http://schemas.openxmlformats.org/drawingml/2006/main"/>
           <a:p xmlns:a="http://schemas.openxmlformats.org/drawingml/2006/main">
             <a:pPr>
@@ -5403,7 +5485,7 @@
           <p:cNvPr id="2" name="">
             <a:extLst xmlns:a="http://schemas.openxmlformats.org/drawingml/2006/main">
               <a:ext uri="{FF2B5EF4-FFF2-40B4-BE49-F238E27FC236}">
-                <a16:creationId xmlns:a16="http://schemas.microsoft.com/office/drawing/2014/main" id="{D2D1DC7F-CE34-4494-A39F-10C43EE34A83}"/>
+                <a16:creationId xmlns:a16="http://schemas.microsoft.com/office/drawing/2014/main" id="{9F7F492F-1C5B-4CA3-B373-34F4330FFE93}"/>
               </a:ext>
             </a:extLst>
           </p:cNvPr>
@@ -5426,7 +5508,9 @@
           </a:ln>
         </p:spPr>
         <p:txBody>
-          <a:bodyPr xmlns:a="http://schemas.openxmlformats.org/drawingml/2006/main"/>
+          <a:bodyPr xmlns:a="http://schemas.openxmlformats.org/drawingml/2006/main">
+            <a:normAutofit fontScale="68590"/>
+          </a:bodyPr>
           <a:lstStyle xmlns:a="http://schemas.openxmlformats.org/drawingml/2006/main"/>
           <a:p xmlns:a="http://schemas.openxmlformats.org/drawingml/2006/main">
             <a:pPr>
@@ -5458,7 +5542,7 @@
           <p:cNvPr id="3" name="">
             <a:extLst xmlns:a="http://schemas.openxmlformats.org/drawingml/2006/main">
               <a:ext uri="{FF2B5EF4-FFF2-40B4-BE49-F238E27FC236}">
-                <a16:creationId xmlns:a16="http://schemas.microsoft.com/office/drawing/2014/main" id="{73BD5AB1-657D-4CDD-8DDE-819DFC2AE059}"/>
+                <a16:creationId xmlns:a16="http://schemas.microsoft.com/office/drawing/2014/main" id="{06A8192F-B230-4B85-95FC-B25C7D2BB704}"/>
               </a:ext>
             </a:extLst>
           </p:cNvPr>
@@ -5481,7 +5565,9 @@
           </a:ln>
         </p:spPr>
         <p:txBody>
-          <a:bodyPr xmlns:a="http://schemas.openxmlformats.org/drawingml/2006/main"/>
+          <a:bodyPr xmlns:a="http://schemas.openxmlformats.org/drawingml/2006/main">
+            <a:normAutofit fontScale="94772"/>
+          </a:bodyPr>
           <a:lstStyle xmlns:a="http://schemas.openxmlformats.org/drawingml/2006/main"/>
           <a:p xmlns:a="http://schemas.openxmlformats.org/drawingml/2006/main">
             <a:pPr>
@@ -5513,7 +5599,7 @@
           <p:cNvPr id="4" name="">
             <a:extLst xmlns:a="http://schemas.openxmlformats.org/drawingml/2006/main">
               <a:ext uri="{FF2B5EF4-FFF2-40B4-BE49-F238E27FC236}">
-                <a16:creationId xmlns:a16="http://schemas.microsoft.com/office/drawing/2014/main" id="{AC8808FF-A302-4A85-91C0-74055C88BAA2}"/>
+                <a16:creationId xmlns:a16="http://schemas.microsoft.com/office/drawing/2014/main" id="{E15EB9FE-3801-4A71-A30D-3931A7564C48}"/>
               </a:ext>
             </a:extLst>
           </p:cNvPr>
@@ -5536,7 +5622,9 @@
           </a:ln>
         </p:spPr>
         <p:txBody>
-          <a:bodyPr xmlns:a="http://schemas.openxmlformats.org/drawingml/2006/main"/>
+          <a:bodyPr xmlns:a="http://schemas.openxmlformats.org/drawingml/2006/main">
+            <a:normAutofit fontScale="68590"/>
+          </a:bodyPr>
           <a:lstStyle xmlns:a="http://schemas.openxmlformats.org/drawingml/2006/main"/>
           <a:p xmlns:a="http://schemas.openxmlformats.org/drawingml/2006/main">
             <a:pPr>
@@ -5568,7 +5656,7 @@
           <p:cNvPr id="5" name="">
             <a:extLst xmlns:a="http://schemas.openxmlformats.org/drawingml/2006/main">
               <a:ext uri="{FF2B5EF4-FFF2-40B4-BE49-F238E27FC236}">
-                <a16:creationId xmlns:a16="http://schemas.microsoft.com/office/drawing/2014/main" id="{1BA18C80-DAB6-4401-A7C8-61A4ED31FD49}"/>
+                <a16:creationId xmlns:a16="http://schemas.microsoft.com/office/drawing/2014/main" id="{7CF271DC-C783-4CCA-A515-B379608D2F61}"/>
               </a:ext>
             </a:extLst>
           </p:cNvPr>
@@ -5591,7 +5679,9 @@
           </a:ln>
         </p:spPr>
         <p:txBody>
-          <a:bodyPr xmlns:a="http://schemas.openxmlformats.org/drawingml/2006/main"/>
+          <a:bodyPr xmlns:a="http://schemas.openxmlformats.org/drawingml/2006/main">
+            <a:normAutofit fontScale="91512"/>
+          </a:bodyPr>
           <a:lstStyle xmlns:a="http://schemas.openxmlformats.org/drawingml/2006/main"/>
           <a:p xmlns:a="http://schemas.openxmlformats.org/drawingml/2006/main">
             <a:pPr>
@@ -5623,7 +5713,7 @@
           <p:cNvPr id="6" name="">
             <a:extLst xmlns:a="http://schemas.openxmlformats.org/drawingml/2006/main">
               <a:ext uri="{FF2B5EF4-FFF2-40B4-BE49-F238E27FC236}">
-                <a16:creationId xmlns:a16="http://schemas.microsoft.com/office/drawing/2014/main" id="{85ED08B6-98C4-4C3D-9AF6-AE14AE031A91}"/>
+                <a16:creationId xmlns:a16="http://schemas.microsoft.com/office/drawing/2014/main" id="{8F956702-AE67-4618-BAFE-57BD2800016D}"/>
               </a:ext>
             </a:extLst>
           </p:cNvPr>
@@ -5652,7 +5742,7 @@
           <p:cNvPr id="7" name="">
             <a:extLst xmlns:a="http://schemas.openxmlformats.org/drawingml/2006/main">
               <a:ext uri="{FF2B5EF4-FFF2-40B4-BE49-F238E27FC236}">
-                <a16:creationId xmlns:a16="http://schemas.microsoft.com/office/drawing/2014/main" id="{C4D95C8D-FE69-46F0-A500-FAEFEF2E920A}"/>
+                <a16:creationId xmlns:a16="http://schemas.microsoft.com/office/drawing/2014/main" id="{BF61A395-5936-4280-B29D-78289C2AE3A5}"/>
               </a:ext>
             </a:extLst>
           </p:cNvPr>
@@ -5686,7 +5776,7 @@
           <p:cNvPr id="8" name="">
             <a:extLst xmlns:a="http://schemas.openxmlformats.org/drawingml/2006/main">
               <a:ext uri="{FF2B5EF4-FFF2-40B4-BE49-F238E27FC236}">
-                <a16:creationId xmlns:a16="http://schemas.microsoft.com/office/drawing/2014/main" id="{F93C1E42-9CD1-4467-A7B2-05E589A2A368}"/>
+                <a16:creationId xmlns:a16="http://schemas.microsoft.com/office/drawing/2014/main" id="{DF28F7B8-A7DF-4D68-87CF-8AB80233428C}"/>
               </a:ext>
             </a:extLst>
           </p:cNvPr>
@@ -5709,7 +5799,9 @@
           </a:ln>
         </p:spPr>
         <p:txBody>
-          <a:bodyPr xmlns:a="http://schemas.openxmlformats.org/drawingml/2006/main"/>
+          <a:bodyPr xmlns:a="http://schemas.openxmlformats.org/drawingml/2006/main">
+            <a:normAutofit fontScale="73485"/>
+          </a:bodyPr>
           <a:lstStyle xmlns:a="http://schemas.openxmlformats.org/drawingml/2006/main"/>
           <a:p xmlns:a="http://schemas.openxmlformats.org/drawingml/2006/main">
             <a:pPr>
@@ -5741,7 +5833,7 @@
           <p:cNvPr id="9" name="">
             <a:extLst xmlns:a="http://schemas.openxmlformats.org/drawingml/2006/main">
               <a:ext uri="{FF2B5EF4-FFF2-40B4-BE49-F238E27FC236}">
-                <a16:creationId xmlns:a16="http://schemas.microsoft.com/office/drawing/2014/main" id="{DA93B3B1-9A1D-4762-A612-6A1373C1CDA5}"/>
+                <a16:creationId xmlns:a16="http://schemas.microsoft.com/office/drawing/2014/main" id="{F5D616C1-AC12-45B6-A51A-BAAEEA570F6A}"/>
               </a:ext>
             </a:extLst>
           </p:cNvPr>
@@ -5764,7 +5856,9 @@
           </a:ln>
         </p:spPr>
         <p:txBody>
-          <a:bodyPr xmlns:a="http://schemas.openxmlformats.org/drawingml/2006/main"/>
+          <a:bodyPr xmlns:a="http://schemas.openxmlformats.org/drawingml/2006/main">
+            <a:normAutofit fontScale="100000"/>
+          </a:bodyPr>
           <a:lstStyle xmlns:a="http://schemas.openxmlformats.org/drawingml/2006/main"/>
           <a:p xmlns:a="http://schemas.openxmlformats.org/drawingml/2006/main">
             <a:pPr>
@@ -5796,7 +5890,7 @@
           <p:cNvPr id="10" name="">
             <a:extLst xmlns:a="http://schemas.openxmlformats.org/drawingml/2006/main">
               <a:ext uri="{FF2B5EF4-FFF2-40B4-BE49-F238E27FC236}">
-                <a16:creationId xmlns:a16="http://schemas.microsoft.com/office/drawing/2014/main" id="{4D7CE418-2D2B-498F-90DE-F1515536DB26}"/>
+                <a16:creationId xmlns:a16="http://schemas.microsoft.com/office/drawing/2014/main" id="{283ECBBE-1E30-401A-855D-B1D9EAD966F5}"/>
               </a:ext>
             </a:extLst>
           </p:cNvPr>
@@ -5819,7 +5913,9 @@
           </a:ln>
         </p:spPr>
         <p:txBody>
-          <a:bodyPr xmlns:a="http://schemas.openxmlformats.org/drawingml/2006/main"/>
+          <a:bodyPr xmlns:a="http://schemas.openxmlformats.org/drawingml/2006/main">
+            <a:normAutofit fontScale="66667"/>
+          </a:bodyPr>
           <a:lstStyle xmlns:a="http://schemas.openxmlformats.org/drawingml/2006/main"/>
           <a:p xmlns:a="http://schemas.openxmlformats.org/drawingml/2006/main">
             <a:pPr>
@@ -5851,7 +5947,7 @@
           <p:cNvPr id="11" name="">
             <a:extLst xmlns:a="http://schemas.openxmlformats.org/drawingml/2006/main">
               <a:ext uri="{FF2B5EF4-FFF2-40B4-BE49-F238E27FC236}">
-                <a16:creationId xmlns:a16="http://schemas.microsoft.com/office/drawing/2014/main" id="{8D27F5E9-3318-4C08-B63E-217DB8FBFC1D}"/>
+                <a16:creationId xmlns:a16="http://schemas.microsoft.com/office/drawing/2014/main" id="{8B8D604B-6AF8-4A12-B193-2C1E2F15BBE0}"/>
               </a:ext>
             </a:extLst>
           </p:cNvPr>
@@ -5874,10 +5970,12 @@
           </a:ln>
         </p:spPr>
         <p:txBody>
-          <a:bodyPr xmlns:a="http://schemas.openxmlformats.org/drawingml/2006/main"/>
-          <a:lstStyle xmlns:a="http://schemas.openxmlformats.org/drawingml/2006/main"/>
-          <a:p xmlns:a="http://schemas.openxmlformats.org/drawingml/2006/main">
-            <a:pPr>
+          <a:bodyPr xmlns:a="http://schemas.openxmlformats.org/drawingml/2006/main">
+            <a:normAutofit fontScale="66667"/>
+          </a:bodyPr>
+          <a:lstStyle xmlns:a="http://schemas.openxmlformats.org/drawingml/2006/main"/>
+          <a:p xmlns:a="http://schemas.openxmlformats.org/drawingml/2006/main">
+            <a:pPr algn="r">
               <a:defRPr sz="975" b="0">
                 <a:solidFill>
                   <a:srgbClr val="5C7083"/>
@@ -5904,7 +6002,7 @@
     </p:spTree>
     <p:extLst>
       <p:ext uri="{BB962C8B-B14F-4D97-AF65-F5344CB8AC3E}">
-        <p14:creationId xmlns:p14="http://schemas.microsoft.com/office/powerpoint/2010/main" val="2111658727"/>
+        <p14:creationId xmlns:p14="http://schemas.microsoft.com/office/powerpoint/2010/main" val="1131790331"/>
       </p:ext>
     </p:extLst>
   </p:cSld>
@@ -5935,7 +6033,7 @@
           <p:cNvPr id="9" name="">
             <a:extLst xmlns:a="http://schemas.openxmlformats.org/drawingml/2006/main">
               <a:ext uri="{FF2B5EF4-FFF2-40B4-BE49-F238E27FC236}">
-                <a16:creationId xmlns:a16="http://schemas.microsoft.com/office/drawing/2014/main" id="{B7449F4D-1FBB-46CE-B5F8-0C13E8B526F0}"/>
+                <a16:creationId xmlns:a16="http://schemas.microsoft.com/office/drawing/2014/main" id="{F6932BBE-19B1-4E91-943F-4ECFCD66BC86}"/>
               </a:ext>
             </a:extLst>
           </p:cNvPr>
@@ -5958,7 +6056,9 @@
           </a:ln>
         </p:spPr>
         <p:txBody>
-          <a:bodyPr xmlns:a="http://schemas.openxmlformats.org/drawingml/2006/main"/>
+          <a:bodyPr xmlns:a="http://schemas.openxmlformats.org/drawingml/2006/main">
+            <a:normAutofit fontScale="99074"/>
+          </a:bodyPr>
           <a:lstStyle xmlns:a="http://schemas.openxmlformats.org/drawingml/2006/main"/>
           <a:p xmlns:a="http://schemas.openxmlformats.org/drawingml/2006/main">
             <a:pPr>
@@ -5990,7 +6090,7 @@
           <p:cNvPr id="2" name="">
             <a:extLst xmlns:a="http://schemas.openxmlformats.org/drawingml/2006/main">
               <a:ext uri="{FF2B5EF4-FFF2-40B4-BE49-F238E27FC236}">
-                <a16:creationId xmlns:a16="http://schemas.microsoft.com/office/drawing/2014/main" id="{30DC7AF9-7B38-49CB-9599-23F18E8DC970}"/>
+                <a16:creationId xmlns:a16="http://schemas.microsoft.com/office/drawing/2014/main" id="{25216E8E-C4CA-4239-99ED-99F894808D90}"/>
               </a:ext>
             </a:extLst>
           </p:cNvPr>
@@ -6013,7 +6113,9 @@
           </a:ln>
         </p:spPr>
         <p:txBody>
-          <a:bodyPr xmlns:a="http://schemas.openxmlformats.org/drawingml/2006/main"/>
+          <a:bodyPr xmlns:a="http://schemas.openxmlformats.org/drawingml/2006/main">
+            <a:normAutofit fontScale="95185"/>
+          </a:bodyPr>
           <a:lstStyle xmlns:a="http://schemas.openxmlformats.org/drawingml/2006/main"/>
           <a:p xmlns:a="http://schemas.openxmlformats.org/drawingml/2006/main">
             <a:pPr>
@@ -6045,7 +6147,7 @@
           <p:cNvPr id="3" name="">
             <a:extLst xmlns:a="http://schemas.openxmlformats.org/drawingml/2006/main">
               <a:ext uri="{FF2B5EF4-FFF2-40B4-BE49-F238E27FC236}">
-                <a16:creationId xmlns:a16="http://schemas.microsoft.com/office/drawing/2014/main" id="{169D0384-C55E-4502-A70A-5167A05C23C8}"/>
+                <a16:creationId xmlns:a16="http://schemas.microsoft.com/office/drawing/2014/main" id="{B40CAD61-C8E8-44B7-A147-742BBF4788EB}"/>
               </a:ext>
             </a:extLst>
           </p:cNvPr>
@@ -6068,7 +6170,9 @@
           </a:ln>
         </p:spPr>
         <p:txBody>
-          <a:bodyPr xmlns:a="http://schemas.openxmlformats.org/drawingml/2006/main"/>
+          <a:bodyPr xmlns:a="http://schemas.openxmlformats.org/drawingml/2006/main">
+            <a:normAutofit fontScale="84028"/>
+          </a:bodyPr>
           <a:lstStyle xmlns:a="http://schemas.openxmlformats.org/drawingml/2006/main"/>
           <a:p xmlns:a="http://schemas.openxmlformats.org/drawingml/2006/main">
             <a:pPr>
@@ -6100,7 +6204,7 @@
           <p:cNvPr id="4" name="">
             <a:extLst xmlns:a="http://schemas.openxmlformats.org/drawingml/2006/main">
               <a:ext uri="{FF2B5EF4-FFF2-40B4-BE49-F238E27FC236}">
-                <a16:creationId xmlns:a16="http://schemas.microsoft.com/office/drawing/2014/main" id="{88BF1064-A25F-4774-BEC7-5584BA0A5224}"/>
+                <a16:creationId xmlns:a16="http://schemas.microsoft.com/office/drawing/2014/main" id="{38050898-6C0C-40DC-BBC9-E42F9E3460FF}"/>
               </a:ext>
             </a:extLst>
           </p:cNvPr>
@@ -6123,7 +6227,9 @@
           </a:ln>
         </p:spPr>
         <p:txBody>
-          <a:bodyPr xmlns:a="http://schemas.openxmlformats.org/drawingml/2006/main"/>
+          <a:bodyPr xmlns:a="http://schemas.openxmlformats.org/drawingml/2006/main">
+            <a:normAutofit fontScale="84921"/>
+          </a:bodyPr>
           <a:lstStyle xmlns:a="http://schemas.openxmlformats.org/drawingml/2006/main"/>
           <a:p xmlns:a="http://schemas.openxmlformats.org/drawingml/2006/main">
             <a:pPr>
@@ -6155,7 +6261,7 @@
           <p:cNvPr id="5" name="">
             <a:extLst xmlns:a="http://schemas.openxmlformats.org/drawingml/2006/main">
               <a:ext uri="{FF2B5EF4-FFF2-40B4-BE49-F238E27FC236}">
-                <a16:creationId xmlns:a16="http://schemas.microsoft.com/office/drawing/2014/main" id="{8B28D26E-A6C4-42E9-A40A-C8D05227645E}"/>
+                <a16:creationId xmlns:a16="http://schemas.microsoft.com/office/drawing/2014/main" id="{FF735CF8-EE10-4B5F-B9FA-B66DE1819875}"/>
               </a:ext>
             </a:extLst>
           </p:cNvPr>
@@ -6178,7 +6284,9 @@
           </a:ln>
         </p:spPr>
         <p:txBody>
-          <a:bodyPr xmlns:a="http://schemas.openxmlformats.org/drawingml/2006/main"/>
+          <a:bodyPr xmlns:a="http://schemas.openxmlformats.org/drawingml/2006/main">
+            <a:normAutofit fontScale="84921"/>
+          </a:bodyPr>
           <a:lstStyle xmlns:a="http://schemas.openxmlformats.org/drawingml/2006/main"/>
           <a:p xmlns:a="http://schemas.openxmlformats.org/drawingml/2006/main">
             <a:pPr>
@@ -6210,7 +6318,7 @@
           <p:cNvPr id="6" name="">
             <a:extLst xmlns:a="http://schemas.openxmlformats.org/drawingml/2006/main">
               <a:ext uri="{FF2B5EF4-FFF2-40B4-BE49-F238E27FC236}">
-                <a16:creationId xmlns:a16="http://schemas.microsoft.com/office/drawing/2014/main" id="{97296549-5014-4CD8-A133-178DBA326347}"/>
+                <a16:creationId xmlns:a16="http://schemas.microsoft.com/office/drawing/2014/main" id="{461A03F1-31E5-4D35-99B4-B986A4F00704}"/>
               </a:ext>
             </a:extLst>
           </p:cNvPr>
@@ -6233,7 +6341,9 @@
           </a:ln>
         </p:spPr>
         <p:txBody>
-          <a:bodyPr xmlns:a="http://schemas.openxmlformats.org/drawingml/2006/main"/>
+          <a:bodyPr xmlns:a="http://schemas.openxmlformats.org/drawingml/2006/main">
+            <a:normAutofit fontScale="84921"/>
+          </a:bodyPr>
           <a:lstStyle xmlns:a="http://schemas.openxmlformats.org/drawingml/2006/main"/>
           <a:p xmlns:a="http://schemas.openxmlformats.org/drawingml/2006/main">
             <a:pPr>
@@ -6265,7 +6375,7 @@
           <p:cNvPr id="7" name="">
             <a:extLst xmlns:a="http://schemas.openxmlformats.org/drawingml/2006/main">
               <a:ext uri="{FF2B5EF4-FFF2-40B4-BE49-F238E27FC236}">
-                <a16:creationId xmlns:a16="http://schemas.microsoft.com/office/drawing/2014/main" id="{1B0AB9E3-D585-44CD-B3DC-DBDADF39B087}"/>
+                <a16:creationId xmlns:a16="http://schemas.microsoft.com/office/drawing/2014/main" id="{D84BD183-F985-4BC1-97A7-A961C9FEF748}"/>
               </a:ext>
             </a:extLst>
           </p:cNvPr>
@@ -6288,7 +6398,9 @@
           </a:ln>
         </p:spPr>
         <p:txBody>
-          <a:bodyPr xmlns:a="http://schemas.openxmlformats.org/drawingml/2006/main"/>
+          <a:bodyPr xmlns:a="http://schemas.openxmlformats.org/drawingml/2006/main">
+            <a:normAutofit fontScale="85417"/>
+          </a:bodyPr>
           <a:lstStyle xmlns:a="http://schemas.openxmlformats.org/drawingml/2006/main"/>
           <a:p xmlns:a="http://schemas.openxmlformats.org/drawingml/2006/main">
             <a:pPr>
@@ -6320,7 +6432,7 @@
           <p:cNvPr id="8" name="">
             <a:extLst xmlns:a="http://schemas.openxmlformats.org/drawingml/2006/main">
               <a:ext uri="{FF2B5EF4-FFF2-40B4-BE49-F238E27FC236}">
-                <a16:creationId xmlns:a16="http://schemas.microsoft.com/office/drawing/2014/main" id="{500F33F5-7C1E-42D3-BD07-86C8A52EC9F1}"/>
+                <a16:creationId xmlns:a16="http://schemas.microsoft.com/office/drawing/2014/main" id="{40A6E40E-6A50-43E8-836F-DC898DC0DFE4}"/>
               </a:ext>
             </a:extLst>
           </p:cNvPr>
@@ -6343,7 +6455,9 @@
           </a:ln>
         </p:spPr>
         <p:txBody>
-          <a:bodyPr xmlns:a="http://schemas.openxmlformats.org/drawingml/2006/main"/>
+          <a:bodyPr xmlns:a="http://schemas.openxmlformats.org/drawingml/2006/main">
+            <a:normAutofit fontScale="85417"/>
+          </a:bodyPr>
           <a:lstStyle xmlns:a="http://schemas.openxmlformats.org/drawingml/2006/main"/>
           <a:p xmlns:a="http://schemas.openxmlformats.org/drawingml/2006/main">
             <a:pPr>
@@ -6373,7 +6487,7 @@
     </p:spTree>
     <p:extLst>
       <p:ext uri="{BB962C8B-B14F-4D97-AF65-F5344CB8AC3E}">
-        <p14:creationId xmlns:p14="http://schemas.microsoft.com/office/powerpoint/2010/main" val="142883817"/>
+        <p14:creationId xmlns:p14="http://schemas.microsoft.com/office/powerpoint/2010/main" val="1298099046"/>
       </p:ext>
     </p:extLst>
   </p:cSld>
@@ -6404,7 +6518,7 @@
           <p:cNvPr id="25" name="">
             <a:extLst xmlns:a="http://schemas.openxmlformats.org/drawingml/2006/main">
               <a:ext uri="{FF2B5EF4-FFF2-40B4-BE49-F238E27FC236}">
-                <a16:creationId xmlns:a16="http://schemas.microsoft.com/office/drawing/2014/main" id="{F3659B0B-4AFF-47D9-95DE-16CF1A687E2F}"/>
+                <a16:creationId xmlns:a16="http://schemas.microsoft.com/office/drawing/2014/main" id="{8D7B7B53-6B3C-474A-A6FD-3B73CF7A1972}"/>
               </a:ext>
             </a:extLst>
           </p:cNvPr>
@@ -6427,7 +6541,9 @@
           </a:ln>
         </p:spPr>
         <p:txBody>
-          <a:bodyPr xmlns:a="http://schemas.openxmlformats.org/drawingml/2006/main"/>
+          <a:bodyPr xmlns:a="http://schemas.openxmlformats.org/drawingml/2006/main">
+            <a:normAutofit fontScale="95175"/>
+          </a:bodyPr>
           <a:lstStyle xmlns:a="http://schemas.openxmlformats.org/drawingml/2006/main"/>
           <a:p xmlns:a="http://schemas.openxmlformats.org/drawingml/2006/main">
             <a:pPr>
@@ -6459,7 +6575,7 @@
           <p:cNvPr id="2" name="">
             <a:extLst xmlns:a="http://schemas.openxmlformats.org/drawingml/2006/main">
               <a:ext uri="{FF2B5EF4-FFF2-40B4-BE49-F238E27FC236}">
-                <a16:creationId xmlns:a16="http://schemas.microsoft.com/office/drawing/2014/main" id="{804FBB61-D626-4FCC-B917-7C0A7604B828}"/>
+                <a16:creationId xmlns:a16="http://schemas.microsoft.com/office/drawing/2014/main" id="{EEF1C2D9-03D0-42F4-B4AB-4623AC40531F}"/>
               </a:ext>
             </a:extLst>
           </p:cNvPr>
@@ -6482,7 +6598,9 @@
           </a:ln>
         </p:spPr>
         <p:txBody>
-          <a:bodyPr xmlns:a="http://schemas.openxmlformats.org/drawingml/2006/main"/>
+          <a:bodyPr xmlns:a="http://schemas.openxmlformats.org/drawingml/2006/main">
+            <a:normAutofit fontScale="89167"/>
+          </a:bodyPr>
           <a:lstStyle xmlns:a="http://schemas.openxmlformats.org/drawingml/2006/main"/>
           <a:p xmlns:a="http://schemas.openxmlformats.org/drawingml/2006/main">
             <a:pPr>
@@ -6514,7 +6632,7 @@
           <p:cNvPr id="3" name="">
             <a:extLst xmlns:a="http://schemas.openxmlformats.org/drawingml/2006/main">
               <a:ext uri="{FF2B5EF4-FFF2-40B4-BE49-F238E27FC236}">
-                <a16:creationId xmlns:a16="http://schemas.microsoft.com/office/drawing/2014/main" id="{F017C03C-7B32-49F8-B5ED-E6A0429E9072}"/>
+                <a16:creationId xmlns:a16="http://schemas.microsoft.com/office/drawing/2014/main" id="{1D93AB68-F77F-49F2-BB0F-1FB9CB6F5BF5}"/>
               </a:ext>
             </a:extLst>
           </p:cNvPr>
@@ -6548,7 +6666,7 @@
           <p:cNvPr id="4" name="">
             <a:extLst xmlns:a="http://schemas.openxmlformats.org/drawingml/2006/main">
               <a:ext uri="{FF2B5EF4-FFF2-40B4-BE49-F238E27FC236}">
-                <a16:creationId xmlns:a16="http://schemas.microsoft.com/office/drawing/2014/main" id="{62F9C38B-9487-44F5-8CC1-FD6D226DBE3C}"/>
+                <a16:creationId xmlns:a16="http://schemas.microsoft.com/office/drawing/2014/main" id="{4D2BE3CA-59A7-4018-9C5E-308CE431C8C3}"/>
               </a:ext>
             </a:extLst>
           </p:cNvPr>
@@ -6562,10 +6680,8 @@
             <a:off x="876300" y="2400300"/>
             <a:ext cx="704850" cy="704850"/>
           </a:xfrm>
-          <a:prstGeom xmlns:a="http://schemas.openxmlformats.org/drawingml/2006/main" prst="roundRect">
-            <a:avLst>
-              <a:gd name="adj" fmla="val 50000"/>
-            </a:avLst>
+          <a:prstGeom xmlns:a="http://schemas.openxmlformats.org/drawingml/2006/main" prst="ellipse">
+            <a:avLst/>
           </a:prstGeom>
           <a:solidFill xmlns:a="http://schemas.openxmlformats.org/drawingml/2006/main">
             <a:srgbClr val="1174B7"/>
@@ -6582,36 +6698,95 @@
           <p:cNvPr id="5" name="">
             <a:extLst xmlns:a="http://schemas.openxmlformats.org/drawingml/2006/main">
               <a:ext uri="{FF2B5EF4-FFF2-40B4-BE49-F238E27FC236}">
-                <a16:creationId xmlns:a16="http://schemas.microsoft.com/office/drawing/2014/main" id="{A3CE5038-987F-4719-9A85-886B17467706}"/>
-              </a:ext>
-            </a:extLst>
-          </p:cNvPr>
-          <p:cNvSpPr>
-            <a:spLocks xmlns:a="http://schemas.openxmlformats.org/drawingml/2006/main" noGrp="1"/>
-          </p:cNvSpPr>
-          <p:nvPr/>
-        </p:nvSpPr>
-        <p:spPr>
-          <a:xfrm xmlns:a="http://schemas.openxmlformats.org/drawingml/2006/main">
-            <a:off x="876300" y="2552700"/>
-            <a:ext cx="704850" cy="381000"/>
-          </a:xfrm>
-          <a:prstGeom xmlns:a="http://schemas.openxmlformats.org/drawingml/2006/main" prst="rect">
-            <a:avLst/>
-          </a:prstGeom>
-          <a:noFill xmlns:a="http://schemas.openxmlformats.org/drawingml/2006/main"/>
-          <a:ln xmlns:a="http://schemas.openxmlformats.org/drawingml/2006/main" w="0">
-            <a:noFill/>
-          </a:ln>
-        </p:spPr>
-        <p:txBody>
-          <a:bodyPr xmlns:a="http://schemas.openxmlformats.org/drawingml/2006/main"/>
+                <a16:creationId xmlns:a16="http://schemas.microsoft.com/office/drawing/2014/main" id="{D1F9F95C-D7C7-4AF6-89CA-4DCA35C9DAB9}"/>
+              </a:ext>
+            </a:extLst>
+          </p:cNvPr>
+          <p:cNvSpPr>
+            <a:spLocks xmlns:a="http://schemas.openxmlformats.org/drawingml/2006/main" noGrp="1"/>
+          </p:cNvSpPr>
+          <p:nvPr/>
+        </p:nvSpPr>
+        <p:spPr>
+          <a:xfrm xmlns:a="http://schemas.openxmlformats.org/drawingml/2006/main">
+            <a:off x="876300" y="2400300"/>
+            <a:ext cx="704850" cy="704850"/>
+          </a:xfrm>
+          <a:prstGeom xmlns:a="http://schemas.openxmlformats.org/drawingml/2006/main" prst="rect">
+            <a:avLst/>
+          </a:prstGeom>
+          <a:noFill xmlns:a="http://schemas.openxmlformats.org/drawingml/2006/main"/>
+          <a:ln xmlns:a="http://schemas.openxmlformats.org/drawingml/2006/main" w="0">
+            <a:noFill/>
+          </a:ln>
+        </p:spPr>
+        <p:txBody>
+          <a:bodyPr xmlns:a="http://schemas.openxmlformats.org/drawingml/2006/main" lIns="0" tIns="0" rIns="0" bIns="0" anchor="ctr">
+            <a:normAutofit fontScale="100000"/>
+          </a:bodyPr>
+          <a:lstStyle xmlns:a="http://schemas.openxmlformats.org/drawingml/2006/main"/>
+          <a:p xmlns:a="http://schemas.openxmlformats.org/drawingml/2006/main">
+            <a:pPr algn="ctr">
+              <a:defRPr sz="1725" b="1">
+                <a:solidFill>
+                  <a:srgbClr val="FFFFFF"/>
+                </a:solidFill>
+                <a:latin typeface="Arial"/>
+                <a:ea typeface="Arial"/>
+                <a:cs typeface="Arial"/>
+              </a:defRPr>
+            </a:pPr>
+            <a:r>
+              <a:rPr sz="1725" b="1">
+                <a:solidFill>
+                  <a:srgbClr val="FFFFFF"/>
+                </a:solidFill>
+                <a:latin typeface="Arial"/>
+                <a:ea typeface="Arial"/>
+                <a:cs typeface="Arial"/>
+              </a:rPr>
+              <a:t>KP</a:t>
+            </a:r>
+          </a:p>
+        </p:txBody>
+      </p:sp>
+      <p:sp>
+        <p:nvSpPr>
+          <p:cNvPr id="6" name="">
+            <a:extLst xmlns:a="http://schemas.openxmlformats.org/drawingml/2006/main">
+              <a:ext uri="{FF2B5EF4-FFF2-40B4-BE49-F238E27FC236}">
+                <a16:creationId xmlns:a16="http://schemas.microsoft.com/office/drawing/2014/main" id="{D6EDADA0-2F25-4188-AF97-587C585A2D9E}"/>
+              </a:ext>
+            </a:extLst>
+          </p:cNvPr>
+          <p:cNvSpPr>
+            <a:spLocks xmlns:a="http://schemas.openxmlformats.org/drawingml/2006/main" noGrp="1"/>
+          </p:cNvSpPr>
+          <p:nvPr/>
+        </p:nvSpPr>
+        <p:spPr>
+          <a:xfrm xmlns:a="http://schemas.openxmlformats.org/drawingml/2006/main">
+            <a:off x="876300" y="3333750"/>
+            <a:ext cx="1876425" cy="552450"/>
+          </a:xfrm>
+          <a:prstGeom xmlns:a="http://schemas.openxmlformats.org/drawingml/2006/main" prst="rect">
+            <a:avLst/>
+          </a:prstGeom>
+          <a:noFill xmlns:a="http://schemas.openxmlformats.org/drawingml/2006/main"/>
+          <a:ln xmlns:a="http://schemas.openxmlformats.org/drawingml/2006/main" w="0">
+            <a:noFill/>
+          </a:ln>
+        </p:spPr>
+        <p:txBody>
+          <a:bodyPr xmlns:a="http://schemas.openxmlformats.org/drawingml/2006/main">
+            <a:normAutofit fontScale="100000"/>
+          </a:bodyPr>
           <a:lstStyle xmlns:a="http://schemas.openxmlformats.org/drawingml/2006/main"/>
           <a:p xmlns:a="http://schemas.openxmlformats.org/drawingml/2006/main">
             <a:pPr>
               <a:defRPr sz="1725" b="1">
                 <a:solidFill>
-                  <a:srgbClr val="FFFFFF"/>
+                  <a:srgbClr val="1174B7"/>
                 </a:solidFill>
                 <a:latin typeface="Arial"/>
                 <a:ea typeface="Arial"/>
@@ -6621,66 +6796,11 @@
             <a:r>
               <a:rPr sz="1725" b="1">
                 <a:solidFill>
-                  <a:srgbClr val="FFFFFF"/>
-                </a:solidFill>
-                <a:latin typeface="Arial"/>
-                <a:ea typeface="Arial"/>
-                <a:cs typeface="Arial"/>
-              </a:rPr>
-              <a:t>KP</a:t>
-            </a:r>
-          </a:p>
-        </p:txBody>
-      </p:sp>
-      <p:sp>
-        <p:nvSpPr>
-          <p:cNvPr id="6" name="">
-            <a:extLst xmlns:a="http://schemas.openxmlformats.org/drawingml/2006/main">
-              <a:ext uri="{FF2B5EF4-FFF2-40B4-BE49-F238E27FC236}">
-                <a16:creationId xmlns:a16="http://schemas.microsoft.com/office/drawing/2014/main" id="{7A0FB590-F299-40D9-BE17-507BF51976A1}"/>
-              </a:ext>
-            </a:extLst>
-          </p:cNvPr>
-          <p:cNvSpPr>
-            <a:spLocks xmlns:a="http://schemas.openxmlformats.org/drawingml/2006/main" noGrp="1"/>
-          </p:cNvSpPr>
-          <p:nvPr/>
-        </p:nvSpPr>
-        <p:spPr>
-          <a:xfrm xmlns:a="http://schemas.openxmlformats.org/drawingml/2006/main">
-            <a:off x="876300" y="3333750"/>
-            <a:ext cx="1876425" cy="552450"/>
-          </a:xfrm>
-          <a:prstGeom xmlns:a="http://schemas.openxmlformats.org/drawingml/2006/main" prst="rect">
-            <a:avLst/>
-          </a:prstGeom>
-          <a:noFill xmlns:a="http://schemas.openxmlformats.org/drawingml/2006/main"/>
-          <a:ln xmlns:a="http://schemas.openxmlformats.org/drawingml/2006/main" w="0">
-            <a:noFill/>
-          </a:ln>
-        </p:spPr>
-        <p:txBody>
-          <a:bodyPr xmlns:a="http://schemas.openxmlformats.org/drawingml/2006/main"/>
-          <a:lstStyle xmlns:a="http://schemas.openxmlformats.org/drawingml/2006/main"/>
-          <a:p xmlns:a="http://schemas.openxmlformats.org/drawingml/2006/main">
-            <a:pPr>
-              <a:defRPr sz="1725" b="1">
-                <a:solidFill>
                   <a:srgbClr val="1174B7"/>
                 </a:solidFill>
                 <a:latin typeface="Arial"/>
                 <a:ea typeface="Arial"/>
                 <a:cs typeface="Arial"/>
-              </a:defRPr>
-            </a:pPr>
-            <a:r>
-              <a:rPr sz="1725" b="1">
-                <a:solidFill>
-                  <a:srgbClr val="1174B7"/>
-                </a:solidFill>
-                <a:latin typeface="Arial"/>
-                <a:ea typeface="Arial"/>
-                <a:cs typeface="Arial"/>
               </a:rPr>
               <a:t>Panel ejecutivo</a:t>
             </a:r>
@@ -6692,7 +6812,7 @@
           <p:cNvPr id="7" name="">
             <a:extLst xmlns:a="http://schemas.openxmlformats.org/drawingml/2006/main">
               <a:ext uri="{FF2B5EF4-FFF2-40B4-BE49-F238E27FC236}">
-                <a16:creationId xmlns:a16="http://schemas.microsoft.com/office/drawing/2014/main" id="{47FAE746-B4C1-49BC-9951-D4215947A718}"/>
+                <a16:creationId xmlns:a16="http://schemas.microsoft.com/office/drawing/2014/main" id="{79ED5A20-7E1A-4450-91BA-8408EBFF5E89}"/>
               </a:ext>
             </a:extLst>
           </p:cNvPr>
@@ -6715,7 +6835,9 @@
           </a:ln>
         </p:spPr>
         <p:txBody>
-          <a:bodyPr xmlns:a="http://schemas.openxmlformats.org/drawingml/2006/main"/>
+          <a:bodyPr xmlns:a="http://schemas.openxmlformats.org/drawingml/2006/main">
+            <a:normAutofit fontScale="100000"/>
+          </a:bodyPr>
           <a:lstStyle xmlns:a="http://schemas.openxmlformats.org/drawingml/2006/main"/>
           <a:p xmlns:a="http://schemas.openxmlformats.org/drawingml/2006/main">
             <a:pPr>
@@ -6747,7 +6869,7 @@
           <p:cNvPr id="8" name="">
             <a:extLst xmlns:a="http://schemas.openxmlformats.org/drawingml/2006/main">
               <a:ext uri="{FF2B5EF4-FFF2-40B4-BE49-F238E27FC236}">
-                <a16:creationId xmlns:a16="http://schemas.microsoft.com/office/drawing/2014/main" id="{00815C7E-ECDD-45A6-8C28-577929F37F62}"/>
+                <a16:creationId xmlns:a16="http://schemas.microsoft.com/office/drawing/2014/main" id="{86A8A81B-9EF4-4313-82A5-BB13DA57C5B5}"/>
               </a:ext>
             </a:extLst>
           </p:cNvPr>
@@ -6781,7 +6903,7 @@
           <p:cNvPr id="9" name="">
             <a:extLst xmlns:a="http://schemas.openxmlformats.org/drawingml/2006/main">
               <a:ext uri="{FF2B5EF4-FFF2-40B4-BE49-F238E27FC236}">
-                <a16:creationId xmlns:a16="http://schemas.microsoft.com/office/drawing/2014/main" id="{DD0DD70F-0A18-4A15-9C60-0D5A09B92F62}"/>
+                <a16:creationId xmlns:a16="http://schemas.microsoft.com/office/drawing/2014/main" id="{B759EDD1-D447-4403-8956-FF5EC71FF3A9}"/>
               </a:ext>
             </a:extLst>
           </p:cNvPr>
@@ -6795,10 +6917,8 @@
             <a:off x="3686175" y="2400300"/>
             <a:ext cx="704850" cy="704850"/>
           </a:xfrm>
-          <a:prstGeom xmlns:a="http://schemas.openxmlformats.org/drawingml/2006/main" prst="roundRect">
-            <a:avLst>
-              <a:gd name="adj" fmla="val 50000"/>
-            </a:avLst>
+          <a:prstGeom xmlns:a="http://schemas.openxmlformats.org/drawingml/2006/main" prst="ellipse">
+            <a:avLst/>
           </a:prstGeom>
           <a:solidFill xmlns:a="http://schemas.openxmlformats.org/drawingml/2006/main">
             <a:srgbClr val="17A7B9"/>
@@ -6815,36 +6935,95 @@
           <p:cNvPr id="10" name="">
             <a:extLst xmlns:a="http://schemas.openxmlformats.org/drawingml/2006/main">
               <a:ext uri="{FF2B5EF4-FFF2-40B4-BE49-F238E27FC236}">
-                <a16:creationId xmlns:a16="http://schemas.microsoft.com/office/drawing/2014/main" id="{BF52FC74-03C3-4A0D-BC8C-5873F439828F}"/>
-              </a:ext>
-            </a:extLst>
-          </p:cNvPr>
-          <p:cNvSpPr>
-            <a:spLocks xmlns:a="http://schemas.openxmlformats.org/drawingml/2006/main" noGrp="1"/>
-          </p:cNvSpPr>
-          <p:nvPr/>
-        </p:nvSpPr>
-        <p:spPr>
-          <a:xfrm xmlns:a="http://schemas.openxmlformats.org/drawingml/2006/main">
-            <a:off x="3686175" y="2552700"/>
-            <a:ext cx="704850" cy="381000"/>
-          </a:xfrm>
-          <a:prstGeom xmlns:a="http://schemas.openxmlformats.org/drawingml/2006/main" prst="rect">
-            <a:avLst/>
-          </a:prstGeom>
-          <a:noFill xmlns:a="http://schemas.openxmlformats.org/drawingml/2006/main"/>
-          <a:ln xmlns:a="http://schemas.openxmlformats.org/drawingml/2006/main" w="0">
-            <a:noFill/>
-          </a:ln>
-        </p:spPr>
-        <p:txBody>
-          <a:bodyPr xmlns:a="http://schemas.openxmlformats.org/drawingml/2006/main"/>
+                <a16:creationId xmlns:a16="http://schemas.microsoft.com/office/drawing/2014/main" id="{C47357FE-2A40-449C-94D9-CD2263D54370}"/>
+              </a:ext>
+            </a:extLst>
+          </p:cNvPr>
+          <p:cNvSpPr>
+            <a:spLocks xmlns:a="http://schemas.openxmlformats.org/drawingml/2006/main" noGrp="1"/>
+          </p:cNvSpPr>
+          <p:nvPr/>
+        </p:nvSpPr>
+        <p:spPr>
+          <a:xfrm xmlns:a="http://schemas.openxmlformats.org/drawingml/2006/main">
+            <a:off x="3686175" y="2400300"/>
+            <a:ext cx="704850" cy="704850"/>
+          </a:xfrm>
+          <a:prstGeom xmlns:a="http://schemas.openxmlformats.org/drawingml/2006/main" prst="rect">
+            <a:avLst/>
+          </a:prstGeom>
+          <a:noFill xmlns:a="http://schemas.openxmlformats.org/drawingml/2006/main"/>
+          <a:ln xmlns:a="http://schemas.openxmlformats.org/drawingml/2006/main" w="0">
+            <a:noFill/>
+          </a:ln>
+        </p:spPr>
+        <p:txBody>
+          <a:bodyPr xmlns:a="http://schemas.openxmlformats.org/drawingml/2006/main" lIns="0" tIns="0" rIns="0" bIns="0" anchor="ctr">
+            <a:normAutofit fontScale="100000"/>
+          </a:bodyPr>
+          <a:lstStyle xmlns:a="http://schemas.openxmlformats.org/drawingml/2006/main"/>
+          <a:p xmlns:a="http://schemas.openxmlformats.org/drawingml/2006/main">
+            <a:pPr algn="ctr">
+              <a:defRPr sz="1725" b="1">
+                <a:solidFill>
+                  <a:srgbClr val="FFFFFF"/>
+                </a:solidFill>
+                <a:latin typeface="Arial"/>
+                <a:ea typeface="Arial"/>
+                <a:cs typeface="Arial"/>
+              </a:defRPr>
+            </a:pPr>
+            <a:r>
+              <a:rPr sz="1725" b="1">
+                <a:solidFill>
+                  <a:srgbClr val="FFFFFF"/>
+                </a:solidFill>
+                <a:latin typeface="Arial"/>
+                <a:ea typeface="Arial"/>
+                <a:cs typeface="Arial"/>
+              </a:rPr>
+              <a:t>AU</a:t>
+            </a:r>
+          </a:p>
+        </p:txBody>
+      </p:sp>
+      <p:sp>
+        <p:nvSpPr>
+          <p:cNvPr id="11" name="">
+            <a:extLst xmlns:a="http://schemas.openxmlformats.org/drawingml/2006/main">
+              <a:ext uri="{FF2B5EF4-FFF2-40B4-BE49-F238E27FC236}">
+                <a16:creationId xmlns:a16="http://schemas.microsoft.com/office/drawing/2014/main" id="{7FAF0A8D-1838-484E-806C-1CE55BD58404}"/>
+              </a:ext>
+            </a:extLst>
+          </p:cNvPr>
+          <p:cNvSpPr>
+            <a:spLocks xmlns:a="http://schemas.openxmlformats.org/drawingml/2006/main" noGrp="1"/>
+          </p:cNvSpPr>
+          <p:nvPr/>
+        </p:nvSpPr>
+        <p:spPr>
+          <a:xfrm xmlns:a="http://schemas.openxmlformats.org/drawingml/2006/main">
+            <a:off x="3686175" y="3333750"/>
+            <a:ext cx="1876425" cy="552450"/>
+          </a:xfrm>
+          <a:prstGeom xmlns:a="http://schemas.openxmlformats.org/drawingml/2006/main" prst="rect">
+            <a:avLst/>
+          </a:prstGeom>
+          <a:noFill xmlns:a="http://schemas.openxmlformats.org/drawingml/2006/main"/>
+          <a:ln xmlns:a="http://schemas.openxmlformats.org/drawingml/2006/main" w="0">
+            <a:noFill/>
+          </a:ln>
+        </p:spPr>
+        <p:txBody>
+          <a:bodyPr xmlns:a="http://schemas.openxmlformats.org/drawingml/2006/main">
+            <a:normAutofit fontScale="100000"/>
+          </a:bodyPr>
           <a:lstStyle xmlns:a="http://schemas.openxmlformats.org/drawingml/2006/main"/>
           <a:p xmlns:a="http://schemas.openxmlformats.org/drawingml/2006/main">
             <a:pPr>
               <a:defRPr sz="1725" b="1">
                 <a:solidFill>
-                  <a:srgbClr val="FFFFFF"/>
+                  <a:srgbClr val="17A7B9"/>
                 </a:solidFill>
                 <a:latin typeface="Arial"/>
                 <a:ea typeface="Arial"/>
@@ -6854,66 +7033,11 @@
             <a:r>
               <a:rPr sz="1725" b="1">
                 <a:solidFill>
-                  <a:srgbClr val="FFFFFF"/>
-                </a:solidFill>
-                <a:latin typeface="Arial"/>
-                <a:ea typeface="Arial"/>
-                <a:cs typeface="Arial"/>
-              </a:rPr>
-              <a:t>AU</a:t>
-            </a:r>
-          </a:p>
-        </p:txBody>
-      </p:sp>
-      <p:sp>
-        <p:nvSpPr>
-          <p:cNvPr id="11" name="">
-            <a:extLst xmlns:a="http://schemas.openxmlformats.org/drawingml/2006/main">
-              <a:ext uri="{FF2B5EF4-FFF2-40B4-BE49-F238E27FC236}">
-                <a16:creationId xmlns:a16="http://schemas.microsoft.com/office/drawing/2014/main" id="{D806A83D-34AE-4896-808B-B1E57494B014}"/>
-              </a:ext>
-            </a:extLst>
-          </p:cNvPr>
-          <p:cNvSpPr>
-            <a:spLocks xmlns:a="http://schemas.openxmlformats.org/drawingml/2006/main" noGrp="1"/>
-          </p:cNvSpPr>
-          <p:nvPr/>
-        </p:nvSpPr>
-        <p:spPr>
-          <a:xfrm xmlns:a="http://schemas.openxmlformats.org/drawingml/2006/main">
-            <a:off x="3686175" y="3333750"/>
-            <a:ext cx="1876425" cy="552450"/>
-          </a:xfrm>
-          <a:prstGeom xmlns:a="http://schemas.openxmlformats.org/drawingml/2006/main" prst="rect">
-            <a:avLst/>
-          </a:prstGeom>
-          <a:noFill xmlns:a="http://schemas.openxmlformats.org/drawingml/2006/main"/>
-          <a:ln xmlns:a="http://schemas.openxmlformats.org/drawingml/2006/main" w="0">
-            <a:noFill/>
-          </a:ln>
-        </p:spPr>
-        <p:txBody>
-          <a:bodyPr xmlns:a="http://schemas.openxmlformats.org/drawingml/2006/main"/>
-          <a:lstStyle xmlns:a="http://schemas.openxmlformats.org/drawingml/2006/main"/>
-          <a:p xmlns:a="http://schemas.openxmlformats.org/drawingml/2006/main">
-            <a:pPr>
-              <a:defRPr sz="1725" b="1">
-                <a:solidFill>
                   <a:srgbClr val="17A7B9"/>
                 </a:solidFill>
                 <a:latin typeface="Arial"/>
                 <a:ea typeface="Arial"/>
                 <a:cs typeface="Arial"/>
-              </a:defRPr>
-            </a:pPr>
-            <a:r>
-              <a:rPr sz="1725" b="1">
-                <a:solidFill>
-                  <a:srgbClr val="17A7B9"/>
-                </a:solidFill>
-                <a:latin typeface="Arial"/>
-                <a:ea typeface="Arial"/>
-                <a:cs typeface="Arial"/>
               </a:rPr>
               <a:t>Auditoria</a:t>
             </a:r>
@@ -6925,7 +7049,7 @@
           <p:cNvPr id="12" name="">
             <a:extLst xmlns:a="http://schemas.openxmlformats.org/drawingml/2006/main">
               <a:ext uri="{FF2B5EF4-FFF2-40B4-BE49-F238E27FC236}">
-                <a16:creationId xmlns:a16="http://schemas.microsoft.com/office/drawing/2014/main" id="{4CE411AD-AAE3-4C8A-B5A6-A4645C2E20D4}"/>
+                <a16:creationId xmlns:a16="http://schemas.microsoft.com/office/drawing/2014/main" id="{26111D66-C77F-4DFF-8DC6-65B5DACE21E9}"/>
               </a:ext>
             </a:extLst>
           </p:cNvPr>
@@ -6948,7 +7072,9 @@
           </a:ln>
         </p:spPr>
         <p:txBody>
-          <a:bodyPr xmlns:a="http://schemas.openxmlformats.org/drawingml/2006/main"/>
+          <a:bodyPr xmlns:a="http://schemas.openxmlformats.org/drawingml/2006/main">
+            <a:normAutofit fontScale="100000"/>
+          </a:bodyPr>
           <a:lstStyle xmlns:a="http://schemas.openxmlformats.org/drawingml/2006/main"/>
           <a:p xmlns:a="http://schemas.openxmlformats.org/drawingml/2006/main">
             <a:pPr>
@@ -6980,7 +7106,7 @@
           <p:cNvPr id="13" name="">
             <a:extLst xmlns:a="http://schemas.openxmlformats.org/drawingml/2006/main">
               <a:ext uri="{FF2B5EF4-FFF2-40B4-BE49-F238E27FC236}">
-                <a16:creationId xmlns:a16="http://schemas.microsoft.com/office/drawing/2014/main" id="{87D06786-1D85-4781-9DA8-7B98A037017E}"/>
+                <a16:creationId xmlns:a16="http://schemas.microsoft.com/office/drawing/2014/main" id="{7AB09040-67FB-4A17-A699-F803D27D1F86}"/>
               </a:ext>
             </a:extLst>
           </p:cNvPr>
@@ -7014,7 +7140,7 @@
           <p:cNvPr id="14" name="">
             <a:extLst xmlns:a="http://schemas.openxmlformats.org/drawingml/2006/main">
               <a:ext uri="{FF2B5EF4-FFF2-40B4-BE49-F238E27FC236}">
-                <a16:creationId xmlns:a16="http://schemas.microsoft.com/office/drawing/2014/main" id="{39A9D4E6-919F-46B2-934C-3A5C32E7248E}"/>
+                <a16:creationId xmlns:a16="http://schemas.microsoft.com/office/drawing/2014/main" id="{5D7FAC9D-0314-42E9-9990-433A79BFF88F}"/>
               </a:ext>
             </a:extLst>
           </p:cNvPr>
@@ -7028,10 +7154,8 @@
             <a:off x="6496050" y="2400300"/>
             <a:ext cx="704850" cy="704850"/>
           </a:xfrm>
-          <a:prstGeom xmlns:a="http://schemas.openxmlformats.org/drawingml/2006/main" prst="roundRect">
-            <a:avLst>
-              <a:gd name="adj" fmla="val 50000"/>
-            </a:avLst>
+          <a:prstGeom xmlns:a="http://schemas.openxmlformats.org/drawingml/2006/main" prst="ellipse">
+            <a:avLst/>
           </a:prstGeom>
           <a:solidFill xmlns:a="http://schemas.openxmlformats.org/drawingml/2006/main">
             <a:srgbClr val="1FA064"/>
@@ -7048,36 +7172,95 @@
           <p:cNvPr id="15" name="">
             <a:extLst xmlns:a="http://schemas.openxmlformats.org/drawingml/2006/main">
               <a:ext uri="{FF2B5EF4-FFF2-40B4-BE49-F238E27FC236}">
-                <a16:creationId xmlns:a16="http://schemas.microsoft.com/office/drawing/2014/main" id="{D6A56B13-E633-4150-99A9-AB80D6F5C23B}"/>
-              </a:ext>
-            </a:extLst>
-          </p:cNvPr>
-          <p:cNvSpPr>
-            <a:spLocks xmlns:a="http://schemas.openxmlformats.org/drawingml/2006/main" noGrp="1"/>
-          </p:cNvSpPr>
-          <p:nvPr/>
-        </p:nvSpPr>
-        <p:spPr>
-          <a:xfrm xmlns:a="http://schemas.openxmlformats.org/drawingml/2006/main">
-            <a:off x="6496050" y="2552700"/>
-            <a:ext cx="704850" cy="381000"/>
-          </a:xfrm>
-          <a:prstGeom xmlns:a="http://schemas.openxmlformats.org/drawingml/2006/main" prst="rect">
-            <a:avLst/>
-          </a:prstGeom>
-          <a:noFill xmlns:a="http://schemas.openxmlformats.org/drawingml/2006/main"/>
-          <a:ln xmlns:a="http://schemas.openxmlformats.org/drawingml/2006/main" w="0">
-            <a:noFill/>
-          </a:ln>
-        </p:spPr>
-        <p:txBody>
-          <a:bodyPr xmlns:a="http://schemas.openxmlformats.org/drawingml/2006/main"/>
+                <a16:creationId xmlns:a16="http://schemas.microsoft.com/office/drawing/2014/main" id="{7DA2D1A0-BB1F-4F51-8D62-34303DD8E63C}"/>
+              </a:ext>
+            </a:extLst>
+          </p:cNvPr>
+          <p:cNvSpPr>
+            <a:spLocks xmlns:a="http://schemas.openxmlformats.org/drawingml/2006/main" noGrp="1"/>
+          </p:cNvSpPr>
+          <p:nvPr/>
+        </p:nvSpPr>
+        <p:spPr>
+          <a:xfrm xmlns:a="http://schemas.openxmlformats.org/drawingml/2006/main">
+            <a:off x="6496050" y="2400300"/>
+            <a:ext cx="704850" cy="704850"/>
+          </a:xfrm>
+          <a:prstGeom xmlns:a="http://schemas.openxmlformats.org/drawingml/2006/main" prst="rect">
+            <a:avLst/>
+          </a:prstGeom>
+          <a:noFill xmlns:a="http://schemas.openxmlformats.org/drawingml/2006/main"/>
+          <a:ln xmlns:a="http://schemas.openxmlformats.org/drawingml/2006/main" w="0">
+            <a:noFill/>
+          </a:ln>
+        </p:spPr>
+        <p:txBody>
+          <a:bodyPr xmlns:a="http://schemas.openxmlformats.org/drawingml/2006/main" lIns="0" tIns="0" rIns="0" bIns="0" anchor="ctr">
+            <a:normAutofit fontScale="100000"/>
+          </a:bodyPr>
+          <a:lstStyle xmlns:a="http://schemas.openxmlformats.org/drawingml/2006/main"/>
+          <a:p xmlns:a="http://schemas.openxmlformats.org/drawingml/2006/main">
+            <a:pPr algn="ctr">
+              <a:defRPr sz="1425" b="1">
+                <a:solidFill>
+                  <a:srgbClr val="FFFFFF"/>
+                </a:solidFill>
+                <a:latin typeface="Arial"/>
+                <a:ea typeface="Arial"/>
+                <a:cs typeface="Arial"/>
+              </a:defRPr>
+            </a:pPr>
+            <a:r>
+              <a:rPr sz="1425" b="1">
+                <a:solidFill>
+                  <a:srgbClr val="FFFFFF"/>
+                </a:solidFill>
+                <a:latin typeface="Arial"/>
+                <a:ea typeface="Arial"/>
+                <a:cs typeface="Arial"/>
+              </a:rPr>
+              <a:t>PDF</a:t>
+            </a:r>
+          </a:p>
+        </p:txBody>
+      </p:sp>
+      <p:sp>
+        <p:nvSpPr>
+          <p:cNvPr id="16" name="">
+            <a:extLst xmlns:a="http://schemas.openxmlformats.org/drawingml/2006/main">
+              <a:ext uri="{FF2B5EF4-FFF2-40B4-BE49-F238E27FC236}">
+                <a16:creationId xmlns:a16="http://schemas.microsoft.com/office/drawing/2014/main" id="{1B2AE7FA-1C5F-4D0A-B476-1D80A6EC13BA}"/>
+              </a:ext>
+            </a:extLst>
+          </p:cNvPr>
+          <p:cNvSpPr>
+            <a:spLocks xmlns:a="http://schemas.openxmlformats.org/drawingml/2006/main" noGrp="1"/>
+          </p:cNvSpPr>
+          <p:nvPr/>
+        </p:nvSpPr>
+        <p:spPr>
+          <a:xfrm xmlns:a="http://schemas.openxmlformats.org/drawingml/2006/main">
+            <a:off x="6496050" y="3333750"/>
+            <a:ext cx="1876425" cy="552450"/>
+          </a:xfrm>
+          <a:prstGeom xmlns:a="http://schemas.openxmlformats.org/drawingml/2006/main" prst="rect">
+            <a:avLst/>
+          </a:prstGeom>
+          <a:noFill xmlns:a="http://schemas.openxmlformats.org/drawingml/2006/main"/>
+          <a:ln xmlns:a="http://schemas.openxmlformats.org/drawingml/2006/main" w="0">
+            <a:noFill/>
+          </a:ln>
+        </p:spPr>
+        <p:txBody>
+          <a:bodyPr xmlns:a="http://schemas.openxmlformats.org/drawingml/2006/main">
+            <a:normAutofit fontScale="100000"/>
+          </a:bodyPr>
           <a:lstStyle xmlns:a="http://schemas.openxmlformats.org/drawingml/2006/main"/>
           <a:p xmlns:a="http://schemas.openxmlformats.org/drawingml/2006/main">
             <a:pPr>
               <a:defRPr sz="1725" b="1">
                 <a:solidFill>
-                  <a:srgbClr val="FFFFFF"/>
+                  <a:srgbClr val="1FA064"/>
                 </a:solidFill>
                 <a:latin typeface="Arial"/>
                 <a:ea typeface="Arial"/>
@@ -7087,66 +7270,11 @@
             <a:r>
               <a:rPr sz="1725" b="1">
                 <a:solidFill>
-                  <a:srgbClr val="FFFFFF"/>
-                </a:solidFill>
-                <a:latin typeface="Arial"/>
-                <a:ea typeface="Arial"/>
-                <a:cs typeface="Arial"/>
-              </a:rPr>
-              <a:t>PDF</a:t>
-            </a:r>
-          </a:p>
-        </p:txBody>
-      </p:sp>
-      <p:sp>
-        <p:nvSpPr>
-          <p:cNvPr id="16" name="">
-            <a:extLst xmlns:a="http://schemas.openxmlformats.org/drawingml/2006/main">
-              <a:ext uri="{FF2B5EF4-FFF2-40B4-BE49-F238E27FC236}">
-                <a16:creationId xmlns:a16="http://schemas.microsoft.com/office/drawing/2014/main" id="{E9411257-D6A2-4525-89A0-3B62D217ED3D}"/>
-              </a:ext>
-            </a:extLst>
-          </p:cNvPr>
-          <p:cNvSpPr>
-            <a:spLocks xmlns:a="http://schemas.openxmlformats.org/drawingml/2006/main" noGrp="1"/>
-          </p:cNvSpPr>
-          <p:nvPr/>
-        </p:nvSpPr>
-        <p:spPr>
-          <a:xfrm xmlns:a="http://schemas.openxmlformats.org/drawingml/2006/main">
-            <a:off x="6496050" y="3333750"/>
-            <a:ext cx="1876425" cy="552450"/>
-          </a:xfrm>
-          <a:prstGeom xmlns:a="http://schemas.openxmlformats.org/drawingml/2006/main" prst="rect">
-            <a:avLst/>
-          </a:prstGeom>
-          <a:noFill xmlns:a="http://schemas.openxmlformats.org/drawingml/2006/main"/>
-          <a:ln xmlns:a="http://schemas.openxmlformats.org/drawingml/2006/main" w="0">
-            <a:noFill/>
-          </a:ln>
-        </p:spPr>
-        <p:txBody>
-          <a:bodyPr xmlns:a="http://schemas.openxmlformats.org/drawingml/2006/main"/>
-          <a:lstStyle xmlns:a="http://schemas.openxmlformats.org/drawingml/2006/main"/>
-          <a:p xmlns:a="http://schemas.openxmlformats.org/drawingml/2006/main">
-            <a:pPr>
-              <a:defRPr sz="1725" b="1">
-                <a:solidFill>
                   <a:srgbClr val="1FA064"/>
                 </a:solidFill>
                 <a:latin typeface="Arial"/>
                 <a:ea typeface="Arial"/>
                 <a:cs typeface="Arial"/>
-              </a:defRPr>
-            </a:pPr>
-            <a:r>
-              <a:rPr sz="1725" b="1">
-                <a:solidFill>
-                  <a:srgbClr val="1FA064"/>
-                </a:solidFill>
-                <a:latin typeface="Arial"/>
-                <a:ea typeface="Arial"/>
-                <a:cs typeface="Arial"/>
               </a:rPr>
               <a:t>Reportes</a:t>
             </a:r>
@@ -7158,7 +7286,7 @@
           <p:cNvPr id="17" name="">
             <a:extLst xmlns:a="http://schemas.openxmlformats.org/drawingml/2006/main">
               <a:ext uri="{FF2B5EF4-FFF2-40B4-BE49-F238E27FC236}">
-                <a16:creationId xmlns:a16="http://schemas.microsoft.com/office/drawing/2014/main" id="{1D3EEE42-A970-43CD-91E4-9E09380FBDC4}"/>
+                <a16:creationId xmlns:a16="http://schemas.microsoft.com/office/drawing/2014/main" id="{26375BC1-9BE0-4C12-8754-7C41C6430540}"/>
               </a:ext>
             </a:extLst>
           </p:cNvPr>
@@ -7181,7 +7309,9 @@
           </a:ln>
         </p:spPr>
         <p:txBody>
-          <a:bodyPr xmlns:a="http://schemas.openxmlformats.org/drawingml/2006/main"/>
+          <a:bodyPr xmlns:a="http://schemas.openxmlformats.org/drawingml/2006/main">
+            <a:normAutofit fontScale="100000"/>
+          </a:bodyPr>
           <a:lstStyle xmlns:a="http://schemas.openxmlformats.org/drawingml/2006/main"/>
           <a:p xmlns:a="http://schemas.openxmlformats.org/drawingml/2006/main">
             <a:pPr>
@@ -7213,7 +7343,7 @@
           <p:cNvPr id="18" name="">
             <a:extLst xmlns:a="http://schemas.openxmlformats.org/drawingml/2006/main">
               <a:ext uri="{FF2B5EF4-FFF2-40B4-BE49-F238E27FC236}">
-                <a16:creationId xmlns:a16="http://schemas.microsoft.com/office/drawing/2014/main" id="{159F400E-53AE-424A-A5C0-06EC73B5FCAE}"/>
+                <a16:creationId xmlns:a16="http://schemas.microsoft.com/office/drawing/2014/main" id="{16DEF81A-891F-4458-B0B9-C4DA202B9EEC}"/>
               </a:ext>
             </a:extLst>
           </p:cNvPr>
@@ -7247,7 +7377,7 @@
           <p:cNvPr id="19" name="">
             <a:extLst xmlns:a="http://schemas.openxmlformats.org/drawingml/2006/main">
               <a:ext uri="{FF2B5EF4-FFF2-40B4-BE49-F238E27FC236}">
-                <a16:creationId xmlns:a16="http://schemas.microsoft.com/office/drawing/2014/main" id="{56380A6D-3127-42F8-9163-F900F25C9834}"/>
+                <a16:creationId xmlns:a16="http://schemas.microsoft.com/office/drawing/2014/main" id="{8EE95A44-A887-4FC7-8E2A-09900E378FE8}"/>
               </a:ext>
             </a:extLst>
           </p:cNvPr>
@@ -7261,10 +7391,8 @@
             <a:off x="9305925" y="2400300"/>
             <a:ext cx="704850" cy="704850"/>
           </a:xfrm>
-          <a:prstGeom xmlns:a="http://schemas.openxmlformats.org/drawingml/2006/main" prst="roundRect">
-            <a:avLst>
-              <a:gd name="adj" fmla="val 50000"/>
-            </a:avLst>
+          <a:prstGeom xmlns:a="http://schemas.openxmlformats.org/drawingml/2006/main" prst="ellipse">
+            <a:avLst/>
           </a:prstGeom>
           <a:solidFill xmlns:a="http://schemas.openxmlformats.org/drawingml/2006/main">
             <a:srgbClr val="F18932"/>
@@ -7281,36 +7409,95 @@
           <p:cNvPr id="20" name="">
             <a:extLst xmlns:a="http://schemas.openxmlformats.org/drawingml/2006/main">
               <a:ext uri="{FF2B5EF4-FFF2-40B4-BE49-F238E27FC236}">
-                <a16:creationId xmlns:a16="http://schemas.microsoft.com/office/drawing/2014/main" id="{302F4FFD-C440-4ACE-BE35-BF59CCD0708E}"/>
-              </a:ext>
-            </a:extLst>
-          </p:cNvPr>
-          <p:cNvSpPr>
-            <a:spLocks xmlns:a="http://schemas.openxmlformats.org/drawingml/2006/main" noGrp="1"/>
-          </p:cNvSpPr>
-          <p:nvPr/>
-        </p:nvSpPr>
-        <p:spPr>
-          <a:xfrm xmlns:a="http://schemas.openxmlformats.org/drawingml/2006/main">
-            <a:off x="9305925" y="2552700"/>
-            <a:ext cx="704850" cy="381000"/>
-          </a:xfrm>
-          <a:prstGeom xmlns:a="http://schemas.openxmlformats.org/drawingml/2006/main" prst="rect">
-            <a:avLst/>
-          </a:prstGeom>
-          <a:noFill xmlns:a="http://schemas.openxmlformats.org/drawingml/2006/main"/>
-          <a:ln xmlns:a="http://schemas.openxmlformats.org/drawingml/2006/main" w="0">
-            <a:noFill/>
-          </a:ln>
-        </p:spPr>
-        <p:txBody>
-          <a:bodyPr xmlns:a="http://schemas.openxmlformats.org/drawingml/2006/main"/>
+                <a16:creationId xmlns:a16="http://schemas.microsoft.com/office/drawing/2014/main" id="{5480F2BB-DE5B-481C-8A26-73DC080E3AB2}"/>
+              </a:ext>
+            </a:extLst>
+          </p:cNvPr>
+          <p:cNvSpPr>
+            <a:spLocks xmlns:a="http://schemas.openxmlformats.org/drawingml/2006/main" noGrp="1"/>
+          </p:cNvSpPr>
+          <p:nvPr/>
+        </p:nvSpPr>
+        <p:spPr>
+          <a:xfrm xmlns:a="http://schemas.openxmlformats.org/drawingml/2006/main">
+            <a:off x="9305925" y="2400300"/>
+            <a:ext cx="704850" cy="704850"/>
+          </a:xfrm>
+          <a:prstGeom xmlns:a="http://schemas.openxmlformats.org/drawingml/2006/main" prst="rect">
+            <a:avLst/>
+          </a:prstGeom>
+          <a:noFill xmlns:a="http://schemas.openxmlformats.org/drawingml/2006/main"/>
+          <a:ln xmlns:a="http://schemas.openxmlformats.org/drawingml/2006/main" w="0">
+            <a:noFill/>
+          </a:ln>
+        </p:spPr>
+        <p:txBody>
+          <a:bodyPr xmlns:a="http://schemas.openxmlformats.org/drawingml/2006/main" lIns="0" tIns="0" rIns="0" bIns="0" anchor="ctr">
+            <a:normAutofit fontScale="100000"/>
+          </a:bodyPr>
+          <a:lstStyle xmlns:a="http://schemas.openxmlformats.org/drawingml/2006/main"/>
+          <a:p xmlns:a="http://schemas.openxmlformats.org/drawingml/2006/main">
+            <a:pPr algn="ctr">
+              <a:defRPr sz="1725" b="1">
+                <a:solidFill>
+                  <a:srgbClr val="FFFFFF"/>
+                </a:solidFill>
+                <a:latin typeface="Arial"/>
+                <a:ea typeface="Arial"/>
+                <a:cs typeface="Arial"/>
+              </a:defRPr>
+            </a:pPr>
+            <a:r>
+              <a:rPr sz="1725" b="1">
+                <a:solidFill>
+                  <a:srgbClr val="FFFFFF"/>
+                </a:solidFill>
+                <a:latin typeface="Arial"/>
+                <a:ea typeface="Arial"/>
+                <a:cs typeface="Arial"/>
+              </a:rPr>
+              <a:t>AD</a:t>
+            </a:r>
+          </a:p>
+        </p:txBody>
+      </p:sp>
+      <p:sp>
+        <p:nvSpPr>
+          <p:cNvPr id="21" name="">
+            <a:extLst xmlns:a="http://schemas.openxmlformats.org/drawingml/2006/main">
+              <a:ext uri="{FF2B5EF4-FFF2-40B4-BE49-F238E27FC236}">
+                <a16:creationId xmlns:a16="http://schemas.microsoft.com/office/drawing/2014/main" id="{44DCAB53-3233-4867-A516-E5480F0C1EFA}"/>
+              </a:ext>
+            </a:extLst>
+          </p:cNvPr>
+          <p:cNvSpPr>
+            <a:spLocks xmlns:a="http://schemas.openxmlformats.org/drawingml/2006/main" noGrp="1"/>
+          </p:cNvSpPr>
+          <p:nvPr/>
+        </p:nvSpPr>
+        <p:spPr>
+          <a:xfrm xmlns:a="http://schemas.openxmlformats.org/drawingml/2006/main">
+            <a:off x="9305925" y="3333750"/>
+            <a:ext cx="1876425" cy="552450"/>
+          </a:xfrm>
+          <a:prstGeom xmlns:a="http://schemas.openxmlformats.org/drawingml/2006/main" prst="rect">
+            <a:avLst/>
+          </a:prstGeom>
+          <a:noFill xmlns:a="http://schemas.openxmlformats.org/drawingml/2006/main"/>
+          <a:ln xmlns:a="http://schemas.openxmlformats.org/drawingml/2006/main" w="0">
+            <a:noFill/>
+          </a:ln>
+        </p:spPr>
+        <p:txBody>
+          <a:bodyPr xmlns:a="http://schemas.openxmlformats.org/drawingml/2006/main">
+            <a:normAutofit fontScale="100000"/>
+          </a:bodyPr>
           <a:lstStyle xmlns:a="http://schemas.openxmlformats.org/drawingml/2006/main"/>
           <a:p xmlns:a="http://schemas.openxmlformats.org/drawingml/2006/main">
             <a:pPr>
               <a:defRPr sz="1725" b="1">
                 <a:solidFill>
-                  <a:srgbClr val="FFFFFF"/>
+                  <a:srgbClr val="F18932"/>
                 </a:solidFill>
                 <a:latin typeface="Arial"/>
                 <a:ea typeface="Arial"/>
@@ -7320,66 +7507,11 @@
             <a:r>
               <a:rPr sz="1725" b="1">
                 <a:solidFill>
-                  <a:srgbClr val="FFFFFF"/>
-                </a:solidFill>
-                <a:latin typeface="Arial"/>
-                <a:ea typeface="Arial"/>
-                <a:cs typeface="Arial"/>
-              </a:rPr>
-              <a:t>AD</a:t>
-            </a:r>
-          </a:p>
-        </p:txBody>
-      </p:sp>
-      <p:sp>
-        <p:nvSpPr>
-          <p:cNvPr id="21" name="">
-            <a:extLst xmlns:a="http://schemas.openxmlformats.org/drawingml/2006/main">
-              <a:ext uri="{FF2B5EF4-FFF2-40B4-BE49-F238E27FC236}">
-                <a16:creationId xmlns:a16="http://schemas.microsoft.com/office/drawing/2014/main" id="{C672B27F-F181-4C50-982C-23087107DC74}"/>
-              </a:ext>
-            </a:extLst>
-          </p:cNvPr>
-          <p:cNvSpPr>
-            <a:spLocks xmlns:a="http://schemas.openxmlformats.org/drawingml/2006/main" noGrp="1"/>
-          </p:cNvSpPr>
-          <p:nvPr/>
-        </p:nvSpPr>
-        <p:spPr>
-          <a:xfrm xmlns:a="http://schemas.openxmlformats.org/drawingml/2006/main">
-            <a:off x="9305925" y="3333750"/>
-            <a:ext cx="1876425" cy="552450"/>
-          </a:xfrm>
-          <a:prstGeom xmlns:a="http://schemas.openxmlformats.org/drawingml/2006/main" prst="rect">
-            <a:avLst/>
-          </a:prstGeom>
-          <a:noFill xmlns:a="http://schemas.openxmlformats.org/drawingml/2006/main"/>
-          <a:ln xmlns:a="http://schemas.openxmlformats.org/drawingml/2006/main" w="0">
-            <a:noFill/>
-          </a:ln>
-        </p:spPr>
-        <p:txBody>
-          <a:bodyPr xmlns:a="http://schemas.openxmlformats.org/drawingml/2006/main"/>
-          <a:lstStyle xmlns:a="http://schemas.openxmlformats.org/drawingml/2006/main"/>
-          <a:p xmlns:a="http://schemas.openxmlformats.org/drawingml/2006/main">
-            <a:pPr>
-              <a:defRPr sz="1725" b="1">
-                <a:solidFill>
                   <a:srgbClr val="F18932"/>
                 </a:solidFill>
                 <a:latin typeface="Arial"/>
                 <a:ea typeface="Arial"/>
                 <a:cs typeface="Arial"/>
-              </a:defRPr>
-            </a:pPr>
-            <a:r>
-              <a:rPr sz="1725" b="1">
-                <a:solidFill>
-                  <a:srgbClr val="F18932"/>
-                </a:solidFill>
-                <a:latin typeface="Arial"/>
-                <a:ea typeface="Arial"/>
-                <a:cs typeface="Arial"/>
               </a:rPr>
               <a:t>Administracion</a:t>
             </a:r>
@@ -7391,7 +7523,7 @@
           <p:cNvPr id="22" name="">
             <a:extLst xmlns:a="http://schemas.openxmlformats.org/drawingml/2006/main">
               <a:ext uri="{FF2B5EF4-FFF2-40B4-BE49-F238E27FC236}">
-                <a16:creationId xmlns:a16="http://schemas.microsoft.com/office/drawing/2014/main" id="{C155A02C-4776-4268-82E8-41042008484F}"/>
+                <a16:creationId xmlns:a16="http://schemas.microsoft.com/office/drawing/2014/main" id="{040B5C93-8EB9-46DB-9C44-6940FB4EC218}"/>
               </a:ext>
             </a:extLst>
           </p:cNvPr>
@@ -7414,7 +7546,9 @@
           </a:ln>
         </p:spPr>
         <p:txBody>
-          <a:bodyPr xmlns:a="http://schemas.openxmlformats.org/drawingml/2006/main"/>
+          <a:bodyPr xmlns:a="http://schemas.openxmlformats.org/drawingml/2006/main">
+            <a:normAutofit fontScale="100000"/>
+          </a:bodyPr>
           <a:lstStyle xmlns:a="http://schemas.openxmlformats.org/drawingml/2006/main"/>
           <a:p xmlns:a="http://schemas.openxmlformats.org/drawingml/2006/main">
             <a:pPr>
@@ -7446,7 +7580,7 @@
           <p:cNvPr id="23" name="">
             <a:extLst xmlns:a="http://schemas.openxmlformats.org/drawingml/2006/main">
               <a:ext uri="{FF2B5EF4-FFF2-40B4-BE49-F238E27FC236}">
-                <a16:creationId xmlns:a16="http://schemas.microsoft.com/office/drawing/2014/main" id="{4C786FBD-22D8-4836-A7CC-39061B363D88}"/>
+                <a16:creationId xmlns:a16="http://schemas.microsoft.com/office/drawing/2014/main" id="{CEC90071-5536-4902-A734-8B70B6D893FE}"/>
               </a:ext>
             </a:extLst>
           </p:cNvPr>
@@ -7469,7 +7603,9 @@
           </a:ln>
         </p:spPr>
         <p:txBody>
-          <a:bodyPr xmlns:a="http://schemas.openxmlformats.org/drawingml/2006/main"/>
+          <a:bodyPr xmlns:a="http://schemas.openxmlformats.org/drawingml/2006/main">
+            <a:normAutofit fontScale="66667"/>
+          </a:bodyPr>
           <a:lstStyle xmlns:a="http://schemas.openxmlformats.org/drawingml/2006/main"/>
           <a:p xmlns:a="http://schemas.openxmlformats.org/drawingml/2006/main">
             <a:pPr>
@@ -7501,7 +7637,7 @@
           <p:cNvPr id="24" name="">
             <a:extLst xmlns:a="http://schemas.openxmlformats.org/drawingml/2006/main">
               <a:ext uri="{FF2B5EF4-FFF2-40B4-BE49-F238E27FC236}">
-                <a16:creationId xmlns:a16="http://schemas.microsoft.com/office/drawing/2014/main" id="{23B4BEA1-5978-481F-B5A5-988C2E4BA44F}"/>
+                <a16:creationId xmlns:a16="http://schemas.microsoft.com/office/drawing/2014/main" id="{C254E50E-AEFF-4A81-B524-2B4D0D13CA22}"/>
               </a:ext>
             </a:extLst>
           </p:cNvPr>
@@ -7524,10 +7660,12 @@
           </a:ln>
         </p:spPr>
         <p:txBody>
-          <a:bodyPr xmlns:a="http://schemas.openxmlformats.org/drawingml/2006/main"/>
-          <a:lstStyle xmlns:a="http://schemas.openxmlformats.org/drawingml/2006/main"/>
-          <a:p xmlns:a="http://schemas.openxmlformats.org/drawingml/2006/main">
-            <a:pPr>
+          <a:bodyPr xmlns:a="http://schemas.openxmlformats.org/drawingml/2006/main">
+            <a:normAutofit fontScale="66667"/>
+          </a:bodyPr>
+          <a:lstStyle xmlns:a="http://schemas.openxmlformats.org/drawingml/2006/main"/>
+          <a:p xmlns:a="http://schemas.openxmlformats.org/drawingml/2006/main">
+            <a:pPr algn="r">
               <a:defRPr sz="975" b="0">
                 <a:solidFill>
                   <a:srgbClr val="5C7083"/>
@@ -7554,7 +7692,7 @@
     </p:spTree>
     <p:extLst>
       <p:ext uri="{BB962C8B-B14F-4D97-AF65-F5344CB8AC3E}">
-        <p14:creationId xmlns:p14="http://schemas.microsoft.com/office/powerpoint/2010/main" val="659699996"/>
+        <p14:creationId xmlns:p14="http://schemas.microsoft.com/office/powerpoint/2010/main" val="126825827"/>
       </p:ext>
     </p:extLst>
   </p:cSld>
@@ -7585,7 +7723,7 @@
           <p:cNvPr id="4" name="">
             <a:extLst xmlns:a="http://schemas.openxmlformats.org/drawingml/2006/main">
               <a:ext uri="{FF2B5EF4-FFF2-40B4-BE49-F238E27FC236}">
-                <a16:creationId xmlns:a16="http://schemas.microsoft.com/office/drawing/2014/main" id="{0E607FB1-2F28-4E0C-B751-3DD26223B549}"/>
+                <a16:creationId xmlns:a16="http://schemas.microsoft.com/office/drawing/2014/main" id="{2BCC3870-2BD0-42EA-808F-094EEE4BE584}"/>
               </a:ext>
             </a:extLst>
           </p:cNvPr>
@@ -7608,7 +7746,9 @@
           </a:ln>
         </p:spPr>
         <p:txBody>
-          <a:bodyPr xmlns:a="http://schemas.openxmlformats.org/drawingml/2006/main"/>
+          <a:bodyPr xmlns:a="http://schemas.openxmlformats.org/drawingml/2006/main">
+            <a:normAutofit fontScale="92857"/>
+          </a:bodyPr>
           <a:lstStyle xmlns:a="http://schemas.openxmlformats.org/drawingml/2006/main"/>
           <a:p xmlns:a="http://schemas.openxmlformats.org/drawingml/2006/main">
             <a:pPr>
@@ -7640,7 +7780,7 @@
           <p:cNvPr id="2" name="">
             <a:extLst xmlns:a="http://schemas.openxmlformats.org/drawingml/2006/main">
               <a:ext uri="{FF2B5EF4-FFF2-40B4-BE49-F238E27FC236}">
-                <a16:creationId xmlns:a16="http://schemas.microsoft.com/office/drawing/2014/main" id="{56EAE049-9BB3-4D65-9952-E055F70C35C3}"/>
+                <a16:creationId xmlns:a16="http://schemas.microsoft.com/office/drawing/2014/main" id="{0536E905-50A5-4225-A61A-C23EF97988E7}"/>
               </a:ext>
             </a:extLst>
           </p:cNvPr>
@@ -7663,7 +7803,9 @@
           </a:ln>
         </p:spPr>
         <p:txBody>
-          <a:bodyPr xmlns:a="http://schemas.openxmlformats.org/drawingml/2006/main"/>
+          <a:bodyPr xmlns:a="http://schemas.openxmlformats.org/drawingml/2006/main">
+            <a:normAutofit fontScale="100000"/>
+          </a:bodyPr>
           <a:lstStyle xmlns:a="http://schemas.openxmlformats.org/drawingml/2006/main"/>
           <a:p xmlns:a="http://schemas.openxmlformats.org/drawingml/2006/main">
             <a:pPr>
@@ -7695,7 +7837,7 @@
           <p:cNvPr id="3" name="">
             <a:extLst xmlns:a="http://schemas.openxmlformats.org/drawingml/2006/main">
               <a:ext uri="{FF2B5EF4-FFF2-40B4-BE49-F238E27FC236}">
-                <a16:creationId xmlns:a16="http://schemas.microsoft.com/office/drawing/2014/main" id="{B7D95566-7CBC-473A-8E50-DE85249EADEE}"/>
+                <a16:creationId xmlns:a16="http://schemas.microsoft.com/office/drawing/2014/main" id="{F7AEAC84-792E-414D-951C-A2E6F70C5198}"/>
               </a:ext>
             </a:extLst>
           </p:cNvPr>
@@ -7718,7 +7860,9 @@
           </a:ln>
         </p:spPr>
         <p:txBody>
-          <a:bodyPr xmlns:a="http://schemas.openxmlformats.org/drawingml/2006/main"/>
+          <a:bodyPr xmlns:a="http://schemas.openxmlformats.org/drawingml/2006/main">
+            <a:normAutofit fontScale="88000"/>
+          </a:bodyPr>
           <a:lstStyle xmlns:a="http://schemas.openxmlformats.org/drawingml/2006/main"/>
           <a:p xmlns:a="http://schemas.openxmlformats.org/drawingml/2006/main">
             <a:pPr>
@@ -7748,7 +7892,7 @@
     </p:spTree>
     <p:extLst>
       <p:ext uri="{BB962C8B-B14F-4D97-AF65-F5344CB8AC3E}">
-        <p14:creationId xmlns:p14="http://schemas.microsoft.com/office/powerpoint/2010/main" val="572403635"/>
+        <p14:creationId xmlns:p14="http://schemas.microsoft.com/office/powerpoint/2010/main" val="908919007"/>
       </p:ext>
     </p:extLst>
   </p:cSld>
@@ -7779,7 +7923,7 @@
           <p:cNvPr id="30" name="">
             <a:extLst xmlns:a="http://schemas.openxmlformats.org/drawingml/2006/main">
               <a:ext uri="{FF2B5EF4-FFF2-40B4-BE49-F238E27FC236}">
-                <a16:creationId xmlns:a16="http://schemas.microsoft.com/office/drawing/2014/main" id="{C757048A-2ED3-41EB-B33E-FE1DF6BF3E60}"/>
+                <a16:creationId xmlns:a16="http://schemas.microsoft.com/office/drawing/2014/main" id="{DAC21950-81EA-44E4-BE98-CCE18AFCDFDE}"/>
               </a:ext>
             </a:extLst>
           </p:cNvPr>
@@ -7802,7 +7946,9 @@
           </a:ln>
         </p:spPr>
         <p:txBody>
-          <a:bodyPr xmlns:a="http://schemas.openxmlformats.org/drawingml/2006/main"/>
+          <a:bodyPr xmlns:a="http://schemas.openxmlformats.org/drawingml/2006/main">
+            <a:normAutofit fontScale="95175"/>
+          </a:bodyPr>
           <a:lstStyle xmlns:a="http://schemas.openxmlformats.org/drawingml/2006/main"/>
           <a:p xmlns:a="http://schemas.openxmlformats.org/drawingml/2006/main">
             <a:pPr>
@@ -7834,7 +7980,7 @@
           <p:cNvPr id="2" name="">
             <a:extLst xmlns:a="http://schemas.openxmlformats.org/drawingml/2006/main">
               <a:ext uri="{FF2B5EF4-FFF2-40B4-BE49-F238E27FC236}">
-                <a16:creationId xmlns:a16="http://schemas.microsoft.com/office/drawing/2014/main" id="{54C99B42-D551-48FA-98A9-A26FCB8D5D2F}"/>
+                <a16:creationId xmlns:a16="http://schemas.microsoft.com/office/drawing/2014/main" id="{B2BC0A36-C962-4905-9AA4-8B70C40ED889}"/>
               </a:ext>
             </a:extLst>
           </p:cNvPr>
@@ -7868,7 +8014,7 @@
           <p:cNvPr id="3" name="">
             <a:extLst xmlns:a="http://schemas.openxmlformats.org/drawingml/2006/main">
               <a:ext uri="{FF2B5EF4-FFF2-40B4-BE49-F238E27FC236}">
-                <a16:creationId xmlns:a16="http://schemas.microsoft.com/office/drawing/2014/main" id="{AEF81C9C-BA7C-4D09-9FDE-F2CCBC34530D}"/>
+                <a16:creationId xmlns:a16="http://schemas.microsoft.com/office/drawing/2014/main" id="{D607E47E-22DA-4FC1-B90F-5FA06AB14F30}"/>
               </a:ext>
             </a:extLst>
           </p:cNvPr>
@@ -7882,10 +8028,8 @@
             <a:off x="800100" y="2419350"/>
             <a:ext cx="704850" cy="704850"/>
           </a:xfrm>
-          <a:prstGeom xmlns:a="http://schemas.openxmlformats.org/drawingml/2006/main" prst="roundRect">
-            <a:avLst>
-              <a:gd name="adj" fmla="val 50000"/>
-            </a:avLst>
+          <a:prstGeom xmlns:a="http://schemas.openxmlformats.org/drawingml/2006/main" prst="ellipse">
+            <a:avLst/>
           </a:prstGeom>
           <a:solidFill xmlns:a="http://schemas.openxmlformats.org/drawingml/2006/main">
             <a:srgbClr val="1174B7"/>
@@ -7902,33 +8046,35 @@
           <p:cNvPr id="4" name="">
             <a:extLst xmlns:a="http://schemas.openxmlformats.org/drawingml/2006/main">
               <a:ext uri="{FF2B5EF4-FFF2-40B4-BE49-F238E27FC236}">
-                <a16:creationId xmlns:a16="http://schemas.microsoft.com/office/drawing/2014/main" id="{6FDFB25B-5099-441D-A72E-CEFA461B7B17}"/>
-              </a:ext>
-            </a:extLst>
-          </p:cNvPr>
-          <p:cNvSpPr>
-            <a:spLocks xmlns:a="http://schemas.openxmlformats.org/drawingml/2006/main" noGrp="1"/>
-          </p:cNvSpPr>
-          <p:nvPr/>
-        </p:nvSpPr>
-        <p:spPr>
-          <a:xfrm xmlns:a="http://schemas.openxmlformats.org/drawingml/2006/main">
-            <a:off x="800100" y="2571750"/>
-            <a:ext cx="704850" cy="381000"/>
-          </a:xfrm>
-          <a:prstGeom xmlns:a="http://schemas.openxmlformats.org/drawingml/2006/main" prst="rect">
-            <a:avLst/>
-          </a:prstGeom>
-          <a:noFill xmlns:a="http://schemas.openxmlformats.org/drawingml/2006/main"/>
-          <a:ln xmlns:a="http://schemas.openxmlformats.org/drawingml/2006/main" w="0">
-            <a:noFill/>
-          </a:ln>
-        </p:spPr>
-        <p:txBody>
-          <a:bodyPr xmlns:a="http://schemas.openxmlformats.org/drawingml/2006/main"/>
-          <a:lstStyle xmlns:a="http://schemas.openxmlformats.org/drawingml/2006/main"/>
-          <a:p xmlns:a="http://schemas.openxmlformats.org/drawingml/2006/main">
-            <a:pPr>
+                <a16:creationId xmlns:a16="http://schemas.microsoft.com/office/drawing/2014/main" id="{1ABF4680-50C1-4AC9-83D4-8692E27F6D50}"/>
+              </a:ext>
+            </a:extLst>
+          </p:cNvPr>
+          <p:cNvSpPr>
+            <a:spLocks xmlns:a="http://schemas.openxmlformats.org/drawingml/2006/main" noGrp="1"/>
+          </p:cNvSpPr>
+          <p:nvPr/>
+        </p:nvSpPr>
+        <p:spPr>
+          <a:xfrm xmlns:a="http://schemas.openxmlformats.org/drawingml/2006/main">
+            <a:off x="800100" y="2419350"/>
+            <a:ext cx="704850" cy="704850"/>
+          </a:xfrm>
+          <a:prstGeom xmlns:a="http://schemas.openxmlformats.org/drawingml/2006/main" prst="rect">
+            <a:avLst/>
+          </a:prstGeom>
+          <a:noFill xmlns:a="http://schemas.openxmlformats.org/drawingml/2006/main"/>
+          <a:ln xmlns:a="http://schemas.openxmlformats.org/drawingml/2006/main" w="0">
+            <a:noFill/>
+          </a:ln>
+        </p:spPr>
+        <p:txBody>
+          <a:bodyPr xmlns:a="http://schemas.openxmlformats.org/drawingml/2006/main" lIns="0" tIns="0" rIns="0" bIns="0" anchor="ctr">
+            <a:normAutofit fontScale="100000"/>
+          </a:bodyPr>
+          <a:lstStyle xmlns:a="http://schemas.openxmlformats.org/drawingml/2006/main"/>
+          <a:p xmlns:a="http://schemas.openxmlformats.org/drawingml/2006/main">
+            <a:pPr algn="ctr">
               <a:defRPr sz="1725" b="1">
                 <a:solidFill>
                   <a:srgbClr val="FFFFFF"/>
@@ -7957,7 +8103,7 @@
           <p:cNvPr id="5" name="">
             <a:extLst xmlns:a="http://schemas.openxmlformats.org/drawingml/2006/main">
               <a:ext uri="{FF2B5EF4-FFF2-40B4-BE49-F238E27FC236}">
-                <a16:creationId xmlns:a16="http://schemas.microsoft.com/office/drawing/2014/main" id="{E198D6CB-3EFF-46B7-8116-2603A145FB83}"/>
+                <a16:creationId xmlns:a16="http://schemas.microsoft.com/office/drawing/2014/main" id="{2CF97A9E-57E1-494B-9A2D-1C989B698B92}"/>
               </a:ext>
             </a:extLst>
           </p:cNvPr>
@@ -7980,7 +8126,9 @@
           </a:ln>
         </p:spPr>
         <p:txBody>
-          <a:bodyPr xmlns:a="http://schemas.openxmlformats.org/drawingml/2006/main"/>
+          <a:bodyPr xmlns:a="http://schemas.openxmlformats.org/drawingml/2006/main">
+            <a:normAutofit fontScale="100000"/>
+          </a:bodyPr>
           <a:lstStyle xmlns:a="http://schemas.openxmlformats.org/drawingml/2006/main"/>
           <a:p xmlns:a="http://schemas.openxmlformats.org/drawingml/2006/main">
             <a:pPr>
@@ -8012,7 +8160,7 @@
           <p:cNvPr id="6" name="">
             <a:extLst xmlns:a="http://schemas.openxmlformats.org/drawingml/2006/main">
               <a:ext uri="{FF2B5EF4-FFF2-40B4-BE49-F238E27FC236}">
-                <a16:creationId xmlns:a16="http://schemas.microsoft.com/office/drawing/2014/main" id="{EA11C048-8E27-4990-ACB6-46BFA6B3E081}"/>
+                <a16:creationId xmlns:a16="http://schemas.microsoft.com/office/drawing/2014/main" id="{B54A3771-A4B6-4476-AC2D-A63799CA73F9}"/>
               </a:ext>
             </a:extLst>
           </p:cNvPr>
@@ -8035,7 +8183,9 @@
           </a:ln>
         </p:spPr>
         <p:txBody>
-          <a:bodyPr xmlns:a="http://schemas.openxmlformats.org/drawingml/2006/main"/>
+          <a:bodyPr xmlns:a="http://schemas.openxmlformats.org/drawingml/2006/main">
+            <a:normAutofit fontScale="87009"/>
+          </a:bodyPr>
           <a:lstStyle xmlns:a="http://schemas.openxmlformats.org/drawingml/2006/main"/>
           <a:p xmlns:a="http://schemas.openxmlformats.org/drawingml/2006/main">
             <a:pPr>
@@ -8067,7 +8217,7 @@
           <p:cNvPr id="7" name="">
             <a:extLst xmlns:a="http://schemas.openxmlformats.org/drawingml/2006/main">
               <a:ext uri="{FF2B5EF4-FFF2-40B4-BE49-F238E27FC236}">
-                <a16:creationId xmlns:a16="http://schemas.microsoft.com/office/drawing/2014/main" id="{D0BE3715-F910-4EF5-A7F7-72C34F5D007B}"/>
+                <a16:creationId xmlns:a16="http://schemas.microsoft.com/office/drawing/2014/main" id="{17C9BB94-EBCB-4D52-B760-F016A4C938DA}"/>
               </a:ext>
             </a:extLst>
           </p:cNvPr>
@@ -8096,7 +8246,7 @@
           <p:cNvPr id="8" name="">
             <a:extLst xmlns:a="http://schemas.openxmlformats.org/drawingml/2006/main">
               <a:ext uri="{FF2B5EF4-FFF2-40B4-BE49-F238E27FC236}">
-                <a16:creationId xmlns:a16="http://schemas.microsoft.com/office/drawing/2014/main" id="{B7112A62-8C44-4674-85B2-3AAB39A3B161}"/>
+                <a16:creationId xmlns:a16="http://schemas.microsoft.com/office/drawing/2014/main" id="{504A8E2E-DCAB-477E-870B-FC6F6A825AD7}"/>
               </a:ext>
             </a:extLst>
           </p:cNvPr>
@@ -8130,7 +8280,7 @@
           <p:cNvPr id="9" name="">
             <a:extLst xmlns:a="http://schemas.openxmlformats.org/drawingml/2006/main">
               <a:ext uri="{FF2B5EF4-FFF2-40B4-BE49-F238E27FC236}">
-                <a16:creationId xmlns:a16="http://schemas.microsoft.com/office/drawing/2014/main" id="{D910CCB4-E442-4EAF-AC8D-F1CDE61AF4F6}"/>
+                <a16:creationId xmlns:a16="http://schemas.microsoft.com/office/drawing/2014/main" id="{8E759455-2A2C-41D0-9B78-443DFB876C93}"/>
               </a:ext>
             </a:extLst>
           </p:cNvPr>
@@ -8144,10 +8294,8 @@
             <a:off x="3581400" y="2419350"/>
             <a:ext cx="704850" cy="704850"/>
           </a:xfrm>
-          <a:prstGeom xmlns:a="http://schemas.openxmlformats.org/drawingml/2006/main" prst="roundRect">
-            <a:avLst>
-              <a:gd name="adj" fmla="val 50000"/>
-            </a:avLst>
+          <a:prstGeom xmlns:a="http://schemas.openxmlformats.org/drawingml/2006/main" prst="ellipse">
+            <a:avLst/>
           </a:prstGeom>
           <a:solidFill xmlns:a="http://schemas.openxmlformats.org/drawingml/2006/main">
             <a:srgbClr val="17A7B9"/>
@@ -8164,33 +8312,35 @@
           <p:cNvPr id="10" name="">
             <a:extLst xmlns:a="http://schemas.openxmlformats.org/drawingml/2006/main">
               <a:ext uri="{FF2B5EF4-FFF2-40B4-BE49-F238E27FC236}">
-                <a16:creationId xmlns:a16="http://schemas.microsoft.com/office/drawing/2014/main" id="{27763E4E-6641-4DDE-A58C-0863C99E6721}"/>
-              </a:ext>
-            </a:extLst>
-          </p:cNvPr>
-          <p:cNvSpPr>
-            <a:spLocks xmlns:a="http://schemas.openxmlformats.org/drawingml/2006/main" noGrp="1"/>
-          </p:cNvSpPr>
-          <p:nvPr/>
-        </p:nvSpPr>
-        <p:spPr>
-          <a:xfrm xmlns:a="http://schemas.openxmlformats.org/drawingml/2006/main">
-            <a:off x="3581400" y="2571750"/>
-            <a:ext cx="704850" cy="381000"/>
-          </a:xfrm>
-          <a:prstGeom xmlns:a="http://schemas.openxmlformats.org/drawingml/2006/main" prst="rect">
-            <a:avLst/>
-          </a:prstGeom>
-          <a:noFill xmlns:a="http://schemas.openxmlformats.org/drawingml/2006/main"/>
-          <a:ln xmlns:a="http://schemas.openxmlformats.org/drawingml/2006/main" w="0">
-            <a:noFill/>
-          </a:ln>
-        </p:spPr>
-        <p:txBody>
-          <a:bodyPr xmlns:a="http://schemas.openxmlformats.org/drawingml/2006/main"/>
-          <a:lstStyle xmlns:a="http://schemas.openxmlformats.org/drawingml/2006/main"/>
-          <a:p xmlns:a="http://schemas.openxmlformats.org/drawingml/2006/main">
-            <a:pPr>
+                <a16:creationId xmlns:a16="http://schemas.microsoft.com/office/drawing/2014/main" id="{79CF6592-8391-427D-8CFC-93381EF83A61}"/>
+              </a:ext>
+            </a:extLst>
+          </p:cNvPr>
+          <p:cNvSpPr>
+            <a:spLocks xmlns:a="http://schemas.openxmlformats.org/drawingml/2006/main" noGrp="1"/>
+          </p:cNvSpPr>
+          <p:nvPr/>
+        </p:nvSpPr>
+        <p:spPr>
+          <a:xfrm xmlns:a="http://schemas.openxmlformats.org/drawingml/2006/main">
+            <a:off x="3581400" y="2419350"/>
+            <a:ext cx="704850" cy="704850"/>
+          </a:xfrm>
+          <a:prstGeom xmlns:a="http://schemas.openxmlformats.org/drawingml/2006/main" prst="rect">
+            <a:avLst/>
+          </a:prstGeom>
+          <a:noFill xmlns:a="http://schemas.openxmlformats.org/drawingml/2006/main"/>
+          <a:ln xmlns:a="http://schemas.openxmlformats.org/drawingml/2006/main" w="0">
+            <a:noFill/>
+          </a:ln>
+        </p:spPr>
+        <p:txBody>
+          <a:bodyPr xmlns:a="http://schemas.openxmlformats.org/drawingml/2006/main" lIns="0" tIns="0" rIns="0" bIns="0" anchor="ctr">
+            <a:normAutofit fontScale="100000"/>
+          </a:bodyPr>
+          <a:lstStyle xmlns:a="http://schemas.openxmlformats.org/drawingml/2006/main"/>
+          <a:p xmlns:a="http://schemas.openxmlformats.org/drawingml/2006/main">
+            <a:pPr algn="ctr">
               <a:defRPr sz="1725" b="1">
                 <a:solidFill>
                   <a:srgbClr val="FFFFFF"/>
@@ -8219,7 +8369,7 @@
           <p:cNvPr id="11" name="">
             <a:extLst xmlns:a="http://schemas.openxmlformats.org/drawingml/2006/main">
               <a:ext uri="{FF2B5EF4-FFF2-40B4-BE49-F238E27FC236}">
-                <a16:creationId xmlns:a16="http://schemas.microsoft.com/office/drawing/2014/main" id="{C5ABF712-E2AF-4CEF-92BB-E288290BF79E}"/>
+                <a16:creationId xmlns:a16="http://schemas.microsoft.com/office/drawing/2014/main" id="{1333B104-E72D-47F5-ACC2-DC3D5E6E28AC}"/>
               </a:ext>
             </a:extLst>
           </p:cNvPr>
@@ -8242,7 +8392,9 @@
           </a:ln>
         </p:spPr>
         <p:txBody>
-          <a:bodyPr xmlns:a="http://schemas.openxmlformats.org/drawingml/2006/main"/>
+          <a:bodyPr xmlns:a="http://schemas.openxmlformats.org/drawingml/2006/main">
+            <a:normAutofit fontScale="100000"/>
+          </a:bodyPr>
           <a:lstStyle xmlns:a="http://schemas.openxmlformats.org/drawingml/2006/main"/>
           <a:p xmlns:a="http://schemas.openxmlformats.org/drawingml/2006/main">
             <a:pPr>
@@ -8274,7 +8426,7 @@
           <p:cNvPr id="12" name="">
             <a:extLst xmlns:a="http://schemas.openxmlformats.org/drawingml/2006/main">
               <a:ext uri="{FF2B5EF4-FFF2-40B4-BE49-F238E27FC236}">
-                <a16:creationId xmlns:a16="http://schemas.microsoft.com/office/drawing/2014/main" id="{D5D623B1-B7CC-426B-8007-C09578358D16}"/>
+                <a16:creationId xmlns:a16="http://schemas.microsoft.com/office/drawing/2014/main" id="{E477D94F-1C3F-4A41-9F2A-743D8F82A293}"/>
               </a:ext>
             </a:extLst>
           </p:cNvPr>
@@ -8297,7 +8449,9 @@
           </a:ln>
         </p:spPr>
         <p:txBody>
-          <a:bodyPr xmlns:a="http://schemas.openxmlformats.org/drawingml/2006/main"/>
+          <a:bodyPr xmlns:a="http://schemas.openxmlformats.org/drawingml/2006/main">
+            <a:normAutofit fontScale="84028"/>
+          </a:bodyPr>
           <a:lstStyle xmlns:a="http://schemas.openxmlformats.org/drawingml/2006/main"/>
           <a:p xmlns:a="http://schemas.openxmlformats.org/drawingml/2006/main">
             <a:pPr>
@@ -8329,7 +8483,7 @@
           <p:cNvPr id="13" name="">
             <a:extLst xmlns:a="http://schemas.openxmlformats.org/drawingml/2006/main">
               <a:ext uri="{FF2B5EF4-FFF2-40B4-BE49-F238E27FC236}">
-                <a16:creationId xmlns:a16="http://schemas.microsoft.com/office/drawing/2014/main" id="{8991CD10-7034-4DF5-8A74-D9451ABE8B14}"/>
+                <a16:creationId xmlns:a16="http://schemas.microsoft.com/office/drawing/2014/main" id="{BE18FE8C-5147-4C90-AA00-F1FFA165F620}"/>
               </a:ext>
             </a:extLst>
           </p:cNvPr>
@@ -8358,7 +8512,7 @@
           <p:cNvPr id="14" name="">
             <a:extLst xmlns:a="http://schemas.openxmlformats.org/drawingml/2006/main">
               <a:ext uri="{FF2B5EF4-FFF2-40B4-BE49-F238E27FC236}">
-                <a16:creationId xmlns:a16="http://schemas.microsoft.com/office/drawing/2014/main" id="{28E40160-8B1F-4B32-9C2E-3C2D0CA675A6}"/>
+                <a16:creationId xmlns:a16="http://schemas.microsoft.com/office/drawing/2014/main" id="{5EF6E9FC-0C10-4A55-ACEC-C111C7340EEC}"/>
               </a:ext>
             </a:extLst>
           </p:cNvPr>
@@ -8392,7 +8546,7 @@
           <p:cNvPr id="15" name="">
             <a:extLst xmlns:a="http://schemas.openxmlformats.org/drawingml/2006/main">
               <a:ext uri="{FF2B5EF4-FFF2-40B4-BE49-F238E27FC236}">
-                <a16:creationId xmlns:a16="http://schemas.microsoft.com/office/drawing/2014/main" id="{0FF4C02D-C44A-498F-92C8-EA7F0E7D12A0}"/>
+                <a16:creationId xmlns:a16="http://schemas.microsoft.com/office/drawing/2014/main" id="{BC1F5C60-866E-4D46-9AFF-715CF579D82C}"/>
               </a:ext>
             </a:extLst>
           </p:cNvPr>
@@ -8406,10 +8560,8 @@
             <a:off x="6362700" y="2419350"/>
             <a:ext cx="704850" cy="704850"/>
           </a:xfrm>
-          <a:prstGeom xmlns:a="http://schemas.openxmlformats.org/drawingml/2006/main" prst="roundRect">
-            <a:avLst>
-              <a:gd name="adj" fmla="val 50000"/>
-            </a:avLst>
+          <a:prstGeom xmlns:a="http://schemas.openxmlformats.org/drawingml/2006/main" prst="ellipse">
+            <a:avLst/>
           </a:prstGeom>
           <a:solidFill xmlns:a="http://schemas.openxmlformats.org/drawingml/2006/main">
             <a:srgbClr val="102E48"/>
@@ -8426,34 +8578,36 @@
           <p:cNvPr id="16" name="">
             <a:extLst xmlns:a="http://schemas.openxmlformats.org/drawingml/2006/main">
               <a:ext uri="{FF2B5EF4-FFF2-40B4-BE49-F238E27FC236}">
-                <a16:creationId xmlns:a16="http://schemas.microsoft.com/office/drawing/2014/main" id="{5B5C82C4-592D-4FC3-8FA8-F7EDDB4386E8}"/>
-              </a:ext>
-            </a:extLst>
-          </p:cNvPr>
-          <p:cNvSpPr>
-            <a:spLocks xmlns:a="http://schemas.openxmlformats.org/drawingml/2006/main" noGrp="1"/>
-          </p:cNvSpPr>
-          <p:nvPr/>
-        </p:nvSpPr>
-        <p:spPr>
-          <a:xfrm xmlns:a="http://schemas.openxmlformats.org/drawingml/2006/main">
-            <a:off x="6362700" y="2571750"/>
-            <a:ext cx="704850" cy="381000"/>
-          </a:xfrm>
-          <a:prstGeom xmlns:a="http://schemas.openxmlformats.org/drawingml/2006/main" prst="rect">
-            <a:avLst/>
-          </a:prstGeom>
-          <a:noFill xmlns:a="http://schemas.openxmlformats.org/drawingml/2006/main"/>
-          <a:ln xmlns:a="http://schemas.openxmlformats.org/drawingml/2006/main" w="0">
-            <a:noFill/>
-          </a:ln>
-        </p:spPr>
-        <p:txBody>
-          <a:bodyPr xmlns:a="http://schemas.openxmlformats.org/drawingml/2006/main"/>
-          <a:lstStyle xmlns:a="http://schemas.openxmlformats.org/drawingml/2006/main"/>
-          <a:p xmlns:a="http://schemas.openxmlformats.org/drawingml/2006/main">
-            <a:pPr>
-              <a:defRPr sz="1725" b="1">
+                <a16:creationId xmlns:a16="http://schemas.microsoft.com/office/drawing/2014/main" id="{EFE26B9C-CAC4-47BF-B8A1-C0C101A17B25}"/>
+              </a:ext>
+            </a:extLst>
+          </p:cNvPr>
+          <p:cNvSpPr>
+            <a:spLocks xmlns:a="http://schemas.openxmlformats.org/drawingml/2006/main" noGrp="1"/>
+          </p:cNvSpPr>
+          <p:nvPr/>
+        </p:nvSpPr>
+        <p:spPr>
+          <a:xfrm xmlns:a="http://schemas.openxmlformats.org/drawingml/2006/main">
+            <a:off x="6362700" y="2419350"/>
+            <a:ext cx="704850" cy="704850"/>
+          </a:xfrm>
+          <a:prstGeom xmlns:a="http://schemas.openxmlformats.org/drawingml/2006/main" prst="rect">
+            <a:avLst/>
+          </a:prstGeom>
+          <a:noFill xmlns:a="http://schemas.openxmlformats.org/drawingml/2006/main"/>
+          <a:ln xmlns:a="http://schemas.openxmlformats.org/drawingml/2006/main" w="0">
+            <a:noFill/>
+          </a:ln>
+        </p:spPr>
+        <p:txBody>
+          <a:bodyPr xmlns:a="http://schemas.openxmlformats.org/drawingml/2006/main" lIns="0" tIns="0" rIns="0" bIns="0" anchor="ctr">
+            <a:normAutofit fontScale="100000"/>
+          </a:bodyPr>
+          <a:lstStyle xmlns:a="http://schemas.openxmlformats.org/drawingml/2006/main"/>
+          <a:p xmlns:a="http://schemas.openxmlformats.org/drawingml/2006/main">
+            <a:pPr algn="ctr">
+              <a:defRPr sz="1425" b="1">
                 <a:solidFill>
                   <a:srgbClr val="FFFFFF"/>
                 </a:solidFill>
@@ -8463,7 +8617,7 @@
               </a:defRPr>
             </a:pPr>
             <a:r>
-              <a:rPr sz="1725" b="1">
+              <a:rPr sz="1425" b="1">
                 <a:solidFill>
                   <a:srgbClr val="FFFFFF"/>
                 </a:solidFill>
@@ -8481,7 +8635,7 @@
           <p:cNvPr id="17" name="">
             <a:extLst xmlns:a="http://schemas.openxmlformats.org/drawingml/2006/main">
               <a:ext uri="{FF2B5EF4-FFF2-40B4-BE49-F238E27FC236}">
-                <a16:creationId xmlns:a16="http://schemas.microsoft.com/office/drawing/2014/main" id="{0C4C569B-E5D1-4AF5-92B8-795E2AF6A313}"/>
+                <a16:creationId xmlns:a16="http://schemas.microsoft.com/office/drawing/2014/main" id="{E4F21AC6-6983-4542-9445-47F918A9C23A}"/>
               </a:ext>
             </a:extLst>
           </p:cNvPr>
@@ -8504,7 +8658,9 @@
           </a:ln>
         </p:spPr>
         <p:txBody>
-          <a:bodyPr xmlns:a="http://schemas.openxmlformats.org/drawingml/2006/main"/>
+          <a:bodyPr xmlns:a="http://schemas.openxmlformats.org/drawingml/2006/main">
+            <a:normAutofit fontScale="100000"/>
+          </a:bodyPr>
           <a:lstStyle xmlns:a="http://schemas.openxmlformats.org/drawingml/2006/main"/>
           <a:p xmlns:a="http://schemas.openxmlformats.org/drawingml/2006/main">
             <a:pPr>
@@ -8536,7 +8692,7 @@
           <p:cNvPr id="18" name="">
             <a:extLst xmlns:a="http://schemas.openxmlformats.org/drawingml/2006/main">
               <a:ext uri="{FF2B5EF4-FFF2-40B4-BE49-F238E27FC236}">
-                <a16:creationId xmlns:a16="http://schemas.microsoft.com/office/drawing/2014/main" id="{B2A6342B-4420-4220-83F8-1F2F1BCC9C9D}"/>
+                <a16:creationId xmlns:a16="http://schemas.microsoft.com/office/drawing/2014/main" id="{1BDB62F5-74AD-4576-86D9-89DEA57447AA}"/>
               </a:ext>
             </a:extLst>
           </p:cNvPr>
@@ -8559,7 +8715,9 @@
           </a:ln>
         </p:spPr>
         <p:txBody>
-          <a:bodyPr xmlns:a="http://schemas.openxmlformats.org/drawingml/2006/main"/>
+          <a:bodyPr xmlns:a="http://schemas.openxmlformats.org/drawingml/2006/main">
+            <a:normAutofit fontScale="84028"/>
+          </a:bodyPr>
           <a:lstStyle xmlns:a="http://schemas.openxmlformats.org/drawingml/2006/main"/>
           <a:p xmlns:a="http://schemas.openxmlformats.org/drawingml/2006/main">
             <a:pPr>
@@ -8591,7 +8749,7 @@
           <p:cNvPr id="19" name="">
             <a:extLst xmlns:a="http://schemas.openxmlformats.org/drawingml/2006/main">
               <a:ext uri="{FF2B5EF4-FFF2-40B4-BE49-F238E27FC236}">
-                <a16:creationId xmlns:a16="http://schemas.microsoft.com/office/drawing/2014/main" id="{97666874-B609-4177-9700-91CAF5ACCD32}"/>
+                <a16:creationId xmlns:a16="http://schemas.microsoft.com/office/drawing/2014/main" id="{99B496DB-BC1A-4950-8F64-E333E3418C04}"/>
               </a:ext>
             </a:extLst>
           </p:cNvPr>
@@ -8620,7 +8778,7 @@
           <p:cNvPr id="20" name="">
             <a:extLst xmlns:a="http://schemas.openxmlformats.org/drawingml/2006/main">
               <a:ext uri="{FF2B5EF4-FFF2-40B4-BE49-F238E27FC236}">
-                <a16:creationId xmlns:a16="http://schemas.microsoft.com/office/drawing/2014/main" id="{43DAC0FD-A04F-429B-9AF6-AF7E3BCAD2F6}"/>
+                <a16:creationId xmlns:a16="http://schemas.microsoft.com/office/drawing/2014/main" id="{FECE37AC-5B1C-4005-9E87-991346DF5733}"/>
               </a:ext>
             </a:extLst>
           </p:cNvPr>
@@ -8654,7 +8812,7 @@
           <p:cNvPr id="21" name="">
             <a:extLst xmlns:a="http://schemas.openxmlformats.org/drawingml/2006/main">
               <a:ext uri="{FF2B5EF4-FFF2-40B4-BE49-F238E27FC236}">
-                <a16:creationId xmlns:a16="http://schemas.microsoft.com/office/drawing/2014/main" id="{C803CC71-B6EB-4BC5-BA39-5A0B822DAE07}"/>
+                <a16:creationId xmlns:a16="http://schemas.microsoft.com/office/drawing/2014/main" id="{4894FD7F-F5F7-4110-B6EE-22E892A81458}"/>
               </a:ext>
             </a:extLst>
           </p:cNvPr>
@@ -8668,10 +8826,8 @@
             <a:off x="9144000" y="2419350"/>
             <a:ext cx="704850" cy="704850"/>
           </a:xfrm>
-          <a:prstGeom xmlns:a="http://schemas.openxmlformats.org/drawingml/2006/main" prst="roundRect">
-            <a:avLst>
-              <a:gd name="adj" fmla="val 50000"/>
-            </a:avLst>
+          <a:prstGeom xmlns:a="http://schemas.openxmlformats.org/drawingml/2006/main" prst="ellipse">
+            <a:avLst/>
           </a:prstGeom>
           <a:solidFill xmlns:a="http://schemas.openxmlformats.org/drawingml/2006/main">
             <a:srgbClr val="1FA064"/>
@@ -8688,33 +8844,35 @@
           <p:cNvPr id="22" name="">
             <a:extLst xmlns:a="http://schemas.openxmlformats.org/drawingml/2006/main">
               <a:ext uri="{FF2B5EF4-FFF2-40B4-BE49-F238E27FC236}">
-                <a16:creationId xmlns:a16="http://schemas.microsoft.com/office/drawing/2014/main" id="{34B6FA3C-360E-4491-A3D2-2F7AF1FB0DD2}"/>
-              </a:ext>
-            </a:extLst>
-          </p:cNvPr>
-          <p:cNvSpPr>
-            <a:spLocks xmlns:a="http://schemas.openxmlformats.org/drawingml/2006/main" noGrp="1"/>
-          </p:cNvSpPr>
-          <p:nvPr/>
-        </p:nvSpPr>
-        <p:spPr>
-          <a:xfrm xmlns:a="http://schemas.openxmlformats.org/drawingml/2006/main">
-            <a:off x="9144000" y="2571750"/>
-            <a:ext cx="704850" cy="381000"/>
-          </a:xfrm>
-          <a:prstGeom xmlns:a="http://schemas.openxmlformats.org/drawingml/2006/main" prst="rect">
-            <a:avLst/>
-          </a:prstGeom>
-          <a:noFill xmlns:a="http://schemas.openxmlformats.org/drawingml/2006/main"/>
-          <a:ln xmlns:a="http://schemas.openxmlformats.org/drawingml/2006/main" w="0">
-            <a:noFill/>
-          </a:ln>
-        </p:spPr>
-        <p:txBody>
-          <a:bodyPr xmlns:a="http://schemas.openxmlformats.org/drawingml/2006/main"/>
-          <a:lstStyle xmlns:a="http://schemas.openxmlformats.org/drawingml/2006/main"/>
-          <a:p xmlns:a="http://schemas.openxmlformats.org/drawingml/2006/main">
-            <a:pPr>
+                <a16:creationId xmlns:a16="http://schemas.microsoft.com/office/drawing/2014/main" id="{5A65F1C5-B4D8-4C61-BE1D-147BFAB7804D}"/>
+              </a:ext>
+            </a:extLst>
+          </p:cNvPr>
+          <p:cNvSpPr>
+            <a:spLocks xmlns:a="http://schemas.openxmlformats.org/drawingml/2006/main" noGrp="1"/>
+          </p:cNvSpPr>
+          <p:nvPr/>
+        </p:nvSpPr>
+        <p:spPr>
+          <a:xfrm xmlns:a="http://schemas.openxmlformats.org/drawingml/2006/main">
+            <a:off x="9144000" y="2419350"/>
+            <a:ext cx="704850" cy="704850"/>
+          </a:xfrm>
+          <a:prstGeom xmlns:a="http://schemas.openxmlformats.org/drawingml/2006/main" prst="rect">
+            <a:avLst/>
+          </a:prstGeom>
+          <a:noFill xmlns:a="http://schemas.openxmlformats.org/drawingml/2006/main"/>
+          <a:ln xmlns:a="http://schemas.openxmlformats.org/drawingml/2006/main" w="0">
+            <a:noFill/>
+          </a:ln>
+        </p:spPr>
+        <p:txBody>
+          <a:bodyPr xmlns:a="http://schemas.openxmlformats.org/drawingml/2006/main" lIns="0" tIns="0" rIns="0" bIns="0" anchor="ctr">
+            <a:normAutofit fontScale="100000"/>
+          </a:bodyPr>
+          <a:lstStyle xmlns:a="http://schemas.openxmlformats.org/drawingml/2006/main"/>
+          <a:p xmlns:a="http://schemas.openxmlformats.org/drawingml/2006/main">
+            <a:pPr algn="ctr">
               <a:defRPr sz="1725" b="1">
                 <a:solidFill>
                   <a:srgbClr val="FFFFFF"/>
@@ -8743,7 +8901,7 @@
           <p:cNvPr id="23" name="">
             <a:extLst xmlns:a="http://schemas.openxmlformats.org/drawingml/2006/main">
               <a:ext uri="{FF2B5EF4-FFF2-40B4-BE49-F238E27FC236}">
-                <a16:creationId xmlns:a16="http://schemas.microsoft.com/office/drawing/2014/main" id="{3A03402C-3747-45C1-9614-9C18D7F3B667}"/>
+                <a16:creationId xmlns:a16="http://schemas.microsoft.com/office/drawing/2014/main" id="{29D13D0E-5CFE-45C6-80F2-4A549BFF3E9A}"/>
               </a:ext>
             </a:extLst>
           </p:cNvPr>
@@ -8766,7 +8924,9 @@
           </a:ln>
         </p:spPr>
         <p:txBody>
-          <a:bodyPr xmlns:a="http://schemas.openxmlformats.org/drawingml/2006/main"/>
+          <a:bodyPr xmlns:a="http://schemas.openxmlformats.org/drawingml/2006/main">
+            <a:normAutofit fontScale="100000"/>
+          </a:bodyPr>
           <a:lstStyle xmlns:a="http://schemas.openxmlformats.org/drawingml/2006/main"/>
           <a:p xmlns:a="http://schemas.openxmlformats.org/drawingml/2006/main">
             <a:pPr>
@@ -8798,7 +8958,7 @@
           <p:cNvPr id="24" name="">
             <a:extLst xmlns:a="http://schemas.openxmlformats.org/drawingml/2006/main">
               <a:ext uri="{FF2B5EF4-FFF2-40B4-BE49-F238E27FC236}">
-                <a16:creationId xmlns:a16="http://schemas.microsoft.com/office/drawing/2014/main" id="{85512129-3F24-495C-B568-3B62D92919D5}"/>
+                <a16:creationId xmlns:a16="http://schemas.microsoft.com/office/drawing/2014/main" id="{B8C50606-D728-4459-A49F-D5AB717CAA03}"/>
               </a:ext>
             </a:extLst>
           </p:cNvPr>
@@ -8821,7 +8981,9 @@
           </a:ln>
         </p:spPr>
         <p:txBody>
-          <a:bodyPr xmlns:a="http://schemas.openxmlformats.org/drawingml/2006/main"/>
+          <a:bodyPr xmlns:a="http://schemas.openxmlformats.org/drawingml/2006/main">
+            <a:normAutofit fontScale="84028"/>
+          </a:bodyPr>
           <a:lstStyle xmlns:a="http://schemas.openxmlformats.org/drawingml/2006/main"/>
           <a:p xmlns:a="http://schemas.openxmlformats.org/drawingml/2006/main">
             <a:pPr>
@@ -8853,7 +9015,7 @@
           <p:cNvPr id="25" name="">
             <a:extLst xmlns:a="http://schemas.openxmlformats.org/drawingml/2006/main">
               <a:ext uri="{FF2B5EF4-FFF2-40B4-BE49-F238E27FC236}">
-                <a16:creationId xmlns:a16="http://schemas.microsoft.com/office/drawing/2014/main" id="{F29C42CB-5DDE-42AB-849B-81881B916C90}"/>
+                <a16:creationId xmlns:a16="http://schemas.microsoft.com/office/drawing/2014/main" id="{407EE659-E6CD-4EC9-BE10-48B1B0AD7CB0}"/>
               </a:ext>
             </a:extLst>
           </p:cNvPr>
@@ -8887,7 +9049,7 @@
           <p:cNvPr id="26" name="">
             <a:extLst xmlns:a="http://schemas.openxmlformats.org/drawingml/2006/main">
               <a:ext uri="{FF2B5EF4-FFF2-40B4-BE49-F238E27FC236}">
-                <a16:creationId xmlns:a16="http://schemas.microsoft.com/office/drawing/2014/main" id="{E5AD29CC-08EA-4607-9490-53ED884AFEFF}"/>
+                <a16:creationId xmlns:a16="http://schemas.microsoft.com/office/drawing/2014/main" id="{2D1FD8E4-7D64-46BA-9DEA-EC88E768B526}"/>
               </a:ext>
             </a:extLst>
           </p:cNvPr>
@@ -8910,7 +9072,9 @@
           </a:ln>
         </p:spPr>
         <p:txBody>
-          <a:bodyPr xmlns:a="http://schemas.openxmlformats.org/drawingml/2006/main"/>
+          <a:bodyPr xmlns:a="http://schemas.openxmlformats.org/drawingml/2006/main">
+            <a:normAutofit fontScale="77273"/>
+          </a:bodyPr>
           <a:lstStyle xmlns:a="http://schemas.openxmlformats.org/drawingml/2006/main"/>
           <a:p xmlns:a="http://schemas.openxmlformats.org/drawingml/2006/main">
             <a:pPr>
@@ -8942,7 +9106,7 @@
           <p:cNvPr id="27" name="">
             <a:extLst xmlns:a="http://schemas.openxmlformats.org/drawingml/2006/main">
               <a:ext uri="{FF2B5EF4-FFF2-40B4-BE49-F238E27FC236}">
-                <a16:creationId xmlns:a16="http://schemas.microsoft.com/office/drawing/2014/main" id="{5EEDAB10-AA35-42A3-956D-97AF32638210}"/>
+                <a16:creationId xmlns:a16="http://schemas.microsoft.com/office/drawing/2014/main" id="{B52468D5-55AF-4B14-BD1C-F88BD9A9D8D9}"/>
               </a:ext>
             </a:extLst>
           </p:cNvPr>
@@ -8965,7 +9129,9 @@
           </a:ln>
         </p:spPr>
         <p:txBody>
-          <a:bodyPr xmlns:a="http://schemas.openxmlformats.org/drawingml/2006/main"/>
+          <a:bodyPr xmlns:a="http://schemas.openxmlformats.org/drawingml/2006/main">
+            <a:normAutofit fontScale="69674"/>
+          </a:bodyPr>
           <a:lstStyle xmlns:a="http://schemas.openxmlformats.org/drawingml/2006/main"/>
           <a:p xmlns:a="http://schemas.openxmlformats.org/drawingml/2006/main">
             <a:pPr>
@@ -8997,7 +9163,7 @@
           <p:cNvPr id="28" name="">
             <a:extLst xmlns:a="http://schemas.openxmlformats.org/drawingml/2006/main">
               <a:ext uri="{FF2B5EF4-FFF2-40B4-BE49-F238E27FC236}">
-                <a16:creationId xmlns:a16="http://schemas.microsoft.com/office/drawing/2014/main" id="{B411EB89-602E-4BB0-A158-4E2C3B107A5D}"/>
+                <a16:creationId xmlns:a16="http://schemas.microsoft.com/office/drawing/2014/main" id="{F80CA094-651D-45DE-928D-E571361C6209}"/>
               </a:ext>
             </a:extLst>
           </p:cNvPr>
@@ -9020,7 +9186,9 @@
           </a:ln>
         </p:spPr>
         <p:txBody>
-          <a:bodyPr xmlns:a="http://schemas.openxmlformats.org/drawingml/2006/main"/>
+          <a:bodyPr xmlns:a="http://schemas.openxmlformats.org/drawingml/2006/main">
+            <a:normAutofit fontScale="66667"/>
+          </a:bodyPr>
           <a:lstStyle xmlns:a="http://schemas.openxmlformats.org/drawingml/2006/main"/>
           <a:p xmlns:a="http://schemas.openxmlformats.org/drawingml/2006/main">
             <a:pPr>
@@ -9052,7 +9220,7 @@
           <p:cNvPr id="29" name="">
             <a:extLst xmlns:a="http://schemas.openxmlformats.org/drawingml/2006/main">
               <a:ext uri="{FF2B5EF4-FFF2-40B4-BE49-F238E27FC236}">
-                <a16:creationId xmlns:a16="http://schemas.microsoft.com/office/drawing/2014/main" id="{A70EABDD-D2AC-4EF5-915D-FC3A465A8A66}"/>
+                <a16:creationId xmlns:a16="http://schemas.microsoft.com/office/drawing/2014/main" id="{A75DBCED-4AD2-49FE-9262-63ECFFDA269F}"/>
               </a:ext>
             </a:extLst>
           </p:cNvPr>
@@ -9075,10 +9243,12 @@
           </a:ln>
         </p:spPr>
         <p:txBody>
-          <a:bodyPr xmlns:a="http://schemas.openxmlformats.org/drawingml/2006/main"/>
-          <a:lstStyle xmlns:a="http://schemas.openxmlformats.org/drawingml/2006/main"/>
-          <a:p xmlns:a="http://schemas.openxmlformats.org/drawingml/2006/main">
-            <a:pPr>
+          <a:bodyPr xmlns:a="http://schemas.openxmlformats.org/drawingml/2006/main">
+            <a:normAutofit fontScale="66667"/>
+          </a:bodyPr>
+          <a:lstStyle xmlns:a="http://schemas.openxmlformats.org/drawingml/2006/main"/>
+          <a:p xmlns:a="http://schemas.openxmlformats.org/drawingml/2006/main">
+            <a:pPr algn="r">
               <a:defRPr sz="975" b="0">
                 <a:solidFill>
                   <a:srgbClr val="5C7083"/>
@@ -9105,7 +9275,7 @@
     </p:spTree>
     <p:extLst>
       <p:ext uri="{BB962C8B-B14F-4D97-AF65-F5344CB8AC3E}">
-        <p14:creationId xmlns:p14="http://schemas.microsoft.com/office/powerpoint/2010/main" val="1483374265"/>
+        <p14:creationId xmlns:p14="http://schemas.microsoft.com/office/powerpoint/2010/main" val="2119244702"/>
       </p:ext>
     </p:extLst>
   </p:cSld>
@@ -9136,7 +9306,7 @@
           <p:cNvPr id="26" name="">
             <a:extLst xmlns:a="http://schemas.openxmlformats.org/drawingml/2006/main">
               <a:ext uri="{FF2B5EF4-FFF2-40B4-BE49-F238E27FC236}">
-                <a16:creationId xmlns:a16="http://schemas.microsoft.com/office/drawing/2014/main" id="{7D78E485-BB90-48D5-87F1-E58E5B1620E8}"/>
+                <a16:creationId xmlns:a16="http://schemas.microsoft.com/office/drawing/2014/main" id="{E038230C-CAE9-4184-AE83-10C55A56F6CB}"/>
               </a:ext>
             </a:extLst>
           </p:cNvPr>
@@ -9159,7 +9329,9 @@
           </a:ln>
         </p:spPr>
         <p:txBody>
-          <a:bodyPr xmlns:a="http://schemas.openxmlformats.org/drawingml/2006/main"/>
+          <a:bodyPr xmlns:a="http://schemas.openxmlformats.org/drawingml/2006/main">
+            <a:normAutofit fontScale="95175"/>
+          </a:bodyPr>
           <a:lstStyle xmlns:a="http://schemas.openxmlformats.org/drawingml/2006/main"/>
           <a:p xmlns:a="http://schemas.openxmlformats.org/drawingml/2006/main">
             <a:pPr>
@@ -9191,7 +9363,7 @@
           <p:cNvPr id="2" name="">
             <a:extLst xmlns:a="http://schemas.openxmlformats.org/drawingml/2006/main">
               <a:ext uri="{FF2B5EF4-FFF2-40B4-BE49-F238E27FC236}">
-                <a16:creationId xmlns:a16="http://schemas.microsoft.com/office/drawing/2014/main" id="{5D33485D-C580-407F-B94E-2B92A154406E}"/>
+                <a16:creationId xmlns:a16="http://schemas.microsoft.com/office/drawing/2014/main" id="{9A9959ED-CC89-49CF-86C6-961E14A5442B}"/>
               </a:ext>
             </a:extLst>
           </p:cNvPr>
@@ -9214,7 +9386,9 @@
           </a:ln>
         </p:spPr>
         <p:txBody>
-          <a:bodyPr xmlns:a="http://schemas.openxmlformats.org/drawingml/2006/main"/>
+          <a:bodyPr xmlns:a="http://schemas.openxmlformats.org/drawingml/2006/main">
+            <a:normAutofit fontScale="89167"/>
+          </a:bodyPr>
           <a:lstStyle xmlns:a="http://schemas.openxmlformats.org/drawingml/2006/main"/>
           <a:p xmlns:a="http://schemas.openxmlformats.org/drawingml/2006/main">
             <a:pPr>
@@ -9246,7 +9420,7 @@
           <p:cNvPr id="3" name="">
             <a:extLst xmlns:a="http://schemas.openxmlformats.org/drawingml/2006/main">
               <a:ext uri="{FF2B5EF4-FFF2-40B4-BE49-F238E27FC236}">
-                <a16:creationId xmlns:a16="http://schemas.microsoft.com/office/drawing/2014/main" id="{7051AA9E-FAFE-4B9B-81FF-83CCF728B248}"/>
+                <a16:creationId xmlns:a16="http://schemas.microsoft.com/office/drawing/2014/main" id="{DBE6A4C3-EEFE-4A93-9077-B89B91B7B6B7}"/>
               </a:ext>
             </a:extLst>
           </p:cNvPr>
@@ -9260,10 +9434,8 @@
             <a:off x="714375" y="2143125"/>
             <a:ext cx="704850" cy="704850"/>
           </a:xfrm>
-          <a:prstGeom xmlns:a="http://schemas.openxmlformats.org/drawingml/2006/main" prst="roundRect">
-            <a:avLst>
-              <a:gd name="adj" fmla="val 50000"/>
-            </a:avLst>
+          <a:prstGeom xmlns:a="http://schemas.openxmlformats.org/drawingml/2006/main" prst="ellipse">
+            <a:avLst/>
           </a:prstGeom>
           <a:solidFill xmlns:a="http://schemas.openxmlformats.org/drawingml/2006/main">
             <a:srgbClr val="1174B7"/>
@@ -9280,33 +9452,35 @@
           <p:cNvPr id="4" name="">
             <a:extLst xmlns:a="http://schemas.openxmlformats.org/drawingml/2006/main">
               <a:ext uri="{FF2B5EF4-FFF2-40B4-BE49-F238E27FC236}">
-                <a16:creationId xmlns:a16="http://schemas.microsoft.com/office/drawing/2014/main" id="{5867830D-0D1D-4B9F-AD76-BEF773968410}"/>
-              </a:ext>
-            </a:extLst>
-          </p:cNvPr>
-          <p:cNvSpPr>
-            <a:spLocks xmlns:a="http://schemas.openxmlformats.org/drawingml/2006/main" noGrp="1"/>
-          </p:cNvSpPr>
-          <p:nvPr/>
-        </p:nvSpPr>
-        <p:spPr>
-          <a:xfrm xmlns:a="http://schemas.openxmlformats.org/drawingml/2006/main">
-            <a:off x="714375" y="2295525"/>
-            <a:ext cx="704850" cy="381000"/>
-          </a:xfrm>
-          <a:prstGeom xmlns:a="http://schemas.openxmlformats.org/drawingml/2006/main" prst="rect">
-            <a:avLst/>
-          </a:prstGeom>
-          <a:noFill xmlns:a="http://schemas.openxmlformats.org/drawingml/2006/main"/>
-          <a:ln xmlns:a="http://schemas.openxmlformats.org/drawingml/2006/main" w="0">
-            <a:noFill/>
-          </a:ln>
-        </p:spPr>
-        <p:txBody>
-          <a:bodyPr xmlns:a="http://schemas.openxmlformats.org/drawingml/2006/main"/>
-          <a:lstStyle xmlns:a="http://schemas.openxmlformats.org/drawingml/2006/main"/>
-          <a:p xmlns:a="http://schemas.openxmlformats.org/drawingml/2006/main">
-            <a:pPr>
+                <a16:creationId xmlns:a16="http://schemas.microsoft.com/office/drawing/2014/main" id="{8FA95161-3440-4D7A-B216-A56182811095}"/>
+              </a:ext>
+            </a:extLst>
+          </p:cNvPr>
+          <p:cNvSpPr>
+            <a:spLocks xmlns:a="http://schemas.openxmlformats.org/drawingml/2006/main" noGrp="1"/>
+          </p:cNvSpPr>
+          <p:nvPr/>
+        </p:nvSpPr>
+        <p:spPr>
+          <a:xfrm xmlns:a="http://schemas.openxmlformats.org/drawingml/2006/main">
+            <a:off x="714375" y="2143125"/>
+            <a:ext cx="704850" cy="704850"/>
+          </a:xfrm>
+          <a:prstGeom xmlns:a="http://schemas.openxmlformats.org/drawingml/2006/main" prst="rect">
+            <a:avLst/>
+          </a:prstGeom>
+          <a:noFill xmlns:a="http://schemas.openxmlformats.org/drawingml/2006/main"/>
+          <a:ln xmlns:a="http://schemas.openxmlformats.org/drawingml/2006/main" w="0">
+            <a:noFill/>
+          </a:ln>
+        </p:spPr>
+        <p:txBody>
+          <a:bodyPr xmlns:a="http://schemas.openxmlformats.org/drawingml/2006/main" lIns="0" tIns="0" rIns="0" bIns="0" anchor="ctr">
+            <a:normAutofit fontScale="100000"/>
+          </a:bodyPr>
+          <a:lstStyle xmlns:a="http://schemas.openxmlformats.org/drawingml/2006/main"/>
+          <a:p xmlns:a="http://schemas.openxmlformats.org/drawingml/2006/main">
+            <a:pPr algn="ctr">
               <a:defRPr sz="1725" b="1">
                 <a:solidFill>
                   <a:srgbClr val="FFFFFF"/>
@@ -9335,7 +9509,7 @@
           <p:cNvPr id="5" name="">
             <a:extLst xmlns:a="http://schemas.openxmlformats.org/drawingml/2006/main">
               <a:ext uri="{FF2B5EF4-FFF2-40B4-BE49-F238E27FC236}">
-                <a16:creationId xmlns:a16="http://schemas.microsoft.com/office/drawing/2014/main" id="{0EE49713-C225-4B54-9F18-4C6E89BE13B8}"/>
+                <a16:creationId xmlns:a16="http://schemas.microsoft.com/office/drawing/2014/main" id="{E274B7FA-76D8-4CC9-9354-1C719E15AB3E}"/>
               </a:ext>
             </a:extLst>
           </p:cNvPr>
@@ -9358,7 +9532,9 @@
           </a:ln>
         </p:spPr>
         <p:txBody>
-          <a:bodyPr xmlns:a="http://schemas.openxmlformats.org/drawingml/2006/main"/>
+          <a:bodyPr xmlns:a="http://schemas.openxmlformats.org/drawingml/2006/main">
+            <a:normAutofit fontScale="100000"/>
+          </a:bodyPr>
           <a:lstStyle xmlns:a="http://schemas.openxmlformats.org/drawingml/2006/main"/>
           <a:p xmlns:a="http://schemas.openxmlformats.org/drawingml/2006/main">
             <a:pPr>
@@ -9390,7 +9566,7 @@
           <p:cNvPr id="6" name="">
             <a:extLst xmlns:a="http://schemas.openxmlformats.org/drawingml/2006/main">
               <a:ext uri="{FF2B5EF4-FFF2-40B4-BE49-F238E27FC236}">
-                <a16:creationId xmlns:a16="http://schemas.microsoft.com/office/drawing/2014/main" id="{12D291CA-7F77-4C38-ADE5-A3857A98A904}"/>
+                <a16:creationId xmlns:a16="http://schemas.microsoft.com/office/drawing/2014/main" id="{817DE27F-580F-4196-BAFC-1269FAAFC449}"/>
               </a:ext>
             </a:extLst>
           </p:cNvPr>
@@ -9413,7 +9589,9 @@
           </a:ln>
         </p:spPr>
         <p:txBody>
-          <a:bodyPr xmlns:a="http://schemas.openxmlformats.org/drawingml/2006/main"/>
+          <a:bodyPr xmlns:a="http://schemas.openxmlformats.org/drawingml/2006/main">
+            <a:normAutofit fontScale="96078"/>
+          </a:bodyPr>
           <a:lstStyle xmlns:a="http://schemas.openxmlformats.org/drawingml/2006/main"/>
           <a:p xmlns:a="http://schemas.openxmlformats.org/drawingml/2006/main">
             <a:pPr>
@@ -9445,7 +9623,7 @@
           <p:cNvPr id="7" name="">
             <a:extLst xmlns:a="http://schemas.openxmlformats.org/drawingml/2006/main">
               <a:ext uri="{FF2B5EF4-FFF2-40B4-BE49-F238E27FC236}">
-                <a16:creationId xmlns:a16="http://schemas.microsoft.com/office/drawing/2014/main" id="{B0AF3506-FC79-45D1-B603-54BEE428A41D}"/>
+                <a16:creationId xmlns:a16="http://schemas.microsoft.com/office/drawing/2014/main" id="{6E4F4800-5723-4305-AD36-017FB675F516}"/>
               </a:ext>
             </a:extLst>
           </p:cNvPr>
@@ -9459,10 +9637,8 @@
             <a:off x="3000375" y="2143125"/>
             <a:ext cx="704850" cy="704850"/>
           </a:xfrm>
-          <a:prstGeom xmlns:a="http://schemas.openxmlformats.org/drawingml/2006/main" prst="roundRect">
-            <a:avLst>
-              <a:gd name="adj" fmla="val 50000"/>
-            </a:avLst>
+          <a:prstGeom xmlns:a="http://schemas.openxmlformats.org/drawingml/2006/main" prst="ellipse">
+            <a:avLst/>
           </a:prstGeom>
           <a:solidFill xmlns:a="http://schemas.openxmlformats.org/drawingml/2006/main">
             <a:srgbClr val="1174B7"/>
@@ -9479,33 +9655,35 @@
           <p:cNvPr id="8" name="">
             <a:extLst xmlns:a="http://schemas.openxmlformats.org/drawingml/2006/main">
               <a:ext uri="{FF2B5EF4-FFF2-40B4-BE49-F238E27FC236}">
-                <a16:creationId xmlns:a16="http://schemas.microsoft.com/office/drawing/2014/main" id="{BE75DEF2-B2CC-43FE-B9A9-8AC3938744DC}"/>
-              </a:ext>
-            </a:extLst>
-          </p:cNvPr>
-          <p:cNvSpPr>
-            <a:spLocks xmlns:a="http://schemas.openxmlformats.org/drawingml/2006/main" noGrp="1"/>
-          </p:cNvSpPr>
-          <p:nvPr/>
-        </p:nvSpPr>
-        <p:spPr>
-          <a:xfrm xmlns:a="http://schemas.openxmlformats.org/drawingml/2006/main">
-            <a:off x="3000375" y="2295525"/>
-            <a:ext cx="704850" cy="381000"/>
-          </a:xfrm>
-          <a:prstGeom xmlns:a="http://schemas.openxmlformats.org/drawingml/2006/main" prst="rect">
-            <a:avLst/>
-          </a:prstGeom>
-          <a:noFill xmlns:a="http://schemas.openxmlformats.org/drawingml/2006/main"/>
-          <a:ln xmlns:a="http://schemas.openxmlformats.org/drawingml/2006/main" w="0">
-            <a:noFill/>
-          </a:ln>
-        </p:spPr>
-        <p:txBody>
-          <a:bodyPr xmlns:a="http://schemas.openxmlformats.org/drawingml/2006/main"/>
-          <a:lstStyle xmlns:a="http://schemas.openxmlformats.org/drawingml/2006/main"/>
-          <a:p xmlns:a="http://schemas.openxmlformats.org/drawingml/2006/main">
-            <a:pPr>
+                <a16:creationId xmlns:a16="http://schemas.microsoft.com/office/drawing/2014/main" id="{CF6ECBDF-6255-44EC-B46D-85B60CCD8E42}"/>
+              </a:ext>
+            </a:extLst>
+          </p:cNvPr>
+          <p:cNvSpPr>
+            <a:spLocks xmlns:a="http://schemas.openxmlformats.org/drawingml/2006/main" noGrp="1"/>
+          </p:cNvSpPr>
+          <p:nvPr/>
+        </p:nvSpPr>
+        <p:spPr>
+          <a:xfrm xmlns:a="http://schemas.openxmlformats.org/drawingml/2006/main">
+            <a:off x="3000375" y="2143125"/>
+            <a:ext cx="704850" cy="704850"/>
+          </a:xfrm>
+          <a:prstGeom xmlns:a="http://schemas.openxmlformats.org/drawingml/2006/main" prst="rect">
+            <a:avLst/>
+          </a:prstGeom>
+          <a:noFill xmlns:a="http://schemas.openxmlformats.org/drawingml/2006/main"/>
+          <a:ln xmlns:a="http://schemas.openxmlformats.org/drawingml/2006/main" w="0">
+            <a:noFill/>
+          </a:ln>
+        </p:spPr>
+        <p:txBody>
+          <a:bodyPr xmlns:a="http://schemas.openxmlformats.org/drawingml/2006/main" lIns="0" tIns="0" rIns="0" bIns="0" anchor="ctr">
+            <a:normAutofit fontScale="100000"/>
+          </a:bodyPr>
+          <a:lstStyle xmlns:a="http://schemas.openxmlformats.org/drawingml/2006/main"/>
+          <a:p xmlns:a="http://schemas.openxmlformats.org/drawingml/2006/main">
+            <a:pPr algn="ctr">
               <a:defRPr sz="1725" b="1">
                 <a:solidFill>
                   <a:srgbClr val="FFFFFF"/>
@@ -9534,7 +9712,7 @@
           <p:cNvPr id="9" name="">
             <a:extLst xmlns:a="http://schemas.openxmlformats.org/drawingml/2006/main">
               <a:ext uri="{FF2B5EF4-FFF2-40B4-BE49-F238E27FC236}">
-                <a16:creationId xmlns:a16="http://schemas.microsoft.com/office/drawing/2014/main" id="{C9EC2BA3-F03F-4816-9395-0D27E714EA29}"/>
+                <a16:creationId xmlns:a16="http://schemas.microsoft.com/office/drawing/2014/main" id="{ECADF56E-61E6-4918-B260-350A6E59862B}"/>
               </a:ext>
             </a:extLst>
           </p:cNvPr>
@@ -9557,7 +9735,9 @@
           </a:ln>
         </p:spPr>
         <p:txBody>
-          <a:bodyPr xmlns:a="http://schemas.openxmlformats.org/drawingml/2006/main"/>
+          <a:bodyPr xmlns:a="http://schemas.openxmlformats.org/drawingml/2006/main">
+            <a:normAutofit fontScale="100000"/>
+          </a:bodyPr>
           <a:lstStyle xmlns:a="http://schemas.openxmlformats.org/drawingml/2006/main"/>
           <a:p xmlns:a="http://schemas.openxmlformats.org/drawingml/2006/main">
             <a:pPr>
@@ -9589,7 +9769,7 @@
           <p:cNvPr id="10" name="">
             <a:extLst xmlns:a="http://schemas.openxmlformats.org/drawingml/2006/main">
               <a:ext uri="{FF2B5EF4-FFF2-40B4-BE49-F238E27FC236}">
-                <a16:creationId xmlns:a16="http://schemas.microsoft.com/office/drawing/2014/main" id="{727FBA98-8468-42CD-82AA-A7CBEB93BC41}"/>
+                <a16:creationId xmlns:a16="http://schemas.microsoft.com/office/drawing/2014/main" id="{7958C203-5DC8-4F1C-83AF-53170AFAD551}"/>
               </a:ext>
             </a:extLst>
           </p:cNvPr>
@@ -9612,7 +9792,9 @@
           </a:ln>
         </p:spPr>
         <p:txBody>
-          <a:bodyPr xmlns:a="http://schemas.openxmlformats.org/drawingml/2006/main"/>
+          <a:bodyPr xmlns:a="http://schemas.openxmlformats.org/drawingml/2006/main">
+            <a:normAutofit fontScale="96078"/>
+          </a:bodyPr>
           <a:lstStyle xmlns:a="http://schemas.openxmlformats.org/drawingml/2006/main"/>
           <a:p xmlns:a="http://schemas.openxmlformats.org/drawingml/2006/main">
             <a:pPr>
@@ -9644,7 +9826,7 @@
           <p:cNvPr id="11" name="">
             <a:extLst xmlns:a="http://schemas.openxmlformats.org/drawingml/2006/main">
               <a:ext uri="{FF2B5EF4-FFF2-40B4-BE49-F238E27FC236}">
-                <a16:creationId xmlns:a16="http://schemas.microsoft.com/office/drawing/2014/main" id="{9D94FFDC-EEF0-4943-A453-34908B0148D3}"/>
+                <a16:creationId xmlns:a16="http://schemas.microsoft.com/office/drawing/2014/main" id="{8991678F-B93F-4353-A327-BF8885349720}"/>
               </a:ext>
             </a:extLst>
           </p:cNvPr>
@@ -9658,10 +9840,8 @@
             <a:off x="5286375" y="2143125"/>
             <a:ext cx="704850" cy="704850"/>
           </a:xfrm>
-          <a:prstGeom xmlns:a="http://schemas.openxmlformats.org/drawingml/2006/main" prst="roundRect">
-            <a:avLst>
-              <a:gd name="adj" fmla="val 50000"/>
-            </a:avLst>
+          <a:prstGeom xmlns:a="http://schemas.openxmlformats.org/drawingml/2006/main" prst="ellipse">
+            <a:avLst/>
           </a:prstGeom>
           <a:solidFill xmlns:a="http://schemas.openxmlformats.org/drawingml/2006/main">
             <a:srgbClr val="1174B7"/>
@@ -9678,33 +9858,35 @@
           <p:cNvPr id="12" name="">
             <a:extLst xmlns:a="http://schemas.openxmlformats.org/drawingml/2006/main">
               <a:ext uri="{FF2B5EF4-FFF2-40B4-BE49-F238E27FC236}">
-                <a16:creationId xmlns:a16="http://schemas.microsoft.com/office/drawing/2014/main" id="{297AF612-14C1-40C8-BC08-E19B965D473F}"/>
-              </a:ext>
-            </a:extLst>
-          </p:cNvPr>
-          <p:cNvSpPr>
-            <a:spLocks xmlns:a="http://schemas.openxmlformats.org/drawingml/2006/main" noGrp="1"/>
-          </p:cNvSpPr>
-          <p:nvPr/>
-        </p:nvSpPr>
-        <p:spPr>
-          <a:xfrm xmlns:a="http://schemas.openxmlformats.org/drawingml/2006/main">
-            <a:off x="5286375" y="2295525"/>
-            <a:ext cx="704850" cy="381000"/>
-          </a:xfrm>
-          <a:prstGeom xmlns:a="http://schemas.openxmlformats.org/drawingml/2006/main" prst="rect">
-            <a:avLst/>
-          </a:prstGeom>
-          <a:noFill xmlns:a="http://schemas.openxmlformats.org/drawingml/2006/main"/>
-          <a:ln xmlns:a="http://schemas.openxmlformats.org/drawingml/2006/main" w="0">
-            <a:noFill/>
-          </a:ln>
-        </p:spPr>
-        <p:txBody>
-          <a:bodyPr xmlns:a="http://schemas.openxmlformats.org/drawingml/2006/main"/>
-          <a:lstStyle xmlns:a="http://schemas.openxmlformats.org/drawingml/2006/main"/>
-          <a:p xmlns:a="http://schemas.openxmlformats.org/drawingml/2006/main">
-            <a:pPr>
+                <a16:creationId xmlns:a16="http://schemas.microsoft.com/office/drawing/2014/main" id="{D9DD4BE9-5F5D-463F-828A-373CF7289FEA}"/>
+              </a:ext>
+            </a:extLst>
+          </p:cNvPr>
+          <p:cNvSpPr>
+            <a:spLocks xmlns:a="http://schemas.openxmlformats.org/drawingml/2006/main" noGrp="1"/>
+          </p:cNvSpPr>
+          <p:nvPr/>
+        </p:nvSpPr>
+        <p:spPr>
+          <a:xfrm xmlns:a="http://schemas.openxmlformats.org/drawingml/2006/main">
+            <a:off x="5286375" y="2143125"/>
+            <a:ext cx="704850" cy="704850"/>
+          </a:xfrm>
+          <a:prstGeom xmlns:a="http://schemas.openxmlformats.org/drawingml/2006/main" prst="rect">
+            <a:avLst/>
+          </a:prstGeom>
+          <a:noFill xmlns:a="http://schemas.openxmlformats.org/drawingml/2006/main"/>
+          <a:ln xmlns:a="http://schemas.openxmlformats.org/drawingml/2006/main" w="0">
+            <a:noFill/>
+          </a:ln>
+        </p:spPr>
+        <p:txBody>
+          <a:bodyPr xmlns:a="http://schemas.openxmlformats.org/drawingml/2006/main" lIns="0" tIns="0" rIns="0" bIns="0" anchor="ctr">
+            <a:normAutofit fontScale="100000"/>
+          </a:bodyPr>
+          <a:lstStyle xmlns:a="http://schemas.openxmlformats.org/drawingml/2006/main"/>
+          <a:p xmlns:a="http://schemas.openxmlformats.org/drawingml/2006/main">
+            <a:pPr algn="ctr">
               <a:defRPr sz="1725" b="1">
                 <a:solidFill>
                   <a:srgbClr val="FFFFFF"/>
@@ -9733,7 +9915,7 @@
           <p:cNvPr id="13" name="">
             <a:extLst xmlns:a="http://schemas.openxmlformats.org/drawingml/2006/main">
               <a:ext uri="{FF2B5EF4-FFF2-40B4-BE49-F238E27FC236}">
-                <a16:creationId xmlns:a16="http://schemas.microsoft.com/office/drawing/2014/main" id="{C4394B2A-7263-4F9B-950B-425788BF0206}"/>
+                <a16:creationId xmlns:a16="http://schemas.microsoft.com/office/drawing/2014/main" id="{CD769E15-2534-4ED7-9A81-05FC17EDC0C2}"/>
               </a:ext>
             </a:extLst>
           </p:cNvPr>
@@ -9756,7 +9938,9 @@
           </a:ln>
         </p:spPr>
         <p:txBody>
-          <a:bodyPr xmlns:a="http://schemas.openxmlformats.org/drawingml/2006/main"/>
+          <a:bodyPr xmlns:a="http://schemas.openxmlformats.org/drawingml/2006/main">
+            <a:normAutofit fontScale="100000"/>
+          </a:bodyPr>
           <a:lstStyle xmlns:a="http://schemas.openxmlformats.org/drawingml/2006/main"/>
           <a:p xmlns:a="http://schemas.openxmlformats.org/drawingml/2006/main">
             <a:pPr>
@@ -9788,7 +9972,7 @@
           <p:cNvPr id="14" name="">
             <a:extLst xmlns:a="http://schemas.openxmlformats.org/drawingml/2006/main">
               <a:ext uri="{FF2B5EF4-FFF2-40B4-BE49-F238E27FC236}">
-                <a16:creationId xmlns:a16="http://schemas.microsoft.com/office/drawing/2014/main" id="{A5A9D9FE-F3B7-4875-A3A3-F04C7201240B}"/>
+                <a16:creationId xmlns:a16="http://schemas.microsoft.com/office/drawing/2014/main" id="{1177C6AE-00B7-475D-8A7C-EC0A18256488}"/>
               </a:ext>
             </a:extLst>
           </p:cNvPr>
@@ -9811,7 +9995,9 @@
           </a:ln>
         </p:spPr>
         <p:txBody>
-          <a:bodyPr xmlns:a="http://schemas.openxmlformats.org/drawingml/2006/main"/>
+          <a:bodyPr xmlns:a="http://schemas.openxmlformats.org/drawingml/2006/main">
+            <a:normAutofit fontScale="96078"/>
+          </a:bodyPr>
           <a:lstStyle xmlns:a="http://schemas.openxmlformats.org/drawingml/2006/main"/>
           <a:p xmlns:a="http://schemas.openxmlformats.org/drawingml/2006/main">
             <a:pPr>
@@ -9843,7 +10029,7 @@
           <p:cNvPr id="15" name="">
             <a:extLst xmlns:a="http://schemas.openxmlformats.org/drawingml/2006/main">
               <a:ext uri="{FF2B5EF4-FFF2-40B4-BE49-F238E27FC236}">
-                <a16:creationId xmlns:a16="http://schemas.microsoft.com/office/drawing/2014/main" id="{18487AAC-AED1-4452-928C-470E1E7B4246}"/>
+                <a16:creationId xmlns:a16="http://schemas.microsoft.com/office/drawing/2014/main" id="{B46516D4-3969-443A-AACD-DB532E18CBAA}"/>
               </a:ext>
             </a:extLst>
           </p:cNvPr>
@@ -9857,10 +10043,8 @@
             <a:off x="7572375" y="2143125"/>
             <a:ext cx="704850" cy="704850"/>
           </a:xfrm>
-          <a:prstGeom xmlns:a="http://schemas.openxmlformats.org/drawingml/2006/main" prst="roundRect">
-            <a:avLst>
-              <a:gd name="adj" fmla="val 50000"/>
-            </a:avLst>
+          <a:prstGeom xmlns:a="http://schemas.openxmlformats.org/drawingml/2006/main" prst="ellipse">
+            <a:avLst/>
           </a:prstGeom>
           <a:solidFill xmlns:a="http://schemas.openxmlformats.org/drawingml/2006/main">
             <a:srgbClr val="1174B7"/>
@@ -9877,33 +10061,35 @@
           <p:cNvPr id="16" name="">
             <a:extLst xmlns:a="http://schemas.openxmlformats.org/drawingml/2006/main">
               <a:ext uri="{FF2B5EF4-FFF2-40B4-BE49-F238E27FC236}">
-                <a16:creationId xmlns:a16="http://schemas.microsoft.com/office/drawing/2014/main" id="{F045A946-5001-4B0A-83BB-F8798E73FC02}"/>
-              </a:ext>
-            </a:extLst>
-          </p:cNvPr>
-          <p:cNvSpPr>
-            <a:spLocks xmlns:a="http://schemas.openxmlformats.org/drawingml/2006/main" noGrp="1"/>
-          </p:cNvSpPr>
-          <p:nvPr/>
-        </p:nvSpPr>
-        <p:spPr>
-          <a:xfrm xmlns:a="http://schemas.openxmlformats.org/drawingml/2006/main">
-            <a:off x="7572375" y="2295525"/>
-            <a:ext cx="704850" cy="381000"/>
-          </a:xfrm>
-          <a:prstGeom xmlns:a="http://schemas.openxmlformats.org/drawingml/2006/main" prst="rect">
-            <a:avLst/>
-          </a:prstGeom>
-          <a:noFill xmlns:a="http://schemas.openxmlformats.org/drawingml/2006/main"/>
-          <a:ln xmlns:a="http://schemas.openxmlformats.org/drawingml/2006/main" w="0">
-            <a:noFill/>
-          </a:ln>
-        </p:spPr>
-        <p:txBody>
-          <a:bodyPr xmlns:a="http://schemas.openxmlformats.org/drawingml/2006/main"/>
-          <a:lstStyle xmlns:a="http://schemas.openxmlformats.org/drawingml/2006/main"/>
-          <a:p xmlns:a="http://schemas.openxmlformats.org/drawingml/2006/main">
-            <a:pPr>
+                <a16:creationId xmlns:a16="http://schemas.microsoft.com/office/drawing/2014/main" id="{A905ABEF-0D69-4D8E-9F63-DB5BEF5911FD}"/>
+              </a:ext>
+            </a:extLst>
+          </p:cNvPr>
+          <p:cNvSpPr>
+            <a:spLocks xmlns:a="http://schemas.openxmlformats.org/drawingml/2006/main" noGrp="1"/>
+          </p:cNvSpPr>
+          <p:nvPr/>
+        </p:nvSpPr>
+        <p:spPr>
+          <a:xfrm xmlns:a="http://schemas.openxmlformats.org/drawingml/2006/main">
+            <a:off x="7572375" y="2143125"/>
+            <a:ext cx="704850" cy="704850"/>
+          </a:xfrm>
+          <a:prstGeom xmlns:a="http://schemas.openxmlformats.org/drawingml/2006/main" prst="rect">
+            <a:avLst/>
+          </a:prstGeom>
+          <a:noFill xmlns:a="http://schemas.openxmlformats.org/drawingml/2006/main"/>
+          <a:ln xmlns:a="http://schemas.openxmlformats.org/drawingml/2006/main" w="0">
+            <a:noFill/>
+          </a:ln>
+        </p:spPr>
+        <p:txBody>
+          <a:bodyPr xmlns:a="http://schemas.openxmlformats.org/drawingml/2006/main" lIns="0" tIns="0" rIns="0" bIns="0" anchor="ctr">
+            <a:normAutofit fontScale="100000"/>
+          </a:bodyPr>
+          <a:lstStyle xmlns:a="http://schemas.openxmlformats.org/drawingml/2006/main"/>
+          <a:p xmlns:a="http://schemas.openxmlformats.org/drawingml/2006/main">
+            <a:pPr algn="ctr">
               <a:defRPr sz="1725" b="1">
                 <a:solidFill>
                   <a:srgbClr val="FFFFFF"/>
@@ -9932,7 +10118,7 @@
           <p:cNvPr id="17" name="">
             <a:extLst xmlns:a="http://schemas.openxmlformats.org/drawingml/2006/main">
               <a:ext uri="{FF2B5EF4-FFF2-40B4-BE49-F238E27FC236}">
-                <a16:creationId xmlns:a16="http://schemas.microsoft.com/office/drawing/2014/main" id="{F56BACC1-27C2-41C9-9450-1D750679238C}"/>
+                <a16:creationId xmlns:a16="http://schemas.microsoft.com/office/drawing/2014/main" id="{9D11FCBD-DA99-4242-BA89-5C8BE9AB303F}"/>
               </a:ext>
             </a:extLst>
           </p:cNvPr>
@@ -9955,7 +10141,9 @@
           </a:ln>
         </p:spPr>
         <p:txBody>
-          <a:bodyPr xmlns:a="http://schemas.openxmlformats.org/drawingml/2006/main"/>
+          <a:bodyPr xmlns:a="http://schemas.openxmlformats.org/drawingml/2006/main">
+            <a:normAutofit fontScale="100000"/>
+          </a:bodyPr>
           <a:lstStyle xmlns:a="http://schemas.openxmlformats.org/drawingml/2006/main"/>
           <a:p xmlns:a="http://schemas.openxmlformats.org/drawingml/2006/main">
             <a:pPr>
@@ -9987,7 +10175,7 @@
           <p:cNvPr id="18" name="">
             <a:extLst xmlns:a="http://schemas.openxmlformats.org/drawingml/2006/main">
               <a:ext uri="{FF2B5EF4-FFF2-40B4-BE49-F238E27FC236}">
-                <a16:creationId xmlns:a16="http://schemas.microsoft.com/office/drawing/2014/main" id="{BEFA7759-D445-44C4-A091-F965D4087D73}"/>
+                <a16:creationId xmlns:a16="http://schemas.microsoft.com/office/drawing/2014/main" id="{9D97D62F-50A7-43CC-B78E-24B8AE3F1922}"/>
               </a:ext>
             </a:extLst>
           </p:cNvPr>
@@ -10010,7 +10198,9 @@
           </a:ln>
         </p:spPr>
         <p:txBody>
-          <a:bodyPr xmlns:a="http://schemas.openxmlformats.org/drawingml/2006/main"/>
+          <a:bodyPr xmlns:a="http://schemas.openxmlformats.org/drawingml/2006/main">
+            <a:normAutofit fontScale="83691"/>
+          </a:bodyPr>
           <a:lstStyle xmlns:a="http://schemas.openxmlformats.org/drawingml/2006/main"/>
           <a:p xmlns:a="http://schemas.openxmlformats.org/drawingml/2006/main">
             <a:pPr>
@@ -10042,7 +10232,7 @@
           <p:cNvPr id="19" name="">
             <a:extLst xmlns:a="http://schemas.openxmlformats.org/drawingml/2006/main">
               <a:ext uri="{FF2B5EF4-FFF2-40B4-BE49-F238E27FC236}">
-                <a16:creationId xmlns:a16="http://schemas.microsoft.com/office/drawing/2014/main" id="{7AA45C75-83EF-46A2-B25E-5560C8972644}"/>
+                <a16:creationId xmlns:a16="http://schemas.microsoft.com/office/drawing/2014/main" id="{5C237D8C-E3FE-4CE8-9052-C86BFF5C4FC8}"/>
               </a:ext>
             </a:extLst>
           </p:cNvPr>
@@ -10056,10 +10246,8 @@
             <a:off x="9858375" y="2143125"/>
             <a:ext cx="704850" cy="704850"/>
           </a:xfrm>
-          <a:prstGeom xmlns:a="http://schemas.openxmlformats.org/drawingml/2006/main" prst="roundRect">
-            <a:avLst>
-              <a:gd name="adj" fmla="val 50000"/>
-            </a:avLst>
+          <a:prstGeom xmlns:a="http://schemas.openxmlformats.org/drawingml/2006/main" prst="ellipse">
+            <a:avLst/>
           </a:prstGeom>
           <a:solidFill xmlns:a="http://schemas.openxmlformats.org/drawingml/2006/main">
             <a:srgbClr val="1174B7"/>
@@ -10076,33 +10264,35 @@
           <p:cNvPr id="20" name="">
             <a:extLst xmlns:a="http://schemas.openxmlformats.org/drawingml/2006/main">
               <a:ext uri="{FF2B5EF4-FFF2-40B4-BE49-F238E27FC236}">
-                <a16:creationId xmlns:a16="http://schemas.microsoft.com/office/drawing/2014/main" id="{95D75E8D-D184-4D64-96B3-D572F2178860}"/>
-              </a:ext>
-            </a:extLst>
-          </p:cNvPr>
-          <p:cNvSpPr>
-            <a:spLocks xmlns:a="http://schemas.openxmlformats.org/drawingml/2006/main" noGrp="1"/>
-          </p:cNvSpPr>
-          <p:nvPr/>
-        </p:nvSpPr>
-        <p:spPr>
-          <a:xfrm xmlns:a="http://schemas.openxmlformats.org/drawingml/2006/main">
-            <a:off x="9858375" y="2295525"/>
-            <a:ext cx="704850" cy="381000"/>
-          </a:xfrm>
-          <a:prstGeom xmlns:a="http://schemas.openxmlformats.org/drawingml/2006/main" prst="rect">
-            <a:avLst/>
-          </a:prstGeom>
-          <a:noFill xmlns:a="http://schemas.openxmlformats.org/drawingml/2006/main"/>
-          <a:ln xmlns:a="http://schemas.openxmlformats.org/drawingml/2006/main" w="0">
-            <a:noFill/>
-          </a:ln>
-        </p:spPr>
-        <p:txBody>
-          <a:bodyPr xmlns:a="http://schemas.openxmlformats.org/drawingml/2006/main"/>
-          <a:lstStyle xmlns:a="http://schemas.openxmlformats.org/drawingml/2006/main"/>
-          <a:p xmlns:a="http://schemas.openxmlformats.org/drawingml/2006/main">
-            <a:pPr>
+                <a16:creationId xmlns:a16="http://schemas.microsoft.com/office/drawing/2014/main" id="{26A1A067-DE18-4910-836D-6D4041EB370D}"/>
+              </a:ext>
+            </a:extLst>
+          </p:cNvPr>
+          <p:cNvSpPr>
+            <a:spLocks xmlns:a="http://schemas.openxmlformats.org/drawingml/2006/main" noGrp="1"/>
+          </p:cNvSpPr>
+          <p:nvPr/>
+        </p:nvSpPr>
+        <p:spPr>
+          <a:xfrm xmlns:a="http://schemas.openxmlformats.org/drawingml/2006/main">
+            <a:off x="9858375" y="2143125"/>
+            <a:ext cx="704850" cy="704850"/>
+          </a:xfrm>
+          <a:prstGeom xmlns:a="http://schemas.openxmlformats.org/drawingml/2006/main" prst="rect">
+            <a:avLst/>
+          </a:prstGeom>
+          <a:noFill xmlns:a="http://schemas.openxmlformats.org/drawingml/2006/main"/>
+          <a:ln xmlns:a="http://schemas.openxmlformats.org/drawingml/2006/main" w="0">
+            <a:noFill/>
+          </a:ln>
+        </p:spPr>
+        <p:txBody>
+          <a:bodyPr xmlns:a="http://schemas.openxmlformats.org/drawingml/2006/main" lIns="0" tIns="0" rIns="0" bIns="0" anchor="ctr">
+            <a:normAutofit fontScale="100000"/>
+          </a:bodyPr>
+          <a:lstStyle xmlns:a="http://schemas.openxmlformats.org/drawingml/2006/main"/>
+          <a:p xmlns:a="http://schemas.openxmlformats.org/drawingml/2006/main">
+            <a:pPr algn="ctr">
               <a:defRPr sz="1725" b="1">
                 <a:solidFill>
                   <a:srgbClr val="FFFFFF"/>
@@ -10131,7 +10321,7 @@
           <p:cNvPr id="21" name="">
             <a:extLst xmlns:a="http://schemas.openxmlformats.org/drawingml/2006/main">
               <a:ext uri="{FF2B5EF4-FFF2-40B4-BE49-F238E27FC236}">
-                <a16:creationId xmlns:a16="http://schemas.microsoft.com/office/drawing/2014/main" id="{DBF5EAF3-EFE8-4941-A252-C986455736DD}"/>
+                <a16:creationId xmlns:a16="http://schemas.microsoft.com/office/drawing/2014/main" id="{96C819B1-D8F2-4107-840F-BF3C5D96B755}"/>
               </a:ext>
             </a:extLst>
           </p:cNvPr>
@@ -10154,7 +10344,9 @@
           </a:ln>
         </p:spPr>
         <p:txBody>
-          <a:bodyPr xmlns:a="http://schemas.openxmlformats.org/drawingml/2006/main"/>
+          <a:bodyPr xmlns:a="http://schemas.openxmlformats.org/drawingml/2006/main">
+            <a:normAutofit fontScale="78460"/>
+          </a:bodyPr>
           <a:lstStyle xmlns:a="http://schemas.openxmlformats.org/drawingml/2006/main"/>
           <a:p xmlns:a="http://schemas.openxmlformats.org/drawingml/2006/main">
             <a:pPr>
@@ -10186,7 +10378,7 @@
           <p:cNvPr id="22" name="">
             <a:extLst xmlns:a="http://schemas.openxmlformats.org/drawingml/2006/main">
               <a:ext uri="{FF2B5EF4-FFF2-40B4-BE49-F238E27FC236}">
-                <a16:creationId xmlns:a16="http://schemas.microsoft.com/office/drawing/2014/main" id="{024B95D8-6C8F-48CD-8897-DAD2D383DD31}"/>
+                <a16:creationId xmlns:a16="http://schemas.microsoft.com/office/drawing/2014/main" id="{DA0AB81B-F3EE-438C-98ED-7F7742D6386D}"/>
               </a:ext>
             </a:extLst>
           </p:cNvPr>
@@ -10209,7 +10401,9 @@
           </a:ln>
         </p:spPr>
         <p:txBody>
-          <a:bodyPr xmlns:a="http://schemas.openxmlformats.org/drawingml/2006/main"/>
+          <a:bodyPr xmlns:a="http://schemas.openxmlformats.org/drawingml/2006/main">
+            <a:normAutofit fontScale="96078"/>
+          </a:bodyPr>
           <a:lstStyle xmlns:a="http://schemas.openxmlformats.org/drawingml/2006/main"/>
           <a:p xmlns:a="http://schemas.openxmlformats.org/drawingml/2006/main">
             <a:pPr>
@@ -10241,7 +10435,7 @@
           <p:cNvPr id="23" name="">
             <a:extLst xmlns:a="http://schemas.openxmlformats.org/drawingml/2006/main">
               <a:ext uri="{FF2B5EF4-FFF2-40B4-BE49-F238E27FC236}">
-                <a16:creationId xmlns:a16="http://schemas.microsoft.com/office/drawing/2014/main" id="{DB5EC4E6-0627-4B22-869E-5AD503E84693}"/>
+                <a16:creationId xmlns:a16="http://schemas.microsoft.com/office/drawing/2014/main" id="{3BC7993F-B083-4575-BE90-51863A12B122}"/>
               </a:ext>
             </a:extLst>
           </p:cNvPr>
@@ -10264,7 +10458,9 @@
           </a:ln>
         </p:spPr>
         <p:txBody>
-          <a:bodyPr xmlns:a="http://schemas.openxmlformats.org/drawingml/2006/main"/>
+          <a:bodyPr xmlns:a="http://schemas.openxmlformats.org/drawingml/2006/main">
+            <a:normAutofit fontScale="100000"/>
+          </a:bodyPr>
           <a:lstStyle xmlns:a="http://schemas.openxmlformats.org/drawingml/2006/main"/>
           <a:p xmlns:a="http://schemas.openxmlformats.org/drawingml/2006/main">
             <a:pPr>
@@ -10296,7 +10492,7 @@
           <p:cNvPr id="24" name="">
             <a:extLst xmlns:a="http://schemas.openxmlformats.org/drawingml/2006/main">
               <a:ext uri="{FF2B5EF4-FFF2-40B4-BE49-F238E27FC236}">
-                <a16:creationId xmlns:a16="http://schemas.microsoft.com/office/drawing/2014/main" id="{DDCF7803-F836-43D7-BCF4-0D3680185FA4}"/>
+                <a16:creationId xmlns:a16="http://schemas.microsoft.com/office/drawing/2014/main" id="{326BC79A-6B99-4E01-B16D-3A1083B507FE}"/>
               </a:ext>
             </a:extLst>
           </p:cNvPr>
@@ -10319,7 +10515,9 @@
           </a:ln>
         </p:spPr>
         <p:txBody>
-          <a:bodyPr xmlns:a="http://schemas.openxmlformats.org/drawingml/2006/main"/>
+          <a:bodyPr xmlns:a="http://schemas.openxmlformats.org/drawingml/2006/main">
+            <a:normAutofit fontScale="66667"/>
+          </a:bodyPr>
           <a:lstStyle xmlns:a="http://schemas.openxmlformats.org/drawingml/2006/main"/>
           <a:p xmlns:a="http://schemas.openxmlformats.org/drawingml/2006/main">
             <a:pPr>
@@ -10351,7 +10549,7 @@
           <p:cNvPr id="25" name="">
             <a:extLst xmlns:a="http://schemas.openxmlformats.org/drawingml/2006/main">
               <a:ext uri="{FF2B5EF4-FFF2-40B4-BE49-F238E27FC236}">
-                <a16:creationId xmlns:a16="http://schemas.microsoft.com/office/drawing/2014/main" id="{C7587515-DCB4-4B50-8C65-024F90A2CA75}"/>
+                <a16:creationId xmlns:a16="http://schemas.microsoft.com/office/drawing/2014/main" id="{1C1C009E-418A-43FD-83BC-84DD5219D10A}"/>
               </a:ext>
             </a:extLst>
           </p:cNvPr>
@@ -10374,10 +10572,12 @@
           </a:ln>
         </p:spPr>
         <p:txBody>
-          <a:bodyPr xmlns:a="http://schemas.openxmlformats.org/drawingml/2006/main"/>
-          <a:lstStyle xmlns:a="http://schemas.openxmlformats.org/drawingml/2006/main"/>
-          <a:p xmlns:a="http://schemas.openxmlformats.org/drawingml/2006/main">
-            <a:pPr>
+          <a:bodyPr xmlns:a="http://schemas.openxmlformats.org/drawingml/2006/main">
+            <a:normAutofit fontScale="66667"/>
+          </a:bodyPr>
+          <a:lstStyle xmlns:a="http://schemas.openxmlformats.org/drawingml/2006/main"/>
+          <a:p xmlns:a="http://schemas.openxmlformats.org/drawingml/2006/main">
+            <a:pPr algn="r">
               <a:defRPr sz="975" b="0">
                 <a:solidFill>
                   <a:srgbClr val="5C7083"/>
@@ -10404,7 +10604,7 @@
     </p:spTree>
     <p:extLst>
       <p:ext uri="{BB962C8B-B14F-4D97-AF65-F5344CB8AC3E}">
-        <p14:creationId xmlns:p14="http://schemas.microsoft.com/office/powerpoint/2010/main" val="848837265"/>
+        <p14:creationId xmlns:p14="http://schemas.microsoft.com/office/powerpoint/2010/main" val="1078600207"/>
       </p:ext>
     </p:extLst>
   </p:cSld>
@@ -10435,7 +10635,7 @@
           <p:cNvPr id="28" name="">
             <a:extLst xmlns:a="http://schemas.openxmlformats.org/drawingml/2006/main">
               <a:ext uri="{FF2B5EF4-FFF2-40B4-BE49-F238E27FC236}">
-                <a16:creationId xmlns:a16="http://schemas.microsoft.com/office/drawing/2014/main" id="{E36D15C6-A23B-400A-B1CF-598A3B46E89E}"/>
+                <a16:creationId xmlns:a16="http://schemas.microsoft.com/office/drawing/2014/main" id="{7EB68E69-ABF2-40A5-964B-1E4ED458FCAA}"/>
               </a:ext>
             </a:extLst>
           </p:cNvPr>
@@ -10458,7 +10658,9 @@
           </a:ln>
         </p:spPr>
         <p:txBody>
-          <a:bodyPr xmlns:a="http://schemas.openxmlformats.org/drawingml/2006/main"/>
+          <a:bodyPr xmlns:a="http://schemas.openxmlformats.org/drawingml/2006/main">
+            <a:normAutofit fontScale="95175"/>
+          </a:bodyPr>
           <a:lstStyle xmlns:a="http://schemas.openxmlformats.org/drawingml/2006/main"/>
           <a:p xmlns:a="http://schemas.openxmlformats.org/drawingml/2006/main">
             <a:pPr>
@@ -10490,7 +10692,7 @@
           <p:cNvPr id="2" name="">
             <a:extLst xmlns:a="http://schemas.openxmlformats.org/drawingml/2006/main">
               <a:ext uri="{FF2B5EF4-FFF2-40B4-BE49-F238E27FC236}">
-                <a16:creationId xmlns:a16="http://schemas.microsoft.com/office/drawing/2014/main" id="{52102CF0-E677-4EB6-8955-B60905FA3826}"/>
+                <a16:creationId xmlns:a16="http://schemas.microsoft.com/office/drawing/2014/main" id="{469C6EE4-E7A6-407A-91F8-F9940A2058C4}"/>
               </a:ext>
             </a:extLst>
           </p:cNvPr>
@@ -10513,7 +10715,9 @@
           </a:ln>
         </p:spPr>
         <p:txBody>
-          <a:bodyPr xmlns:a="http://schemas.openxmlformats.org/drawingml/2006/main"/>
+          <a:bodyPr xmlns:a="http://schemas.openxmlformats.org/drawingml/2006/main">
+            <a:normAutofit fontScale="89167"/>
+          </a:bodyPr>
           <a:lstStyle xmlns:a="http://schemas.openxmlformats.org/drawingml/2006/main"/>
           <a:p xmlns:a="http://schemas.openxmlformats.org/drawingml/2006/main">
             <a:pPr>
@@ -10545,7 +10749,7 @@
           <p:cNvPr id="3" name="">
             <a:extLst xmlns:a="http://schemas.openxmlformats.org/drawingml/2006/main">
               <a:ext uri="{FF2B5EF4-FFF2-40B4-BE49-F238E27FC236}">
-                <a16:creationId xmlns:a16="http://schemas.microsoft.com/office/drawing/2014/main" id="{AD7A0864-D318-419A-B89E-8BA3CE4D7F11}"/>
+                <a16:creationId xmlns:a16="http://schemas.microsoft.com/office/drawing/2014/main" id="{345CD3E9-2FC3-4423-A581-DEF6A72E0EBA}"/>
               </a:ext>
             </a:extLst>
           </p:cNvPr>
@@ -10559,10 +10763,8 @@
             <a:off x="733425" y="2047875"/>
             <a:ext cx="704850" cy="704850"/>
           </a:xfrm>
-          <a:prstGeom xmlns:a="http://schemas.openxmlformats.org/drawingml/2006/main" prst="roundRect">
-            <a:avLst>
-              <a:gd name="adj" fmla="val 50000"/>
-            </a:avLst>
+          <a:prstGeom xmlns:a="http://schemas.openxmlformats.org/drawingml/2006/main" prst="ellipse">
+            <a:avLst/>
           </a:prstGeom>
           <a:solidFill xmlns:a="http://schemas.openxmlformats.org/drawingml/2006/main">
             <a:srgbClr val="1174B7"/>
@@ -10579,33 +10781,35 @@
           <p:cNvPr id="4" name="">
             <a:extLst xmlns:a="http://schemas.openxmlformats.org/drawingml/2006/main">
               <a:ext uri="{FF2B5EF4-FFF2-40B4-BE49-F238E27FC236}">
-                <a16:creationId xmlns:a16="http://schemas.microsoft.com/office/drawing/2014/main" id="{A932E1F7-7905-4553-9065-6A55D49FACD3}"/>
-              </a:ext>
-            </a:extLst>
-          </p:cNvPr>
-          <p:cNvSpPr>
-            <a:spLocks xmlns:a="http://schemas.openxmlformats.org/drawingml/2006/main" noGrp="1"/>
-          </p:cNvSpPr>
-          <p:nvPr/>
-        </p:nvSpPr>
-        <p:spPr>
-          <a:xfrm xmlns:a="http://schemas.openxmlformats.org/drawingml/2006/main">
-            <a:off x="733425" y="2200275"/>
-            <a:ext cx="704850" cy="381000"/>
-          </a:xfrm>
-          <a:prstGeom xmlns:a="http://schemas.openxmlformats.org/drawingml/2006/main" prst="rect">
-            <a:avLst/>
-          </a:prstGeom>
-          <a:noFill xmlns:a="http://schemas.openxmlformats.org/drawingml/2006/main"/>
-          <a:ln xmlns:a="http://schemas.openxmlformats.org/drawingml/2006/main" w="0">
-            <a:noFill/>
-          </a:ln>
-        </p:spPr>
-        <p:txBody>
-          <a:bodyPr xmlns:a="http://schemas.openxmlformats.org/drawingml/2006/main"/>
-          <a:lstStyle xmlns:a="http://schemas.openxmlformats.org/drawingml/2006/main"/>
-          <a:p xmlns:a="http://schemas.openxmlformats.org/drawingml/2006/main">
-            <a:pPr>
+                <a16:creationId xmlns:a16="http://schemas.microsoft.com/office/drawing/2014/main" id="{671B96A9-DE0B-436B-9FDA-7472DB3F40C6}"/>
+              </a:ext>
+            </a:extLst>
+          </p:cNvPr>
+          <p:cNvSpPr>
+            <a:spLocks xmlns:a="http://schemas.openxmlformats.org/drawingml/2006/main" noGrp="1"/>
+          </p:cNvSpPr>
+          <p:nvPr/>
+        </p:nvSpPr>
+        <p:spPr>
+          <a:xfrm xmlns:a="http://schemas.openxmlformats.org/drawingml/2006/main">
+            <a:off x="733425" y="2047875"/>
+            <a:ext cx="704850" cy="704850"/>
+          </a:xfrm>
+          <a:prstGeom xmlns:a="http://schemas.openxmlformats.org/drawingml/2006/main" prst="rect">
+            <a:avLst/>
+          </a:prstGeom>
+          <a:noFill xmlns:a="http://schemas.openxmlformats.org/drawingml/2006/main"/>
+          <a:ln xmlns:a="http://schemas.openxmlformats.org/drawingml/2006/main" w="0">
+            <a:noFill/>
+          </a:ln>
+        </p:spPr>
+        <p:txBody>
+          <a:bodyPr xmlns:a="http://schemas.openxmlformats.org/drawingml/2006/main" lIns="0" tIns="0" rIns="0" bIns="0" anchor="ctr">
+            <a:normAutofit fontScale="100000"/>
+          </a:bodyPr>
+          <a:lstStyle xmlns:a="http://schemas.openxmlformats.org/drawingml/2006/main"/>
+          <a:p xmlns:a="http://schemas.openxmlformats.org/drawingml/2006/main">
+            <a:pPr algn="ctr">
               <a:defRPr sz="1725" b="1">
                 <a:solidFill>
                   <a:srgbClr val="FFFFFF"/>
@@ -10634,7 +10838,7 @@
           <p:cNvPr id="5" name="">
             <a:extLst xmlns:a="http://schemas.openxmlformats.org/drawingml/2006/main">
               <a:ext uri="{FF2B5EF4-FFF2-40B4-BE49-F238E27FC236}">
-                <a16:creationId xmlns:a16="http://schemas.microsoft.com/office/drawing/2014/main" id="{9636B1EE-E21C-41C3-B063-75A34ACC1C8A}"/>
+                <a16:creationId xmlns:a16="http://schemas.microsoft.com/office/drawing/2014/main" id="{21EB8BD3-D5DF-41A8-8EBF-0E33F15C44A2}"/>
               </a:ext>
             </a:extLst>
           </p:cNvPr>
@@ -10657,7 +10861,9 @@
           </a:ln>
         </p:spPr>
         <p:txBody>
-          <a:bodyPr xmlns:a="http://schemas.openxmlformats.org/drawingml/2006/main"/>
+          <a:bodyPr xmlns:a="http://schemas.openxmlformats.org/drawingml/2006/main">
+            <a:normAutofit fontScale="100000"/>
+          </a:bodyPr>
           <a:lstStyle xmlns:a="http://schemas.openxmlformats.org/drawingml/2006/main"/>
           <a:p xmlns:a="http://schemas.openxmlformats.org/drawingml/2006/main">
             <a:pPr>
@@ -10689,7 +10895,7 @@
           <p:cNvPr id="6" name="">
             <a:extLst xmlns:a="http://schemas.openxmlformats.org/drawingml/2006/main">
               <a:ext uri="{FF2B5EF4-FFF2-40B4-BE49-F238E27FC236}">
-                <a16:creationId xmlns:a16="http://schemas.microsoft.com/office/drawing/2014/main" id="{05E80917-A45B-4A84-BB8E-C8ED9EC7DF06}"/>
+                <a16:creationId xmlns:a16="http://schemas.microsoft.com/office/drawing/2014/main" id="{5BC8E9FA-60A7-4968-B17F-BA88D428D299}"/>
               </a:ext>
             </a:extLst>
           </p:cNvPr>
@@ -10712,7 +10918,9 @@
           </a:ln>
         </p:spPr>
         <p:txBody>
-          <a:bodyPr xmlns:a="http://schemas.openxmlformats.org/drawingml/2006/main"/>
+          <a:bodyPr xmlns:a="http://schemas.openxmlformats.org/drawingml/2006/main">
+            <a:normAutofit fontScale="96078"/>
+          </a:bodyPr>
           <a:lstStyle xmlns:a="http://schemas.openxmlformats.org/drawingml/2006/main"/>
           <a:p xmlns:a="http://schemas.openxmlformats.org/drawingml/2006/main">
             <a:pPr>
@@ -10744,7 +10952,7 @@
           <p:cNvPr id="7" name="">
             <a:extLst xmlns:a="http://schemas.openxmlformats.org/drawingml/2006/main">
               <a:ext uri="{FF2B5EF4-FFF2-40B4-BE49-F238E27FC236}">
-                <a16:creationId xmlns:a16="http://schemas.microsoft.com/office/drawing/2014/main" id="{ED32F51E-9438-4070-BADB-0D5DA2ACEE52}"/>
+                <a16:creationId xmlns:a16="http://schemas.microsoft.com/office/drawing/2014/main" id="{851BD2AA-C58B-4A0E-B19D-D1D17AF8D770}"/>
               </a:ext>
             </a:extLst>
           </p:cNvPr>
@@ -10758,10 +10966,8 @@
             <a:off x="2924175" y="2047875"/>
             <a:ext cx="704850" cy="704850"/>
           </a:xfrm>
-          <a:prstGeom xmlns:a="http://schemas.openxmlformats.org/drawingml/2006/main" prst="roundRect">
-            <a:avLst>
-              <a:gd name="adj" fmla="val 50000"/>
-            </a:avLst>
+          <a:prstGeom xmlns:a="http://schemas.openxmlformats.org/drawingml/2006/main" prst="ellipse">
+            <a:avLst/>
           </a:prstGeom>
           <a:solidFill xmlns:a="http://schemas.openxmlformats.org/drawingml/2006/main">
             <a:srgbClr val="1174B7"/>
@@ -10778,33 +10984,35 @@
           <p:cNvPr id="8" name="">
             <a:extLst xmlns:a="http://schemas.openxmlformats.org/drawingml/2006/main">
               <a:ext uri="{FF2B5EF4-FFF2-40B4-BE49-F238E27FC236}">
-                <a16:creationId xmlns:a16="http://schemas.microsoft.com/office/drawing/2014/main" id="{4C089905-611E-404F-8DE8-5F1CDAB31AFD}"/>
-              </a:ext>
-            </a:extLst>
-          </p:cNvPr>
-          <p:cNvSpPr>
-            <a:spLocks xmlns:a="http://schemas.openxmlformats.org/drawingml/2006/main" noGrp="1"/>
-          </p:cNvSpPr>
-          <p:nvPr/>
-        </p:nvSpPr>
-        <p:spPr>
-          <a:xfrm xmlns:a="http://schemas.openxmlformats.org/drawingml/2006/main">
-            <a:off x="2924175" y="2200275"/>
-            <a:ext cx="704850" cy="381000"/>
-          </a:xfrm>
-          <a:prstGeom xmlns:a="http://schemas.openxmlformats.org/drawingml/2006/main" prst="rect">
-            <a:avLst/>
-          </a:prstGeom>
-          <a:noFill xmlns:a="http://schemas.openxmlformats.org/drawingml/2006/main"/>
-          <a:ln xmlns:a="http://schemas.openxmlformats.org/drawingml/2006/main" w="0">
-            <a:noFill/>
-          </a:ln>
-        </p:spPr>
-        <p:txBody>
-          <a:bodyPr xmlns:a="http://schemas.openxmlformats.org/drawingml/2006/main"/>
-          <a:lstStyle xmlns:a="http://schemas.openxmlformats.org/drawingml/2006/main"/>
-          <a:p xmlns:a="http://schemas.openxmlformats.org/drawingml/2006/main">
-            <a:pPr>
+                <a16:creationId xmlns:a16="http://schemas.microsoft.com/office/drawing/2014/main" id="{F404FE85-16DB-4DE7-A651-F5EE278B33FD}"/>
+              </a:ext>
+            </a:extLst>
+          </p:cNvPr>
+          <p:cNvSpPr>
+            <a:spLocks xmlns:a="http://schemas.openxmlformats.org/drawingml/2006/main" noGrp="1"/>
+          </p:cNvSpPr>
+          <p:nvPr/>
+        </p:nvSpPr>
+        <p:spPr>
+          <a:xfrm xmlns:a="http://schemas.openxmlformats.org/drawingml/2006/main">
+            <a:off x="2924175" y="2047875"/>
+            <a:ext cx="704850" cy="704850"/>
+          </a:xfrm>
+          <a:prstGeom xmlns:a="http://schemas.openxmlformats.org/drawingml/2006/main" prst="rect">
+            <a:avLst/>
+          </a:prstGeom>
+          <a:noFill xmlns:a="http://schemas.openxmlformats.org/drawingml/2006/main"/>
+          <a:ln xmlns:a="http://schemas.openxmlformats.org/drawingml/2006/main" w="0">
+            <a:noFill/>
+          </a:ln>
+        </p:spPr>
+        <p:txBody>
+          <a:bodyPr xmlns:a="http://schemas.openxmlformats.org/drawingml/2006/main" lIns="0" tIns="0" rIns="0" bIns="0" anchor="ctr">
+            <a:normAutofit fontScale="100000"/>
+          </a:bodyPr>
+          <a:lstStyle xmlns:a="http://schemas.openxmlformats.org/drawingml/2006/main"/>
+          <a:p xmlns:a="http://schemas.openxmlformats.org/drawingml/2006/main">
+            <a:pPr algn="ctr">
               <a:defRPr sz="1725" b="1">
                 <a:solidFill>
                   <a:srgbClr val="FFFFFF"/>
@@ -10833,7 +11041,7 @@
           <p:cNvPr id="9" name="">
             <a:extLst xmlns:a="http://schemas.openxmlformats.org/drawingml/2006/main">
               <a:ext uri="{FF2B5EF4-FFF2-40B4-BE49-F238E27FC236}">
-                <a16:creationId xmlns:a16="http://schemas.microsoft.com/office/drawing/2014/main" id="{C672C36B-C712-48BF-96B5-52545FEBBB37}"/>
+                <a16:creationId xmlns:a16="http://schemas.microsoft.com/office/drawing/2014/main" id="{26BEDEA1-7A60-4F2E-A407-95EC0D17D92C}"/>
               </a:ext>
             </a:extLst>
           </p:cNvPr>
@@ -10856,7 +11064,9 @@
           </a:ln>
         </p:spPr>
         <p:txBody>
-          <a:bodyPr xmlns:a="http://schemas.openxmlformats.org/drawingml/2006/main"/>
+          <a:bodyPr xmlns:a="http://schemas.openxmlformats.org/drawingml/2006/main">
+            <a:normAutofit fontScale="100000"/>
+          </a:bodyPr>
           <a:lstStyle xmlns:a="http://schemas.openxmlformats.org/drawingml/2006/main"/>
           <a:p xmlns:a="http://schemas.openxmlformats.org/drawingml/2006/main">
             <a:pPr>
@@ -10888,7 +11098,7 @@
           <p:cNvPr id="10" name="">
             <a:extLst xmlns:a="http://schemas.openxmlformats.org/drawingml/2006/main">
               <a:ext uri="{FF2B5EF4-FFF2-40B4-BE49-F238E27FC236}">
-                <a16:creationId xmlns:a16="http://schemas.microsoft.com/office/drawing/2014/main" id="{0F44A004-BEEA-420A-B342-7B0BFB6DE0E3}"/>
+                <a16:creationId xmlns:a16="http://schemas.microsoft.com/office/drawing/2014/main" id="{645D8388-1F51-4E95-9037-BC2A267AFB23}"/>
               </a:ext>
             </a:extLst>
           </p:cNvPr>
@@ -10911,7 +11121,9 @@
           </a:ln>
         </p:spPr>
         <p:txBody>
-          <a:bodyPr xmlns:a="http://schemas.openxmlformats.org/drawingml/2006/main"/>
+          <a:bodyPr xmlns:a="http://schemas.openxmlformats.org/drawingml/2006/main">
+            <a:normAutofit fontScale="96078"/>
+          </a:bodyPr>
           <a:lstStyle xmlns:a="http://schemas.openxmlformats.org/drawingml/2006/main"/>
           <a:p xmlns:a="http://schemas.openxmlformats.org/drawingml/2006/main">
             <a:pPr>
@@ -10943,7 +11155,7 @@
           <p:cNvPr id="11" name="">
             <a:extLst xmlns:a="http://schemas.openxmlformats.org/drawingml/2006/main">
               <a:ext uri="{FF2B5EF4-FFF2-40B4-BE49-F238E27FC236}">
-                <a16:creationId xmlns:a16="http://schemas.microsoft.com/office/drawing/2014/main" id="{4BE41BB2-1736-401D-95A9-2D644D1F6BFD}"/>
+                <a16:creationId xmlns:a16="http://schemas.microsoft.com/office/drawing/2014/main" id="{AA36AE47-2DCD-4670-A38C-8F2C10E7A278}"/>
               </a:ext>
             </a:extLst>
           </p:cNvPr>
@@ -10957,10 +11169,8 @@
             <a:off x="5114925" y="2047875"/>
             <a:ext cx="704850" cy="704850"/>
           </a:xfrm>
-          <a:prstGeom xmlns:a="http://schemas.openxmlformats.org/drawingml/2006/main" prst="roundRect">
-            <a:avLst>
-              <a:gd name="adj" fmla="val 50000"/>
-            </a:avLst>
+          <a:prstGeom xmlns:a="http://schemas.openxmlformats.org/drawingml/2006/main" prst="ellipse">
+            <a:avLst/>
           </a:prstGeom>
           <a:solidFill xmlns:a="http://schemas.openxmlformats.org/drawingml/2006/main">
             <a:srgbClr val="1174B7"/>
@@ -10977,33 +11187,35 @@
           <p:cNvPr id="12" name="">
             <a:extLst xmlns:a="http://schemas.openxmlformats.org/drawingml/2006/main">
               <a:ext uri="{FF2B5EF4-FFF2-40B4-BE49-F238E27FC236}">
-                <a16:creationId xmlns:a16="http://schemas.microsoft.com/office/drawing/2014/main" id="{582EF3B2-9FD1-4645-B06E-296DDBCEF0D1}"/>
-              </a:ext>
-            </a:extLst>
-          </p:cNvPr>
-          <p:cNvSpPr>
-            <a:spLocks xmlns:a="http://schemas.openxmlformats.org/drawingml/2006/main" noGrp="1"/>
-          </p:cNvSpPr>
-          <p:nvPr/>
-        </p:nvSpPr>
-        <p:spPr>
-          <a:xfrm xmlns:a="http://schemas.openxmlformats.org/drawingml/2006/main">
-            <a:off x="5114925" y="2200275"/>
-            <a:ext cx="704850" cy="381000"/>
-          </a:xfrm>
-          <a:prstGeom xmlns:a="http://schemas.openxmlformats.org/drawingml/2006/main" prst="rect">
-            <a:avLst/>
-          </a:prstGeom>
-          <a:noFill xmlns:a="http://schemas.openxmlformats.org/drawingml/2006/main"/>
-          <a:ln xmlns:a="http://schemas.openxmlformats.org/drawingml/2006/main" w="0">
-            <a:noFill/>
-          </a:ln>
-        </p:spPr>
-        <p:txBody>
-          <a:bodyPr xmlns:a="http://schemas.openxmlformats.org/drawingml/2006/main"/>
-          <a:lstStyle xmlns:a="http://schemas.openxmlformats.org/drawingml/2006/main"/>
-          <a:p xmlns:a="http://schemas.openxmlformats.org/drawingml/2006/main">
-            <a:pPr>
+                <a16:creationId xmlns:a16="http://schemas.microsoft.com/office/drawing/2014/main" id="{65CCAC63-E7E9-4C97-B03D-3DE1EC66831C}"/>
+              </a:ext>
+            </a:extLst>
+          </p:cNvPr>
+          <p:cNvSpPr>
+            <a:spLocks xmlns:a="http://schemas.openxmlformats.org/drawingml/2006/main" noGrp="1"/>
+          </p:cNvSpPr>
+          <p:nvPr/>
+        </p:nvSpPr>
+        <p:spPr>
+          <a:xfrm xmlns:a="http://schemas.openxmlformats.org/drawingml/2006/main">
+            <a:off x="5114925" y="2047875"/>
+            <a:ext cx="704850" cy="704850"/>
+          </a:xfrm>
+          <a:prstGeom xmlns:a="http://schemas.openxmlformats.org/drawingml/2006/main" prst="rect">
+            <a:avLst/>
+          </a:prstGeom>
+          <a:noFill xmlns:a="http://schemas.openxmlformats.org/drawingml/2006/main"/>
+          <a:ln xmlns:a="http://schemas.openxmlformats.org/drawingml/2006/main" w="0">
+            <a:noFill/>
+          </a:ln>
+        </p:spPr>
+        <p:txBody>
+          <a:bodyPr xmlns:a="http://schemas.openxmlformats.org/drawingml/2006/main" lIns="0" tIns="0" rIns="0" bIns="0" anchor="ctr">
+            <a:normAutofit fontScale="100000"/>
+          </a:bodyPr>
+          <a:lstStyle xmlns:a="http://schemas.openxmlformats.org/drawingml/2006/main"/>
+          <a:p xmlns:a="http://schemas.openxmlformats.org/drawingml/2006/main">
+            <a:pPr algn="ctr">
               <a:defRPr sz="1725" b="1">
                 <a:solidFill>
                   <a:srgbClr val="FFFFFF"/>
@@ -11032,7 +11244,7 @@
           <p:cNvPr id="13" name="">
             <a:extLst xmlns:a="http://schemas.openxmlformats.org/drawingml/2006/main">
               <a:ext uri="{FF2B5EF4-FFF2-40B4-BE49-F238E27FC236}">
-                <a16:creationId xmlns:a16="http://schemas.microsoft.com/office/drawing/2014/main" id="{F52364FA-970F-414A-A72F-EAF0774AB275}"/>
+                <a16:creationId xmlns:a16="http://schemas.microsoft.com/office/drawing/2014/main" id="{8AF8F775-52D8-44BD-AF3A-2D1C8F6AC681}"/>
               </a:ext>
             </a:extLst>
           </p:cNvPr>
@@ -11055,7 +11267,9 @@
           </a:ln>
         </p:spPr>
         <p:txBody>
-          <a:bodyPr xmlns:a="http://schemas.openxmlformats.org/drawingml/2006/main"/>
+          <a:bodyPr xmlns:a="http://schemas.openxmlformats.org/drawingml/2006/main">
+            <a:normAutofit fontScale="100000"/>
+          </a:bodyPr>
           <a:lstStyle xmlns:a="http://schemas.openxmlformats.org/drawingml/2006/main"/>
           <a:p xmlns:a="http://schemas.openxmlformats.org/drawingml/2006/main">
             <a:pPr>
@@ -11087,7 +11301,7 @@
           <p:cNvPr id="14" name="">
             <a:extLst xmlns:a="http://schemas.openxmlformats.org/drawingml/2006/main">
               <a:ext uri="{FF2B5EF4-FFF2-40B4-BE49-F238E27FC236}">
-                <a16:creationId xmlns:a16="http://schemas.microsoft.com/office/drawing/2014/main" id="{143F0E85-F28F-4F69-9DFC-98412CB73E96}"/>
+                <a16:creationId xmlns:a16="http://schemas.microsoft.com/office/drawing/2014/main" id="{54214660-1F02-4CEB-B7FA-FE1525232A97}"/>
               </a:ext>
             </a:extLst>
           </p:cNvPr>
@@ -11110,7 +11324,9 @@
           </a:ln>
         </p:spPr>
         <p:txBody>
-          <a:bodyPr xmlns:a="http://schemas.openxmlformats.org/drawingml/2006/main"/>
+          <a:bodyPr xmlns:a="http://schemas.openxmlformats.org/drawingml/2006/main">
+            <a:normAutofit fontScale="96078"/>
+          </a:bodyPr>
           <a:lstStyle xmlns:a="http://schemas.openxmlformats.org/drawingml/2006/main"/>
           <a:p xmlns:a="http://schemas.openxmlformats.org/drawingml/2006/main">
             <a:pPr>
@@ -11142,7 +11358,7 @@
           <p:cNvPr id="15" name="">
             <a:extLst xmlns:a="http://schemas.openxmlformats.org/drawingml/2006/main">
               <a:ext uri="{FF2B5EF4-FFF2-40B4-BE49-F238E27FC236}">
-                <a16:creationId xmlns:a16="http://schemas.microsoft.com/office/drawing/2014/main" id="{68DC318A-EDA1-4107-9624-86779A9CA0B2}"/>
+                <a16:creationId xmlns:a16="http://schemas.microsoft.com/office/drawing/2014/main" id="{28DF1878-6787-4BC0-B41C-1881B0DA11E4}"/>
               </a:ext>
             </a:extLst>
           </p:cNvPr>
@@ -11156,10 +11372,8 @@
             <a:off x="7305675" y="2047875"/>
             <a:ext cx="704850" cy="704850"/>
           </a:xfrm>
-          <a:prstGeom xmlns:a="http://schemas.openxmlformats.org/drawingml/2006/main" prst="roundRect">
-            <a:avLst>
-              <a:gd name="adj" fmla="val 50000"/>
-            </a:avLst>
+          <a:prstGeom xmlns:a="http://schemas.openxmlformats.org/drawingml/2006/main" prst="ellipse">
+            <a:avLst/>
           </a:prstGeom>
           <a:solidFill xmlns:a="http://schemas.openxmlformats.org/drawingml/2006/main">
             <a:srgbClr val="1174B7"/>
@@ -11176,33 +11390,35 @@
           <p:cNvPr id="16" name="">
             <a:extLst xmlns:a="http://schemas.openxmlformats.org/drawingml/2006/main">
               <a:ext uri="{FF2B5EF4-FFF2-40B4-BE49-F238E27FC236}">
-                <a16:creationId xmlns:a16="http://schemas.microsoft.com/office/drawing/2014/main" id="{27849DEA-B110-4B2E-848F-9E1917A60405}"/>
-              </a:ext>
-            </a:extLst>
-          </p:cNvPr>
-          <p:cNvSpPr>
-            <a:spLocks xmlns:a="http://schemas.openxmlformats.org/drawingml/2006/main" noGrp="1"/>
-          </p:cNvSpPr>
-          <p:nvPr/>
-        </p:nvSpPr>
-        <p:spPr>
-          <a:xfrm xmlns:a="http://schemas.openxmlformats.org/drawingml/2006/main">
-            <a:off x="7305675" y="2200275"/>
-            <a:ext cx="704850" cy="381000"/>
-          </a:xfrm>
-          <a:prstGeom xmlns:a="http://schemas.openxmlformats.org/drawingml/2006/main" prst="rect">
-            <a:avLst/>
-          </a:prstGeom>
-          <a:noFill xmlns:a="http://schemas.openxmlformats.org/drawingml/2006/main"/>
-          <a:ln xmlns:a="http://schemas.openxmlformats.org/drawingml/2006/main" w="0">
-            <a:noFill/>
-          </a:ln>
-        </p:spPr>
-        <p:txBody>
-          <a:bodyPr xmlns:a="http://schemas.openxmlformats.org/drawingml/2006/main"/>
-          <a:lstStyle xmlns:a="http://schemas.openxmlformats.org/drawingml/2006/main"/>
-          <a:p xmlns:a="http://schemas.openxmlformats.org/drawingml/2006/main">
-            <a:pPr>
+                <a16:creationId xmlns:a16="http://schemas.microsoft.com/office/drawing/2014/main" id="{B514B982-0466-4A91-BECA-1140C7225008}"/>
+              </a:ext>
+            </a:extLst>
+          </p:cNvPr>
+          <p:cNvSpPr>
+            <a:spLocks xmlns:a="http://schemas.openxmlformats.org/drawingml/2006/main" noGrp="1"/>
+          </p:cNvSpPr>
+          <p:nvPr/>
+        </p:nvSpPr>
+        <p:spPr>
+          <a:xfrm xmlns:a="http://schemas.openxmlformats.org/drawingml/2006/main">
+            <a:off x="7305675" y="2047875"/>
+            <a:ext cx="704850" cy="704850"/>
+          </a:xfrm>
+          <a:prstGeom xmlns:a="http://schemas.openxmlformats.org/drawingml/2006/main" prst="rect">
+            <a:avLst/>
+          </a:prstGeom>
+          <a:noFill xmlns:a="http://schemas.openxmlformats.org/drawingml/2006/main"/>
+          <a:ln xmlns:a="http://schemas.openxmlformats.org/drawingml/2006/main" w="0">
+            <a:noFill/>
+          </a:ln>
+        </p:spPr>
+        <p:txBody>
+          <a:bodyPr xmlns:a="http://schemas.openxmlformats.org/drawingml/2006/main" lIns="0" tIns="0" rIns="0" bIns="0" anchor="ctr">
+            <a:normAutofit fontScale="100000"/>
+          </a:bodyPr>
+          <a:lstStyle xmlns:a="http://schemas.openxmlformats.org/drawingml/2006/main"/>
+          <a:p xmlns:a="http://schemas.openxmlformats.org/drawingml/2006/main">
+            <a:pPr algn="ctr">
               <a:defRPr sz="1725" b="1">
                 <a:solidFill>
                   <a:srgbClr val="FFFFFF"/>
@@ -11231,7 +11447,7 @@
           <p:cNvPr id="17" name="">
             <a:extLst xmlns:a="http://schemas.openxmlformats.org/drawingml/2006/main">
               <a:ext uri="{FF2B5EF4-FFF2-40B4-BE49-F238E27FC236}">
-                <a16:creationId xmlns:a16="http://schemas.microsoft.com/office/drawing/2014/main" id="{69C7EB7F-47AC-4458-AFCD-CA6498A37ECD}"/>
+                <a16:creationId xmlns:a16="http://schemas.microsoft.com/office/drawing/2014/main" id="{AA0A91A0-26B1-4114-AB53-3FB0333F488B}"/>
               </a:ext>
             </a:extLst>
           </p:cNvPr>
@@ -11254,7 +11470,9 @@
           </a:ln>
         </p:spPr>
         <p:txBody>
-          <a:bodyPr xmlns:a="http://schemas.openxmlformats.org/drawingml/2006/main"/>
+          <a:bodyPr xmlns:a="http://schemas.openxmlformats.org/drawingml/2006/main">
+            <a:normAutofit fontScale="100000"/>
+          </a:bodyPr>
           <a:lstStyle xmlns:a="http://schemas.openxmlformats.org/drawingml/2006/main"/>
           <a:p xmlns:a="http://schemas.openxmlformats.org/drawingml/2006/main">
             <a:pPr>
@@ -11286,7 +11504,7 @@
           <p:cNvPr id="18" name="">
             <a:extLst xmlns:a="http://schemas.openxmlformats.org/drawingml/2006/main">
               <a:ext uri="{FF2B5EF4-FFF2-40B4-BE49-F238E27FC236}">
-                <a16:creationId xmlns:a16="http://schemas.microsoft.com/office/drawing/2014/main" id="{0BB6C483-696B-4A80-B3FA-609BDEA2C62E}"/>
+                <a16:creationId xmlns:a16="http://schemas.microsoft.com/office/drawing/2014/main" id="{C3ED9208-44A4-400F-9877-9F155D18CEB0}"/>
               </a:ext>
             </a:extLst>
           </p:cNvPr>
@@ -11309,7 +11527,9 @@
           </a:ln>
         </p:spPr>
         <p:txBody>
-          <a:bodyPr xmlns:a="http://schemas.openxmlformats.org/drawingml/2006/main"/>
+          <a:bodyPr xmlns:a="http://schemas.openxmlformats.org/drawingml/2006/main">
+            <a:normAutofit fontScale="96078"/>
+          </a:bodyPr>
           <a:lstStyle xmlns:a="http://schemas.openxmlformats.org/drawingml/2006/main"/>
           <a:p xmlns:a="http://schemas.openxmlformats.org/drawingml/2006/main">
             <a:pPr>
@@ -11341,7 +11561,7 @@
           <p:cNvPr id="19" name="">
             <a:extLst xmlns:a="http://schemas.openxmlformats.org/drawingml/2006/main">
               <a:ext uri="{FF2B5EF4-FFF2-40B4-BE49-F238E27FC236}">
-                <a16:creationId xmlns:a16="http://schemas.microsoft.com/office/drawing/2014/main" id="{A4E32F38-EF91-4EB3-A5B2-1443D7507D8E}"/>
+                <a16:creationId xmlns:a16="http://schemas.microsoft.com/office/drawing/2014/main" id="{821349D8-623B-4AF6-9801-1B3A85D96A98}"/>
               </a:ext>
             </a:extLst>
           </p:cNvPr>
@@ -11355,10 +11575,8 @@
             <a:off x="9496425" y="2047875"/>
             <a:ext cx="704850" cy="704850"/>
           </a:xfrm>
-          <a:prstGeom xmlns:a="http://schemas.openxmlformats.org/drawingml/2006/main" prst="roundRect">
-            <a:avLst>
-              <a:gd name="adj" fmla="val 50000"/>
-            </a:avLst>
+          <a:prstGeom xmlns:a="http://schemas.openxmlformats.org/drawingml/2006/main" prst="ellipse">
+            <a:avLst/>
           </a:prstGeom>
           <a:solidFill xmlns:a="http://schemas.openxmlformats.org/drawingml/2006/main">
             <a:srgbClr val="1174B7"/>
@@ -11375,33 +11593,35 @@
           <p:cNvPr id="20" name="">
             <a:extLst xmlns:a="http://schemas.openxmlformats.org/drawingml/2006/main">
               <a:ext uri="{FF2B5EF4-FFF2-40B4-BE49-F238E27FC236}">
-                <a16:creationId xmlns:a16="http://schemas.microsoft.com/office/drawing/2014/main" id="{7F405BA3-EDD9-4984-9B04-0D1B803A8177}"/>
-              </a:ext>
-            </a:extLst>
-          </p:cNvPr>
-          <p:cNvSpPr>
-            <a:spLocks xmlns:a="http://schemas.openxmlformats.org/drawingml/2006/main" noGrp="1"/>
-          </p:cNvSpPr>
-          <p:nvPr/>
-        </p:nvSpPr>
-        <p:spPr>
-          <a:xfrm xmlns:a="http://schemas.openxmlformats.org/drawingml/2006/main">
-            <a:off x="9496425" y="2200275"/>
-            <a:ext cx="704850" cy="381000"/>
-          </a:xfrm>
-          <a:prstGeom xmlns:a="http://schemas.openxmlformats.org/drawingml/2006/main" prst="rect">
-            <a:avLst/>
-          </a:prstGeom>
-          <a:noFill xmlns:a="http://schemas.openxmlformats.org/drawingml/2006/main"/>
-          <a:ln xmlns:a="http://schemas.openxmlformats.org/drawingml/2006/main" w="0">
-            <a:noFill/>
-          </a:ln>
-        </p:spPr>
-        <p:txBody>
-          <a:bodyPr xmlns:a="http://schemas.openxmlformats.org/drawingml/2006/main"/>
-          <a:lstStyle xmlns:a="http://schemas.openxmlformats.org/drawingml/2006/main"/>
-          <a:p xmlns:a="http://schemas.openxmlformats.org/drawingml/2006/main">
-            <a:pPr>
+                <a16:creationId xmlns:a16="http://schemas.microsoft.com/office/drawing/2014/main" id="{0CF6B727-D6E1-4634-B991-E3A087E40AE1}"/>
+              </a:ext>
+            </a:extLst>
+          </p:cNvPr>
+          <p:cNvSpPr>
+            <a:spLocks xmlns:a="http://schemas.openxmlformats.org/drawingml/2006/main" noGrp="1"/>
+          </p:cNvSpPr>
+          <p:nvPr/>
+        </p:nvSpPr>
+        <p:spPr>
+          <a:xfrm xmlns:a="http://schemas.openxmlformats.org/drawingml/2006/main">
+            <a:off x="9496425" y="2047875"/>
+            <a:ext cx="704850" cy="704850"/>
+          </a:xfrm>
+          <a:prstGeom xmlns:a="http://schemas.openxmlformats.org/drawingml/2006/main" prst="rect">
+            <a:avLst/>
+          </a:prstGeom>
+          <a:noFill xmlns:a="http://schemas.openxmlformats.org/drawingml/2006/main"/>
+          <a:ln xmlns:a="http://schemas.openxmlformats.org/drawingml/2006/main" w="0">
+            <a:noFill/>
+          </a:ln>
+        </p:spPr>
+        <p:txBody>
+          <a:bodyPr xmlns:a="http://schemas.openxmlformats.org/drawingml/2006/main" lIns="0" tIns="0" rIns="0" bIns="0" anchor="ctr">
+            <a:normAutofit fontScale="100000"/>
+          </a:bodyPr>
+          <a:lstStyle xmlns:a="http://schemas.openxmlformats.org/drawingml/2006/main"/>
+          <a:p xmlns:a="http://schemas.openxmlformats.org/drawingml/2006/main">
+            <a:pPr algn="ctr">
               <a:defRPr sz="1725" b="1">
                 <a:solidFill>
                   <a:srgbClr val="FFFFFF"/>
@@ -11430,7 +11650,7 @@
           <p:cNvPr id="21" name="">
             <a:extLst xmlns:a="http://schemas.openxmlformats.org/drawingml/2006/main">
               <a:ext uri="{FF2B5EF4-FFF2-40B4-BE49-F238E27FC236}">
-                <a16:creationId xmlns:a16="http://schemas.microsoft.com/office/drawing/2014/main" id="{50DDCA07-D8B4-45BB-B056-4FCBA8977369}"/>
+                <a16:creationId xmlns:a16="http://schemas.microsoft.com/office/drawing/2014/main" id="{D1524A42-9447-4785-91D3-0E1185B26E84}"/>
               </a:ext>
             </a:extLst>
           </p:cNvPr>
@@ -11453,7 +11673,9 @@
           </a:ln>
         </p:spPr>
         <p:txBody>
-          <a:bodyPr xmlns:a="http://schemas.openxmlformats.org/drawingml/2006/main"/>
+          <a:bodyPr xmlns:a="http://schemas.openxmlformats.org/drawingml/2006/main">
+            <a:normAutofit fontScale="100000"/>
+          </a:bodyPr>
           <a:lstStyle xmlns:a="http://schemas.openxmlformats.org/drawingml/2006/main"/>
           <a:p xmlns:a="http://schemas.openxmlformats.org/drawingml/2006/main">
             <a:pPr>
@@ -11485,7 +11707,7 @@
           <p:cNvPr id="22" name="">
             <a:extLst xmlns:a="http://schemas.openxmlformats.org/drawingml/2006/main">
               <a:ext uri="{FF2B5EF4-FFF2-40B4-BE49-F238E27FC236}">
-                <a16:creationId xmlns:a16="http://schemas.microsoft.com/office/drawing/2014/main" id="{EC367FEB-05A0-4BFF-B247-74FCC0EBCB18}"/>
+                <a16:creationId xmlns:a16="http://schemas.microsoft.com/office/drawing/2014/main" id="{57610C37-B6DA-40C1-9D75-A2006CFA7ABE}"/>
               </a:ext>
             </a:extLst>
           </p:cNvPr>
@@ -11508,7 +11730,9 @@
           </a:ln>
         </p:spPr>
         <p:txBody>
-          <a:bodyPr xmlns:a="http://schemas.openxmlformats.org/drawingml/2006/main"/>
+          <a:bodyPr xmlns:a="http://schemas.openxmlformats.org/drawingml/2006/main">
+            <a:normAutofit fontScale="100000"/>
+          </a:bodyPr>
           <a:lstStyle xmlns:a="http://schemas.openxmlformats.org/drawingml/2006/main"/>
           <a:p xmlns:a="http://schemas.openxmlformats.org/drawingml/2006/main">
             <a:pPr>
@@ -11540,7 +11764,7 @@
           <p:cNvPr id="23" name="">
             <a:extLst xmlns:a="http://schemas.openxmlformats.org/drawingml/2006/main">
               <a:ext uri="{FF2B5EF4-FFF2-40B4-BE49-F238E27FC236}">
-                <a16:creationId xmlns:a16="http://schemas.microsoft.com/office/drawing/2014/main" id="{3A2FC5C1-82D2-4506-8D50-7C422BF3CDAA}"/>
+                <a16:creationId xmlns:a16="http://schemas.microsoft.com/office/drawing/2014/main" id="{C85F2DC1-1598-4EFA-8A77-614F15BE5AC4}"/>
               </a:ext>
             </a:extLst>
           </p:cNvPr>
@@ -11574,7 +11798,7 @@
           <p:cNvPr id="24" name="">
             <a:extLst xmlns:a="http://schemas.openxmlformats.org/drawingml/2006/main">
               <a:ext uri="{FF2B5EF4-FFF2-40B4-BE49-F238E27FC236}">
-                <a16:creationId xmlns:a16="http://schemas.microsoft.com/office/drawing/2014/main" id="{E3B6A830-7862-4B87-AB9D-19E2EB4F6F9F}"/>
+                <a16:creationId xmlns:a16="http://schemas.microsoft.com/office/drawing/2014/main" id="{015374D6-E8BF-4FEE-8E9F-3CA02C958A1C}"/>
               </a:ext>
             </a:extLst>
           </p:cNvPr>
@@ -11597,7 +11821,9 @@
           </a:ln>
         </p:spPr>
         <p:txBody>
-          <a:bodyPr xmlns:a="http://schemas.openxmlformats.org/drawingml/2006/main"/>
+          <a:bodyPr xmlns:a="http://schemas.openxmlformats.org/drawingml/2006/main">
+            <a:normAutofit fontScale="69048"/>
+          </a:bodyPr>
           <a:lstStyle xmlns:a="http://schemas.openxmlformats.org/drawingml/2006/main"/>
           <a:p xmlns:a="http://schemas.openxmlformats.org/drawingml/2006/main">
             <a:pPr>
@@ -11629,7 +11855,7 @@
           <p:cNvPr id="25" name="">
             <a:extLst xmlns:a="http://schemas.openxmlformats.org/drawingml/2006/main">
               <a:ext uri="{FF2B5EF4-FFF2-40B4-BE49-F238E27FC236}">
-                <a16:creationId xmlns:a16="http://schemas.microsoft.com/office/drawing/2014/main" id="{23315DCD-B240-46B9-ACB1-C625D5AEA6B9}"/>
+                <a16:creationId xmlns:a16="http://schemas.microsoft.com/office/drawing/2014/main" id="{46DBBDB7-7967-4196-9AD3-FE4E48C6612E}"/>
               </a:ext>
             </a:extLst>
           </p:cNvPr>
@@ -11652,7 +11878,9 @@
           </a:ln>
         </p:spPr>
         <p:txBody>
-          <a:bodyPr xmlns:a="http://schemas.openxmlformats.org/drawingml/2006/main"/>
+          <a:bodyPr xmlns:a="http://schemas.openxmlformats.org/drawingml/2006/main">
+            <a:normAutofit fontScale="87466"/>
+          </a:bodyPr>
           <a:lstStyle xmlns:a="http://schemas.openxmlformats.org/drawingml/2006/main"/>
           <a:p xmlns:a="http://schemas.openxmlformats.org/drawingml/2006/main">
             <a:pPr>
@@ -11684,7 +11912,7 @@
           <p:cNvPr id="26" name="">
             <a:extLst xmlns:a="http://schemas.openxmlformats.org/drawingml/2006/main">
               <a:ext uri="{FF2B5EF4-FFF2-40B4-BE49-F238E27FC236}">
-                <a16:creationId xmlns:a16="http://schemas.microsoft.com/office/drawing/2014/main" id="{9C703615-C19F-4D3E-8941-BCB6FC7460AA}"/>
+                <a16:creationId xmlns:a16="http://schemas.microsoft.com/office/drawing/2014/main" id="{4F6F1432-E88F-4C1C-BAAB-E215ADB8B66E}"/>
               </a:ext>
             </a:extLst>
           </p:cNvPr>
@@ -11707,7 +11935,9 @@
           </a:ln>
         </p:spPr>
         <p:txBody>
-          <a:bodyPr xmlns:a="http://schemas.openxmlformats.org/drawingml/2006/main"/>
+          <a:bodyPr xmlns:a="http://schemas.openxmlformats.org/drawingml/2006/main">
+            <a:normAutofit fontScale="66667"/>
+          </a:bodyPr>
           <a:lstStyle xmlns:a="http://schemas.openxmlformats.org/drawingml/2006/main"/>
           <a:p xmlns:a="http://schemas.openxmlformats.org/drawingml/2006/main">
             <a:pPr>
@@ -11739,7 +11969,7 @@
           <p:cNvPr id="27" name="">
             <a:extLst xmlns:a="http://schemas.openxmlformats.org/drawingml/2006/main">
               <a:ext uri="{FF2B5EF4-FFF2-40B4-BE49-F238E27FC236}">
-                <a16:creationId xmlns:a16="http://schemas.microsoft.com/office/drawing/2014/main" id="{A4B5FB16-A5DD-470D-8363-35B7F152BD0F}"/>
+                <a16:creationId xmlns:a16="http://schemas.microsoft.com/office/drawing/2014/main" id="{E0FC1806-7E73-4556-ACB2-B577B22B231C}"/>
               </a:ext>
             </a:extLst>
           </p:cNvPr>
@@ -11762,10 +11992,12 @@
           </a:ln>
         </p:spPr>
         <p:txBody>
-          <a:bodyPr xmlns:a="http://schemas.openxmlformats.org/drawingml/2006/main"/>
-          <a:lstStyle xmlns:a="http://schemas.openxmlformats.org/drawingml/2006/main"/>
-          <a:p xmlns:a="http://schemas.openxmlformats.org/drawingml/2006/main">
-            <a:pPr>
+          <a:bodyPr xmlns:a="http://schemas.openxmlformats.org/drawingml/2006/main">
+            <a:normAutofit fontScale="66667"/>
+          </a:bodyPr>
+          <a:lstStyle xmlns:a="http://schemas.openxmlformats.org/drawingml/2006/main"/>
+          <a:p xmlns:a="http://schemas.openxmlformats.org/drawingml/2006/main">
+            <a:pPr algn="r">
               <a:defRPr sz="975" b="0">
                 <a:solidFill>
                   <a:srgbClr val="5C7083"/>
@@ -11792,7 +12024,7 @@
     </p:spTree>
     <p:extLst>
       <p:ext uri="{BB962C8B-B14F-4D97-AF65-F5344CB8AC3E}">
-        <p14:creationId xmlns:p14="http://schemas.microsoft.com/office/powerpoint/2010/main" val="713702784"/>
+        <p14:creationId xmlns:p14="http://schemas.microsoft.com/office/powerpoint/2010/main" val="1348038107"/>
       </p:ext>
     </p:extLst>
   </p:cSld>
@@ -11823,7 +12055,7 @@
           <p:cNvPr id="11" name="">
             <a:extLst xmlns:a="http://schemas.openxmlformats.org/drawingml/2006/main">
               <a:ext uri="{FF2B5EF4-FFF2-40B4-BE49-F238E27FC236}">
-                <a16:creationId xmlns:a16="http://schemas.microsoft.com/office/drawing/2014/main" id="{A90EE62D-35AF-43D0-9699-91164148706D}"/>
+                <a16:creationId xmlns:a16="http://schemas.microsoft.com/office/drawing/2014/main" id="{5470E3B0-97FA-4899-B31D-FE3AA826CDFF}"/>
               </a:ext>
             </a:extLst>
           </p:cNvPr>
@@ -11846,7 +12078,9 @@
           </a:ln>
         </p:spPr>
         <p:txBody>
-          <a:bodyPr xmlns:a="http://schemas.openxmlformats.org/drawingml/2006/main"/>
+          <a:bodyPr xmlns:a="http://schemas.openxmlformats.org/drawingml/2006/main">
+            <a:normAutofit fontScale="95175"/>
+          </a:bodyPr>
           <a:lstStyle xmlns:a="http://schemas.openxmlformats.org/drawingml/2006/main"/>
           <a:p xmlns:a="http://schemas.openxmlformats.org/drawingml/2006/main">
             <a:pPr>
@@ -11878,7 +12112,7 @@
           <p:cNvPr id="2" name="">
             <a:extLst xmlns:a="http://schemas.openxmlformats.org/drawingml/2006/main">
               <a:ext uri="{FF2B5EF4-FFF2-40B4-BE49-F238E27FC236}">
-                <a16:creationId xmlns:a16="http://schemas.microsoft.com/office/drawing/2014/main" id="{D0CC407B-BB1F-4F4D-B00E-A8407CB942B9}"/>
+                <a16:creationId xmlns:a16="http://schemas.microsoft.com/office/drawing/2014/main" id="{F1C82C7E-119E-4247-9AE3-7EA149BB9A85}"/>
               </a:ext>
             </a:extLst>
           </p:cNvPr>
@@ -11901,7 +12135,9 @@
           </a:ln>
         </p:spPr>
         <p:txBody>
-          <a:bodyPr xmlns:a="http://schemas.openxmlformats.org/drawingml/2006/main"/>
+          <a:bodyPr xmlns:a="http://schemas.openxmlformats.org/drawingml/2006/main">
+            <a:normAutofit fontScale="89167"/>
+          </a:bodyPr>
           <a:lstStyle xmlns:a="http://schemas.openxmlformats.org/drawingml/2006/main"/>
           <a:p xmlns:a="http://schemas.openxmlformats.org/drawingml/2006/main">
             <a:pPr>
@@ -11937,7 +12173,7 @@
           <p:nvPr/>
         </p:nvPicPr>
         <p:blipFill>
-          <a:blip xmlns:r="http://schemas.openxmlformats.org/officeDocument/2006/relationships" xmlns:a="http://schemas.openxmlformats.org/drawingml/2006/main" r:embed="R9088998727054a19"/>
+          <a:blip xmlns:r="http://schemas.openxmlformats.org/officeDocument/2006/relationships" xmlns:a="http://schemas.openxmlformats.org/drawingml/2006/main" r:embed="Rdce0b508c4c44a82"/>
           <a:srcRect xmlns:a="http://schemas.openxmlformats.org/drawingml/2006/main" l="1780" t="0" r="1780" b="0"/>
           <a:stretch xmlns:a="http://schemas.openxmlformats.org/drawingml/2006/main">
             <a:fillRect l="0" t="0" r="0" b="0"/>
@@ -11960,7 +12196,7 @@
           <p:cNvPr id="4" name="">
             <a:extLst xmlns:a="http://schemas.openxmlformats.org/drawingml/2006/main">
               <a:ext uri="{FF2B5EF4-FFF2-40B4-BE49-F238E27FC236}">
-                <a16:creationId xmlns:a16="http://schemas.microsoft.com/office/drawing/2014/main" id="{37BF934E-E5BD-4C09-AF35-C44AE96D862A}"/>
+                <a16:creationId xmlns:a16="http://schemas.microsoft.com/office/drawing/2014/main" id="{7E430AF6-420C-4A93-91CF-72A4653F1C09}"/>
               </a:ext>
             </a:extLst>
           </p:cNvPr>
@@ -11983,7 +12219,9 @@
           </a:ln>
         </p:spPr>
         <p:txBody>
-          <a:bodyPr xmlns:a="http://schemas.openxmlformats.org/drawingml/2006/main"/>
+          <a:bodyPr xmlns:a="http://schemas.openxmlformats.org/drawingml/2006/main">
+            <a:normAutofit fontScale="80952"/>
+          </a:bodyPr>
           <a:lstStyle xmlns:a="http://schemas.openxmlformats.org/drawingml/2006/main"/>
           <a:p xmlns:a="http://schemas.openxmlformats.org/drawingml/2006/main">
             <a:pPr>
@@ -12015,7 +12253,7 @@
           <p:cNvPr id="5" name="">
             <a:extLst xmlns:a="http://schemas.openxmlformats.org/drawingml/2006/main">
               <a:ext uri="{FF2B5EF4-FFF2-40B4-BE49-F238E27FC236}">
-                <a16:creationId xmlns:a16="http://schemas.microsoft.com/office/drawing/2014/main" id="{3EE81325-119D-4DE0-BC78-D9B4B43BA36E}"/>
+                <a16:creationId xmlns:a16="http://schemas.microsoft.com/office/drawing/2014/main" id="{F15E0373-135B-40F9-85A2-7396FBCF58C1}"/>
               </a:ext>
             </a:extLst>
           </p:cNvPr>
@@ -12038,7 +12276,9 @@
           </a:ln>
         </p:spPr>
         <p:txBody>
-          <a:bodyPr xmlns:a="http://schemas.openxmlformats.org/drawingml/2006/main"/>
+          <a:bodyPr xmlns:a="http://schemas.openxmlformats.org/drawingml/2006/main">
+            <a:normAutofit fontScale="100000"/>
+          </a:bodyPr>
           <a:lstStyle xmlns:a="http://schemas.openxmlformats.org/drawingml/2006/main"/>
           <a:p xmlns:a="http://schemas.openxmlformats.org/drawingml/2006/main">
             <a:pPr>
@@ -12074,7 +12314,7 @@
           <p:nvPr/>
         </p:nvPicPr>
         <p:blipFill>
-          <a:blip xmlns:r="http://schemas.openxmlformats.org/officeDocument/2006/relationships" xmlns:a="http://schemas.openxmlformats.org/drawingml/2006/main" r:embed="R70846481849b463b"/>
+          <a:blip xmlns:r="http://schemas.openxmlformats.org/officeDocument/2006/relationships" xmlns:a="http://schemas.openxmlformats.org/drawingml/2006/main" r:embed="Ra184d1331c484bbd"/>
           <a:srcRect xmlns:a="http://schemas.openxmlformats.org/drawingml/2006/main" l="1780" t="0" r="1780" b="0"/>
           <a:stretch xmlns:a="http://schemas.openxmlformats.org/drawingml/2006/main">
             <a:fillRect l="0" t="0" r="0" b="0"/>
@@ -12097,7 +12337,7 @@
           <p:cNvPr id="7" name="">
             <a:extLst xmlns:a="http://schemas.openxmlformats.org/drawingml/2006/main">
               <a:ext uri="{FF2B5EF4-FFF2-40B4-BE49-F238E27FC236}">
-                <a16:creationId xmlns:a16="http://schemas.microsoft.com/office/drawing/2014/main" id="{FDBEFED6-3DF2-4CFE-8FCE-B24D3D39C3EE}"/>
+                <a16:creationId xmlns:a16="http://schemas.microsoft.com/office/drawing/2014/main" id="{4AF6CB97-CC1D-4C07-B5F0-73DEA9F1B0BE}"/>
               </a:ext>
             </a:extLst>
           </p:cNvPr>
@@ -12120,7 +12360,9 @@
           </a:ln>
         </p:spPr>
         <p:txBody>
-          <a:bodyPr xmlns:a="http://schemas.openxmlformats.org/drawingml/2006/main"/>
+          <a:bodyPr xmlns:a="http://schemas.openxmlformats.org/drawingml/2006/main">
+            <a:normAutofit fontScale="80952"/>
+          </a:bodyPr>
           <a:lstStyle xmlns:a="http://schemas.openxmlformats.org/drawingml/2006/main"/>
           <a:p xmlns:a="http://schemas.openxmlformats.org/drawingml/2006/main">
             <a:pPr>
@@ -12152,7 +12394,7 @@
           <p:cNvPr id="8" name="">
             <a:extLst xmlns:a="http://schemas.openxmlformats.org/drawingml/2006/main">
               <a:ext uri="{FF2B5EF4-FFF2-40B4-BE49-F238E27FC236}">
-                <a16:creationId xmlns:a16="http://schemas.microsoft.com/office/drawing/2014/main" id="{13DD02BB-668D-4084-B2BE-F6402B2DE271}"/>
+                <a16:creationId xmlns:a16="http://schemas.microsoft.com/office/drawing/2014/main" id="{00D71A89-510F-4635-930A-E9E3C5968363}"/>
               </a:ext>
             </a:extLst>
           </p:cNvPr>
@@ -12175,7 +12417,9 @@
           </a:ln>
         </p:spPr>
         <p:txBody>
-          <a:bodyPr xmlns:a="http://schemas.openxmlformats.org/drawingml/2006/main"/>
+          <a:bodyPr xmlns:a="http://schemas.openxmlformats.org/drawingml/2006/main">
+            <a:normAutofit fontScale="100000"/>
+          </a:bodyPr>
           <a:lstStyle xmlns:a="http://schemas.openxmlformats.org/drawingml/2006/main"/>
           <a:p xmlns:a="http://schemas.openxmlformats.org/drawingml/2006/main">
             <a:pPr>
@@ -12207,7 +12451,7 @@
           <p:cNvPr id="9" name="">
             <a:extLst xmlns:a="http://schemas.openxmlformats.org/drawingml/2006/main">
               <a:ext uri="{FF2B5EF4-FFF2-40B4-BE49-F238E27FC236}">
-                <a16:creationId xmlns:a16="http://schemas.microsoft.com/office/drawing/2014/main" id="{FA5924D0-D71D-48EE-9C59-E92096A8CFAB}"/>
+                <a16:creationId xmlns:a16="http://schemas.microsoft.com/office/drawing/2014/main" id="{9B210CE9-D603-4F3F-A627-2CEC9CBB3E8A}"/>
               </a:ext>
             </a:extLst>
           </p:cNvPr>
@@ -12230,7 +12474,9 @@
           </a:ln>
         </p:spPr>
         <p:txBody>
-          <a:bodyPr xmlns:a="http://schemas.openxmlformats.org/drawingml/2006/main"/>
+          <a:bodyPr xmlns:a="http://schemas.openxmlformats.org/drawingml/2006/main">
+            <a:normAutofit fontScale="66667"/>
+          </a:bodyPr>
           <a:lstStyle xmlns:a="http://schemas.openxmlformats.org/drawingml/2006/main"/>
           <a:p xmlns:a="http://schemas.openxmlformats.org/drawingml/2006/main">
             <a:pPr>
@@ -12262,7 +12508,7 @@
           <p:cNvPr id="10" name="">
             <a:extLst xmlns:a="http://schemas.openxmlformats.org/drawingml/2006/main">
               <a:ext uri="{FF2B5EF4-FFF2-40B4-BE49-F238E27FC236}">
-                <a16:creationId xmlns:a16="http://schemas.microsoft.com/office/drawing/2014/main" id="{0935DF83-94CD-456A-8FBE-55CA563D7669}"/>
+                <a16:creationId xmlns:a16="http://schemas.microsoft.com/office/drawing/2014/main" id="{37382668-5078-4014-9138-5A9D9E8D9D06}"/>
               </a:ext>
             </a:extLst>
           </p:cNvPr>
@@ -12285,10 +12531,12 @@
           </a:ln>
         </p:spPr>
         <p:txBody>
-          <a:bodyPr xmlns:a="http://schemas.openxmlformats.org/drawingml/2006/main"/>
-          <a:lstStyle xmlns:a="http://schemas.openxmlformats.org/drawingml/2006/main"/>
-          <a:p xmlns:a="http://schemas.openxmlformats.org/drawingml/2006/main">
-            <a:pPr>
+          <a:bodyPr xmlns:a="http://schemas.openxmlformats.org/drawingml/2006/main">
+            <a:normAutofit fontScale="66667"/>
+          </a:bodyPr>
+          <a:lstStyle xmlns:a="http://schemas.openxmlformats.org/drawingml/2006/main"/>
+          <a:p xmlns:a="http://schemas.openxmlformats.org/drawingml/2006/main">
+            <a:pPr algn="r">
               <a:defRPr sz="975" b="0">
                 <a:solidFill>
                   <a:srgbClr val="5C7083"/>
@@ -12315,7 +12563,7 @@
     </p:spTree>
     <p:extLst>
       <p:ext uri="{BB962C8B-B14F-4D97-AF65-F5344CB8AC3E}">
-        <p14:creationId xmlns:p14="http://schemas.microsoft.com/office/powerpoint/2010/main" val="770675307"/>
+        <p14:creationId xmlns:p14="http://schemas.microsoft.com/office/powerpoint/2010/main" val="288352258"/>
       </p:ext>
     </p:extLst>
   </p:cSld>
@@ -12346,7 +12594,7 @@
           <p:cNvPr id="11" name="">
             <a:extLst xmlns:a="http://schemas.openxmlformats.org/drawingml/2006/main">
               <a:ext uri="{FF2B5EF4-FFF2-40B4-BE49-F238E27FC236}">
-                <a16:creationId xmlns:a16="http://schemas.microsoft.com/office/drawing/2014/main" id="{FB92FF26-36A0-42F3-A268-8109B62044D6}"/>
+                <a16:creationId xmlns:a16="http://schemas.microsoft.com/office/drawing/2014/main" id="{2F1A9D72-BC43-426C-BA64-B6697768A005}"/>
               </a:ext>
             </a:extLst>
           </p:cNvPr>
@@ -12369,7 +12617,9 @@
           </a:ln>
         </p:spPr>
         <p:txBody>
-          <a:bodyPr xmlns:a="http://schemas.openxmlformats.org/drawingml/2006/main"/>
+          <a:bodyPr xmlns:a="http://schemas.openxmlformats.org/drawingml/2006/main">
+            <a:normAutofit fontScale="95175"/>
+          </a:bodyPr>
           <a:lstStyle xmlns:a="http://schemas.openxmlformats.org/drawingml/2006/main"/>
           <a:p xmlns:a="http://schemas.openxmlformats.org/drawingml/2006/main">
             <a:pPr>
@@ -12405,7 +12655,7 @@
           <p:nvPr/>
         </p:nvPicPr>
         <p:blipFill>
-          <a:blip xmlns:r="http://schemas.openxmlformats.org/officeDocument/2006/relationships" xmlns:a="http://schemas.openxmlformats.org/drawingml/2006/main" r:embed="R5146ce91ba4441a1"/>
+          <a:blip xmlns:r="http://schemas.openxmlformats.org/officeDocument/2006/relationships" xmlns:a="http://schemas.openxmlformats.org/drawingml/2006/main" r:embed="R6b636ee63df04cb8"/>
           <a:srcRect xmlns:a="http://schemas.openxmlformats.org/drawingml/2006/main" l="8882" t="0" r="8882" b="0"/>
           <a:stretch xmlns:a="http://schemas.openxmlformats.org/drawingml/2006/main">
             <a:fillRect l="0" t="0" r="0" b="0"/>
@@ -12428,7 +12678,7 @@
           <p:cNvPr id="3" name="">
             <a:extLst xmlns:a="http://schemas.openxmlformats.org/drawingml/2006/main">
               <a:ext uri="{FF2B5EF4-FFF2-40B4-BE49-F238E27FC236}">
-                <a16:creationId xmlns:a16="http://schemas.microsoft.com/office/drawing/2014/main" id="{8DF8C8D0-3253-4CFE-86D5-9BF6695FF03E}"/>
+                <a16:creationId xmlns:a16="http://schemas.microsoft.com/office/drawing/2014/main" id="{486BC82E-1420-42F3-AC35-CB605F3543B4}"/>
               </a:ext>
             </a:extLst>
           </p:cNvPr>
@@ -12451,7 +12701,9 @@
           </a:ln>
         </p:spPr>
         <p:txBody>
-          <a:bodyPr xmlns:a="http://schemas.openxmlformats.org/drawingml/2006/main"/>
+          <a:bodyPr xmlns:a="http://schemas.openxmlformats.org/drawingml/2006/main">
+            <a:normAutofit fontScale="78205"/>
+          </a:bodyPr>
           <a:lstStyle xmlns:a="http://schemas.openxmlformats.org/drawingml/2006/main"/>
           <a:p xmlns:a="http://schemas.openxmlformats.org/drawingml/2006/main">
             <a:pPr>
@@ -12483,7 +12735,7 @@
           <p:cNvPr id="4" name="">
             <a:extLst xmlns:a="http://schemas.openxmlformats.org/drawingml/2006/main">
               <a:ext uri="{FF2B5EF4-FFF2-40B4-BE49-F238E27FC236}">
-                <a16:creationId xmlns:a16="http://schemas.microsoft.com/office/drawing/2014/main" id="{C0F2A0B8-847A-405B-9CF9-82E82E1F4789}"/>
+                <a16:creationId xmlns:a16="http://schemas.microsoft.com/office/drawing/2014/main" id="{32A6FE0A-6B6D-432A-A9BD-91114A9BB850}"/>
               </a:ext>
             </a:extLst>
           </p:cNvPr>
@@ -12506,7 +12758,9 @@
           </a:ln>
         </p:spPr>
         <p:txBody>
-          <a:bodyPr xmlns:a="http://schemas.openxmlformats.org/drawingml/2006/main"/>
+          <a:bodyPr xmlns:a="http://schemas.openxmlformats.org/drawingml/2006/main">
+            <a:normAutofit fontScale="100000"/>
+          </a:bodyPr>
           <a:lstStyle xmlns:a="http://schemas.openxmlformats.org/drawingml/2006/main"/>
           <a:p xmlns:a="http://schemas.openxmlformats.org/drawingml/2006/main">
             <a:pPr>
@@ -12538,7 +12792,7 @@
           <p:cNvPr id="5" name="">
             <a:extLst xmlns:a="http://schemas.openxmlformats.org/drawingml/2006/main">
               <a:ext uri="{FF2B5EF4-FFF2-40B4-BE49-F238E27FC236}">
-                <a16:creationId xmlns:a16="http://schemas.microsoft.com/office/drawing/2014/main" id="{1CCDEC1F-73B1-4F63-AC53-944C02C2BF7B}"/>
+                <a16:creationId xmlns:a16="http://schemas.microsoft.com/office/drawing/2014/main" id="{D6D9111B-D34D-46C3-9C4B-A2FCA72BA66D}"/>
               </a:ext>
             </a:extLst>
           </p:cNvPr>
@@ -12561,7 +12815,9 @@
           </a:ln>
         </p:spPr>
         <p:txBody>
-          <a:bodyPr xmlns:a="http://schemas.openxmlformats.org/drawingml/2006/main"/>
+          <a:bodyPr xmlns:a="http://schemas.openxmlformats.org/drawingml/2006/main">
+            <a:normAutofit fontScale="89167"/>
+          </a:bodyPr>
           <a:lstStyle xmlns:a="http://schemas.openxmlformats.org/drawingml/2006/main"/>
           <a:p xmlns:a="http://schemas.openxmlformats.org/drawingml/2006/main">
             <a:pPr>
@@ -12593,7 +12849,7 @@
           <p:cNvPr id="6" name="">
             <a:extLst xmlns:a="http://schemas.openxmlformats.org/drawingml/2006/main">
               <a:ext uri="{FF2B5EF4-FFF2-40B4-BE49-F238E27FC236}">
-                <a16:creationId xmlns:a16="http://schemas.microsoft.com/office/drawing/2014/main" id="{F8EC39E3-1E84-4A8F-9627-56545178426C}"/>
+                <a16:creationId xmlns:a16="http://schemas.microsoft.com/office/drawing/2014/main" id="{4663DBB8-A04F-4875-871B-2B464EFF02DE}"/>
               </a:ext>
             </a:extLst>
           </p:cNvPr>
@@ -12616,7 +12872,9 @@
           </a:ln>
         </p:spPr>
         <p:txBody>
-          <a:bodyPr xmlns:a="http://schemas.openxmlformats.org/drawingml/2006/main"/>
+          <a:bodyPr xmlns:a="http://schemas.openxmlformats.org/drawingml/2006/main">
+            <a:normAutofit fontScale="89167"/>
+          </a:bodyPr>
           <a:lstStyle xmlns:a="http://schemas.openxmlformats.org/drawingml/2006/main"/>
           <a:p xmlns:a="http://schemas.openxmlformats.org/drawingml/2006/main">
             <a:pPr>
@@ -12648,7 +12906,7 @@
           <p:cNvPr id="7" name="">
             <a:extLst xmlns:a="http://schemas.openxmlformats.org/drawingml/2006/main">
               <a:ext uri="{FF2B5EF4-FFF2-40B4-BE49-F238E27FC236}">
-                <a16:creationId xmlns:a16="http://schemas.microsoft.com/office/drawing/2014/main" id="{E88792C2-B05A-4418-859E-75710CFF62FB}"/>
+                <a16:creationId xmlns:a16="http://schemas.microsoft.com/office/drawing/2014/main" id="{AED014D1-1CE1-47A6-A51B-C616614A9885}"/>
               </a:ext>
             </a:extLst>
           </p:cNvPr>
@@ -12671,7 +12929,9 @@
           </a:ln>
         </p:spPr>
         <p:txBody>
-          <a:bodyPr xmlns:a="http://schemas.openxmlformats.org/drawingml/2006/main"/>
+          <a:bodyPr xmlns:a="http://schemas.openxmlformats.org/drawingml/2006/main">
+            <a:normAutofit fontScale="89167"/>
+          </a:bodyPr>
           <a:lstStyle xmlns:a="http://schemas.openxmlformats.org/drawingml/2006/main"/>
           <a:p xmlns:a="http://schemas.openxmlformats.org/drawingml/2006/main">
             <a:pPr>
@@ -12703,7 +12963,7 @@
           <p:cNvPr id="8" name="">
             <a:extLst xmlns:a="http://schemas.openxmlformats.org/drawingml/2006/main">
               <a:ext uri="{FF2B5EF4-FFF2-40B4-BE49-F238E27FC236}">
-                <a16:creationId xmlns:a16="http://schemas.microsoft.com/office/drawing/2014/main" id="{A0DB2B76-C6B1-4FB6-95EC-2C0FDD0FDF94}"/>
+                <a16:creationId xmlns:a16="http://schemas.microsoft.com/office/drawing/2014/main" id="{64443443-ED1E-49D8-BBAB-40801938F3A7}"/>
               </a:ext>
             </a:extLst>
           </p:cNvPr>
@@ -12726,7 +12986,9 @@
           </a:ln>
         </p:spPr>
         <p:txBody>
-          <a:bodyPr xmlns:a="http://schemas.openxmlformats.org/drawingml/2006/main"/>
+          <a:bodyPr xmlns:a="http://schemas.openxmlformats.org/drawingml/2006/main">
+            <a:normAutofit fontScale="95098"/>
+          </a:bodyPr>
           <a:lstStyle xmlns:a="http://schemas.openxmlformats.org/drawingml/2006/main"/>
           <a:p xmlns:a="http://schemas.openxmlformats.org/drawingml/2006/main">
             <a:pPr>
@@ -12758,7 +13020,7 @@
           <p:cNvPr id="9" name="">
             <a:extLst xmlns:a="http://schemas.openxmlformats.org/drawingml/2006/main">
               <a:ext uri="{FF2B5EF4-FFF2-40B4-BE49-F238E27FC236}">
-                <a16:creationId xmlns:a16="http://schemas.microsoft.com/office/drawing/2014/main" id="{999C346A-BF0A-4C5E-83BD-29049F1A2199}"/>
+                <a16:creationId xmlns:a16="http://schemas.microsoft.com/office/drawing/2014/main" id="{83E6CDB9-94D7-4F83-A326-9899631E3E3F}"/>
               </a:ext>
             </a:extLst>
           </p:cNvPr>
@@ -12781,7 +13043,9 @@
           </a:ln>
         </p:spPr>
         <p:txBody>
-          <a:bodyPr xmlns:a="http://schemas.openxmlformats.org/drawingml/2006/main"/>
+          <a:bodyPr xmlns:a="http://schemas.openxmlformats.org/drawingml/2006/main">
+            <a:normAutofit fontScale="66667"/>
+          </a:bodyPr>
           <a:lstStyle xmlns:a="http://schemas.openxmlformats.org/drawingml/2006/main"/>
           <a:p xmlns:a="http://schemas.openxmlformats.org/drawingml/2006/main">
             <a:pPr>
@@ -12813,7 +13077,7 @@
           <p:cNvPr id="10" name="">
             <a:extLst xmlns:a="http://schemas.openxmlformats.org/drawingml/2006/main">
               <a:ext uri="{FF2B5EF4-FFF2-40B4-BE49-F238E27FC236}">
-                <a16:creationId xmlns:a16="http://schemas.microsoft.com/office/drawing/2014/main" id="{17049D3A-8A49-4F47-9883-0893FEE6B120}"/>
+                <a16:creationId xmlns:a16="http://schemas.microsoft.com/office/drawing/2014/main" id="{D3D8A849-9622-40C3-959E-56DA563C0FC7}"/>
               </a:ext>
             </a:extLst>
           </p:cNvPr>
@@ -12836,10 +13100,12 @@
           </a:ln>
         </p:spPr>
         <p:txBody>
-          <a:bodyPr xmlns:a="http://schemas.openxmlformats.org/drawingml/2006/main"/>
-          <a:lstStyle xmlns:a="http://schemas.openxmlformats.org/drawingml/2006/main"/>
-          <a:p xmlns:a="http://schemas.openxmlformats.org/drawingml/2006/main">
-            <a:pPr>
+          <a:bodyPr xmlns:a="http://schemas.openxmlformats.org/drawingml/2006/main">
+            <a:normAutofit fontScale="66667"/>
+          </a:bodyPr>
+          <a:lstStyle xmlns:a="http://schemas.openxmlformats.org/drawingml/2006/main"/>
+          <a:p xmlns:a="http://schemas.openxmlformats.org/drawingml/2006/main">
+            <a:pPr algn="r">
               <a:defRPr sz="975" b="0">
                 <a:solidFill>
                   <a:srgbClr val="5C7083"/>
@@ -12866,7 +13132,7 @@
     </p:spTree>
     <p:extLst>
       <p:ext uri="{BB962C8B-B14F-4D97-AF65-F5344CB8AC3E}">
-        <p14:creationId xmlns:p14="http://schemas.microsoft.com/office/powerpoint/2010/main" val="260235025"/>
+        <p14:creationId xmlns:p14="http://schemas.microsoft.com/office/powerpoint/2010/main" val="65447045"/>
       </p:ext>
     </p:extLst>
   </p:cSld>
@@ -12897,7 +13163,7 @@
           <p:cNvPr id="4" name="">
             <a:extLst xmlns:a="http://schemas.openxmlformats.org/drawingml/2006/main">
               <a:ext uri="{FF2B5EF4-FFF2-40B4-BE49-F238E27FC236}">
-                <a16:creationId xmlns:a16="http://schemas.microsoft.com/office/drawing/2014/main" id="{5BF87665-1205-47EF-9009-4137BA819DF4}"/>
+                <a16:creationId xmlns:a16="http://schemas.microsoft.com/office/drawing/2014/main" id="{AECB80E3-A3C9-44A6-AC64-BD2BF9678999}"/>
               </a:ext>
             </a:extLst>
           </p:cNvPr>
@@ -12920,7 +13186,9 @@
           </a:ln>
         </p:spPr>
         <p:txBody>
-          <a:bodyPr xmlns:a="http://schemas.openxmlformats.org/drawingml/2006/main"/>
+          <a:bodyPr xmlns:a="http://schemas.openxmlformats.org/drawingml/2006/main">
+            <a:normAutofit fontScale="92857"/>
+          </a:bodyPr>
           <a:lstStyle xmlns:a="http://schemas.openxmlformats.org/drawingml/2006/main"/>
           <a:p xmlns:a="http://schemas.openxmlformats.org/drawingml/2006/main">
             <a:pPr>
@@ -12952,7 +13220,7 @@
           <p:cNvPr id="2" name="">
             <a:extLst xmlns:a="http://schemas.openxmlformats.org/drawingml/2006/main">
               <a:ext uri="{FF2B5EF4-FFF2-40B4-BE49-F238E27FC236}">
-                <a16:creationId xmlns:a16="http://schemas.microsoft.com/office/drawing/2014/main" id="{52CC4E90-1CE5-441D-A817-55D7C46BB368}"/>
+                <a16:creationId xmlns:a16="http://schemas.microsoft.com/office/drawing/2014/main" id="{DB1E4558-075B-44A5-94C0-98DA3BD0ECA9}"/>
               </a:ext>
             </a:extLst>
           </p:cNvPr>
@@ -12975,7 +13243,9 @@
           </a:ln>
         </p:spPr>
         <p:txBody>
-          <a:bodyPr xmlns:a="http://schemas.openxmlformats.org/drawingml/2006/main"/>
+          <a:bodyPr xmlns:a="http://schemas.openxmlformats.org/drawingml/2006/main">
+            <a:normAutofit fontScale="100000"/>
+          </a:bodyPr>
           <a:lstStyle xmlns:a="http://schemas.openxmlformats.org/drawingml/2006/main"/>
           <a:p xmlns:a="http://schemas.openxmlformats.org/drawingml/2006/main">
             <a:pPr>
@@ -13007,7 +13277,7 @@
           <p:cNvPr id="3" name="">
             <a:extLst xmlns:a="http://schemas.openxmlformats.org/drawingml/2006/main">
               <a:ext uri="{FF2B5EF4-FFF2-40B4-BE49-F238E27FC236}">
-                <a16:creationId xmlns:a16="http://schemas.microsoft.com/office/drawing/2014/main" id="{CC8F1121-E8B5-40FC-9D9F-118CDB0FCFF2}"/>
+                <a16:creationId xmlns:a16="http://schemas.microsoft.com/office/drawing/2014/main" id="{B830952D-D9DB-49C2-90AF-482E32DC1813}"/>
               </a:ext>
             </a:extLst>
           </p:cNvPr>
@@ -13030,7 +13300,9 @@
           </a:ln>
         </p:spPr>
         <p:txBody>
-          <a:bodyPr xmlns:a="http://schemas.openxmlformats.org/drawingml/2006/main"/>
+          <a:bodyPr xmlns:a="http://schemas.openxmlformats.org/drawingml/2006/main">
+            <a:normAutofit fontScale="88000"/>
+          </a:bodyPr>
           <a:lstStyle xmlns:a="http://schemas.openxmlformats.org/drawingml/2006/main"/>
           <a:p xmlns:a="http://schemas.openxmlformats.org/drawingml/2006/main">
             <a:pPr>
@@ -13060,7 +13332,7 @@
     </p:spTree>
     <p:extLst>
       <p:ext uri="{BB962C8B-B14F-4D97-AF65-F5344CB8AC3E}">
-        <p14:creationId xmlns:p14="http://schemas.microsoft.com/office/powerpoint/2010/main" val="111861321"/>
+        <p14:creationId xmlns:p14="http://schemas.microsoft.com/office/powerpoint/2010/main" val="1353361284"/>
       </p:ext>
     </p:extLst>
   </p:cSld>
